--- a/out/final/TEAMK_NightmareOnGitStreet_Slides.pptx
+++ b/out/final/TEAMK_NightmareOnGitStreet_Slides.pptx
@@ -14,15 +14,8 @@
     <p:sldId id="266" r:id="rId8"/>
     <p:sldId id="259" r:id="rId9"/>
     <p:sldId id="260" r:id="rId10"/>
-    <p:sldId id="267" r:id="rId11"/>
-    <p:sldId id="268" r:id="rId12"/>
-    <p:sldId id="261" r:id="rId13"/>
-    <p:sldId id="262" r:id="rId14"/>
-    <p:sldId id="269" r:id="rId15"/>
-    <p:sldId id="270" r:id="rId16"/>
     <p:sldId id="263" r:id="rId17"/>
     <p:sldId id="264" r:id="rId18"/>
-    <p:sldId id="265" r:id="rId19"/>
   </p:sldIdLst>
   <p:sldSz cx="12192000" cy="6858000"/>
   <p:notesSz cx="6858000" cy="12192000"/>
@@ -1631,90 +1624,6 @@
 </p:notes>
 </file>
 
-<file path=ppt/notesSlides/notesSlide10.xml><?xml version="1.0" encoding="utf-8"?>
-<p:notes xmlns:a="http://schemas.openxmlformats.org/drawingml/2006/main" xmlns:r="http://schemas.openxmlformats.org/officeDocument/2006/relationships" xmlns:p="http://schemas.openxmlformats.org/presentationml/2006/main">
-  <p:cSld>
-    <p:spTree>
-      <p:nvGrpSpPr>
-        <p:cNvPr id="1" name=""/>
-        <p:cNvGrpSpPr/>
-        <p:nvPr/>
-      </p:nvGrpSpPr>
-      <p:grpSpPr>
-        <a:xfrm>
-          <a:off x="0" y="0"/>
-          <a:ext cx="0" cy="0"/>
-          <a:chOff x="0" y="0"/>
-          <a:chExt cx="0" cy="0"/>
-        </a:xfrm>
-      </p:grpSpPr>
-      <p:sp>
-        <p:nvSpPr>
-          <p:cNvPr id="2" name="Slide Image Placeholder 1"/>
-          <p:cNvSpPr>
-            <a:spLocks noGrp="1" noRot="1" noChangeAspect="1"/>
-          </p:cNvSpPr>
-          <p:nvPr>
-            <p:ph type="sldImg"/>
-          </p:nvPr>
-        </p:nvSpPr>
-        <p:spPr/>
-      </p:sp>
-      <p:sp>
-        <p:nvSpPr>
-          <p:cNvPr id="3" name="Notes Placeholder 2"/>
-          <p:cNvSpPr>
-            <a:spLocks noGrp="1"/>
-          </p:cNvSpPr>
-          <p:nvPr>
-            <p:ph type="body" idx="1"/>
-          </p:nvPr>
-        </p:nvSpPr>
-        <p:spPr/>
-        <p:txBody>
-          <a:bodyPr/>
-          <a:lstStyle/>
-          <a:p>
-            <a:endParaRPr lang="en-US"/>
-          </a:p>
-        </p:txBody>
-      </p:sp>
-      <p:sp>
-        <p:nvSpPr>
-          <p:cNvPr id="4" name="Slide Number Placeholder 3"/>
-          <p:cNvSpPr>
-            <a:spLocks noGrp="1"/>
-          </p:cNvSpPr>
-          <p:nvPr>
-            <p:ph type="sldNum" sz="quarter" idx="10"/>
-          </p:nvPr>
-        </p:nvSpPr>
-        <p:spPr/>
-        <p:txBody>
-          <a:bodyPr/>
-          <a:lstStyle/>
-          <a:p>
-            <a:fld id="{F7021451-1387-4CA6-816F-3879F97B5CBC}" type="slidenum">
-              <a:rPr lang="en-US"/>
-              <a:t>15</a:t>
-            </a:fld>
-            <a:endParaRPr lang="en-US"/>
-          </a:p>
-        </p:txBody>
-      </p:sp>
-    </p:spTree>
-    <p:extLst>
-      <p:ext uri="{BB962C8B-B14F-4D97-AF65-F5344CB8AC3E}">
-        <p14:creationId xmlns:p14="http://schemas.microsoft.com/office/powerpoint/2010/main" val="1024086991"/>
-      </p:ext>
-    </p:extLst>
-  </p:cSld>
-  <p:clrMapOvr>
-    <a:masterClrMapping/>
-  </p:clrMapOvr>
-</p:notes>
-</file>
-
 <file path=ppt/notesSlides/notesSlide2.xml><?xml version="1.0" encoding="utf-8"?>
 <p:notes xmlns:a="http://schemas.openxmlformats.org/drawingml/2006/main" xmlns:r="http://schemas.openxmlformats.org/officeDocument/2006/relationships" xmlns:p="http://schemas.openxmlformats.org/presentationml/2006/main">
   <p:cSld>
@@ -2033,174 +1942,6 @@
             <a:fld id="{F7021451-1387-4CA6-816F-3879F97B5CBC}" type="slidenum">
               <a:rPr lang="en-US"/>
               <a:t>6</a:t>
-            </a:fld>
-            <a:endParaRPr lang="en-US"/>
-          </a:p>
-        </p:txBody>
-      </p:sp>
-    </p:spTree>
-    <p:extLst>
-      <p:ext uri="{BB962C8B-B14F-4D97-AF65-F5344CB8AC3E}">
-        <p14:creationId xmlns:p14="http://schemas.microsoft.com/office/powerpoint/2010/main" val="1024086991"/>
-      </p:ext>
-    </p:extLst>
-  </p:cSld>
-  <p:clrMapOvr>
-    <a:masterClrMapping/>
-  </p:clrMapOvr>
-</p:notes>
-</file>
-
-<file path=ppt/notesSlides/notesSlide6.xml><?xml version="1.0" encoding="utf-8"?>
-<p:notes xmlns:a="http://schemas.openxmlformats.org/drawingml/2006/main" xmlns:r="http://schemas.openxmlformats.org/officeDocument/2006/relationships" xmlns:p="http://schemas.openxmlformats.org/presentationml/2006/main">
-  <p:cSld>
-    <p:spTree>
-      <p:nvGrpSpPr>
-        <p:cNvPr id="1" name=""/>
-        <p:cNvGrpSpPr/>
-        <p:nvPr/>
-      </p:nvGrpSpPr>
-      <p:grpSpPr>
-        <a:xfrm>
-          <a:off x="0" y="0"/>
-          <a:ext cx="0" cy="0"/>
-          <a:chOff x="0" y="0"/>
-          <a:chExt cx="0" cy="0"/>
-        </a:xfrm>
-      </p:grpSpPr>
-      <p:sp>
-        <p:nvSpPr>
-          <p:cNvPr id="2" name="Slide Image Placeholder 1"/>
-          <p:cNvSpPr>
-            <a:spLocks noGrp="1" noRot="1" noChangeAspect="1"/>
-          </p:cNvSpPr>
-          <p:nvPr>
-            <p:ph type="sldImg"/>
-          </p:nvPr>
-        </p:nvSpPr>
-        <p:spPr/>
-      </p:sp>
-      <p:sp>
-        <p:nvSpPr>
-          <p:cNvPr id="3" name="Notes Placeholder 2"/>
-          <p:cNvSpPr>
-            <a:spLocks noGrp="1"/>
-          </p:cNvSpPr>
-          <p:nvPr>
-            <p:ph type="body" idx="1"/>
-          </p:nvPr>
-        </p:nvSpPr>
-        <p:spPr/>
-        <p:txBody>
-          <a:bodyPr/>
-          <a:lstStyle/>
-          <a:p>
-            <a:endParaRPr lang="en-US"/>
-          </a:p>
-        </p:txBody>
-      </p:sp>
-      <p:sp>
-        <p:nvSpPr>
-          <p:cNvPr id="4" name="Slide Number Placeholder 3"/>
-          <p:cNvSpPr>
-            <a:spLocks noGrp="1"/>
-          </p:cNvSpPr>
-          <p:nvPr>
-            <p:ph type="sldNum" sz="quarter" idx="10"/>
-          </p:nvPr>
-        </p:nvSpPr>
-        <p:spPr/>
-        <p:txBody>
-          <a:bodyPr/>
-          <a:lstStyle/>
-          <a:p>
-            <a:fld id="{F7021451-1387-4CA6-816F-3879F97B5CBC}" type="slidenum">
-              <a:rPr lang="en-US"/>
-              <a:t>9</a:t>
-            </a:fld>
-            <a:endParaRPr lang="en-US"/>
-          </a:p>
-        </p:txBody>
-      </p:sp>
-    </p:spTree>
-    <p:extLst>
-      <p:ext uri="{BB962C8B-B14F-4D97-AF65-F5344CB8AC3E}">
-        <p14:creationId xmlns:p14="http://schemas.microsoft.com/office/powerpoint/2010/main" val="1024086991"/>
-      </p:ext>
-    </p:extLst>
-  </p:cSld>
-  <p:clrMapOvr>
-    <a:masterClrMapping/>
-  </p:clrMapOvr>
-</p:notes>
-</file>
-
-<file path=ppt/notesSlides/notesSlide7.xml><?xml version="1.0" encoding="utf-8"?>
-<p:notes xmlns:a="http://schemas.openxmlformats.org/drawingml/2006/main" xmlns:r="http://schemas.openxmlformats.org/officeDocument/2006/relationships" xmlns:p="http://schemas.openxmlformats.org/presentationml/2006/main">
-  <p:cSld>
-    <p:spTree>
-      <p:nvGrpSpPr>
-        <p:cNvPr id="1" name=""/>
-        <p:cNvGrpSpPr/>
-        <p:nvPr/>
-      </p:nvGrpSpPr>
-      <p:grpSpPr>
-        <a:xfrm>
-          <a:off x="0" y="0"/>
-          <a:ext cx="0" cy="0"/>
-          <a:chOff x="0" y="0"/>
-          <a:chExt cx="0" cy="0"/>
-        </a:xfrm>
-      </p:grpSpPr>
-      <p:sp>
-        <p:nvSpPr>
-          <p:cNvPr id="2" name="Slide Image Placeholder 1"/>
-          <p:cNvSpPr>
-            <a:spLocks noGrp="1" noRot="1" noChangeAspect="1"/>
-          </p:cNvSpPr>
-          <p:nvPr>
-            <p:ph type="sldImg"/>
-          </p:nvPr>
-        </p:nvSpPr>
-        <p:spPr/>
-      </p:sp>
-      <p:sp>
-        <p:nvSpPr>
-          <p:cNvPr id="3" name="Notes Placeholder 2"/>
-          <p:cNvSpPr>
-            <a:spLocks noGrp="1"/>
-          </p:cNvSpPr>
-          <p:nvPr>
-            <p:ph type="body" idx="1"/>
-          </p:nvPr>
-        </p:nvSpPr>
-        <p:spPr/>
-        <p:txBody>
-          <a:bodyPr/>
-          <a:lstStyle/>
-          <a:p>
-            <a:endParaRPr lang="en-US"/>
-          </a:p>
-        </p:txBody>
-      </p:sp>
-      <p:sp>
-        <p:nvSpPr>
-          <p:cNvPr id="4" name="Slide Number Placeholder 3"/>
-          <p:cNvSpPr>
-            <a:spLocks noGrp="1"/>
-          </p:cNvSpPr>
-          <p:nvPr>
-            <p:ph type="sldNum" sz="quarter" idx="10"/>
-          </p:nvPr>
-        </p:nvSpPr>
-        <p:spPr/>
-        <p:txBody>
-          <a:bodyPr/>
-          <a:lstStyle/>
-          <a:p>
-            <a:fld id="{F7021451-1387-4CA6-816F-3879F97B5CBC}" type="slidenum">
-              <a:rPr lang="en-US"/>
-              <a:t>10</a:t>
             </a:fld>
             <a:endParaRPr lang="en-US"/>
           </a:p>
@@ -4861,3041 +4602,6 @@
 </p:sld>
 </file>
 
-<file path=ppt/slides/slide10.xml><?xml version="1.0" encoding="utf-8"?>
-<p:sld xmlns:a="http://schemas.openxmlformats.org/drawingml/2006/main" xmlns:r="http://schemas.openxmlformats.org/officeDocument/2006/relationships" xmlns:p="http://schemas.openxmlformats.org/presentationml/2006/main">
-  <p:cSld name="Slide 7">
-    <p:spTree>
-      <p:nvGrpSpPr>
-        <p:cNvPr id="1" name=""/>
-        <p:cNvGrpSpPr/>
-        <p:nvPr/>
-      </p:nvGrpSpPr>
-      <p:grpSpPr>
-        <a:xfrm>
-          <a:off x="0" y="0"/>
-          <a:ext cx="0" cy="0"/>
-          <a:chOff x="0" y="0"/>
-          <a:chExt cx="0" cy="0"/>
-        </a:xfrm>
-      </p:grpSpPr>
-      <p:sp>
-        <p:nvSpPr>
-          <p:cNvPr id="2" name="Shape 0"/>
-          <p:cNvSpPr/>
-          <p:nvPr/>
-        </p:nvSpPr>
-        <p:spPr>
-          <a:xfrm>
-            <a:off x="6675120" y="585216"/>
-            <a:ext cx="914400" cy="310896"/>
-          </a:xfrm>
-          <a:prstGeom prst="roundRect">
-            <a:avLst>
-              <a:gd name="adj" fmla="val 23529"/>
-            </a:avLst>
-          </a:prstGeom>
-          <a:solidFill>
-            <a:srgbClr val="152329">
-              <a:alpha val="82000"/>
-            </a:srgbClr>
-          </a:solidFill>
-          <a:ln w="12700">
-            <a:solidFill>
-              <a:srgbClr val="31434A"/>
-            </a:solidFill>
-            <a:prstDash val="solid"/>
-          </a:ln>
-        </p:spPr>
-        <p:txBody>
-          <a:bodyPr/>
-          <a:lstStyle/>
-          <a:p>
-            <a:endParaRPr/>
-          </a:p>
-        </p:txBody>
-      </p:sp>
-      <p:sp>
-        <p:nvSpPr>
-          <p:cNvPr id="3" name="Text 1"/>
-          <p:cNvSpPr/>
-          <p:nvPr/>
-        </p:nvSpPr>
-        <p:spPr>
-          <a:xfrm>
-            <a:off x="6675120" y="630936"/>
-            <a:ext cx="914400" cy="164592"/>
-          </a:xfrm>
-          <a:prstGeom prst="rect">
-            <a:avLst/>
-          </a:prstGeom>
-          <a:noFill/>
-          <a:ln/>
-        </p:spPr>
-        <p:txBody>
-          <a:bodyPr wrap="square" lIns="0" tIns="0" rIns="0" bIns="0" rtlCol="0" anchor="ctr"/>
-          <a:lstStyle/>
-          <a:p>
-            <a:pPr marL="0" indent="0" algn="ctr">
-              <a:buNone/>
-            </a:pPr>
-            <a:r>
-              <a:rPr lang="en-US" sz="920" b="1">
-                <a:solidFill>
-                  <a:srgbClr val="A7B4B8"/>
-                </a:solidFill>
-                <a:latin typeface="Arial" pitchFamily="34" charset="0"/>
-                <a:ea typeface="Arial" pitchFamily="34" charset="-122"/>
-                <a:cs typeface="Arial" pitchFamily="34" charset="-120"/>
-              </a:rPr>
-              <a:t>HUNT</a:t>
-            </a:r>
-            <a:endParaRPr lang="en-US" sz="920"/>
-          </a:p>
-        </p:txBody>
-      </p:sp>
-      <p:sp>
-        <p:nvSpPr>
-          <p:cNvPr id="4" name="Shape 2"/>
-          <p:cNvSpPr/>
-          <p:nvPr/>
-        </p:nvSpPr>
-        <p:spPr>
-          <a:xfrm>
-            <a:off x="7662672" y="585216"/>
-            <a:ext cx="914400" cy="310896"/>
-          </a:xfrm>
-          <a:prstGeom prst="roundRect">
-            <a:avLst>
-              <a:gd name="adj" fmla="val 23529"/>
-            </a:avLst>
-          </a:prstGeom>
-          <a:solidFill>
-            <a:srgbClr val="152329">
-              <a:alpha val="82000"/>
-            </a:srgbClr>
-          </a:solidFill>
-          <a:ln w="12700">
-            <a:solidFill>
-              <a:srgbClr val="31434A"/>
-            </a:solidFill>
-            <a:prstDash val="solid"/>
-          </a:ln>
-        </p:spPr>
-        <p:txBody>
-          <a:bodyPr/>
-          <a:lstStyle/>
-          <a:p>
-            <a:endParaRPr/>
-          </a:p>
-        </p:txBody>
-      </p:sp>
-      <p:sp>
-        <p:nvSpPr>
-          <p:cNvPr id="5" name="Text 3"/>
-          <p:cNvSpPr/>
-          <p:nvPr/>
-        </p:nvSpPr>
-        <p:spPr>
-          <a:xfrm>
-            <a:off x="7662672" y="630936"/>
-            <a:ext cx="914400" cy="164592"/>
-          </a:xfrm>
-          <a:prstGeom prst="rect">
-            <a:avLst/>
-          </a:prstGeom>
-          <a:noFill/>
-          <a:ln/>
-        </p:spPr>
-        <p:txBody>
-          <a:bodyPr wrap="square" lIns="0" tIns="0" rIns="0" bIns="0" rtlCol="0" anchor="ctr"/>
-          <a:lstStyle/>
-          <a:p>
-            <a:pPr marL="0" indent="0" algn="ctr">
-              <a:buNone/>
-            </a:pPr>
-            <a:r>
-              <a:rPr lang="en-US" sz="920" b="1">
-                <a:solidFill>
-                  <a:srgbClr val="A7B4B8"/>
-                </a:solidFill>
-                <a:latin typeface="Arial" pitchFamily="34" charset="0"/>
-                <a:ea typeface="Arial" pitchFamily="34" charset="-122"/>
-                <a:cs typeface="Arial" pitchFamily="34" charset="-120"/>
-              </a:rPr>
-              <a:t>BUILD</a:t>
-            </a:r>
-            <a:endParaRPr lang="en-US" sz="920"/>
-          </a:p>
-        </p:txBody>
-      </p:sp>
-      <p:sp>
-        <p:nvSpPr>
-          <p:cNvPr id="6" name="Shape 4"/>
-          <p:cNvSpPr/>
-          <p:nvPr/>
-        </p:nvSpPr>
-        <p:spPr>
-          <a:xfrm>
-            <a:off x="8650224" y="585216"/>
-            <a:ext cx="914400" cy="310896"/>
-          </a:xfrm>
-          <a:prstGeom prst="roundRect">
-            <a:avLst>
-              <a:gd name="adj" fmla="val 23529"/>
-            </a:avLst>
-          </a:prstGeom>
-          <a:solidFill>
-            <a:srgbClr val="152329">
-              <a:alpha val="82000"/>
-            </a:srgbClr>
-          </a:solidFill>
-          <a:ln w="12700">
-            <a:solidFill>
-              <a:srgbClr val="31434A"/>
-            </a:solidFill>
-            <a:prstDash val="solid"/>
-          </a:ln>
-        </p:spPr>
-        <p:txBody>
-          <a:bodyPr/>
-          <a:lstStyle/>
-          <a:p>
-            <a:endParaRPr/>
-          </a:p>
-        </p:txBody>
-      </p:sp>
-      <p:sp>
-        <p:nvSpPr>
-          <p:cNvPr id="7" name="Text 5"/>
-          <p:cNvSpPr/>
-          <p:nvPr/>
-        </p:nvSpPr>
-        <p:spPr>
-          <a:xfrm>
-            <a:off x="8650224" y="630936"/>
-            <a:ext cx="914400" cy="164592"/>
-          </a:xfrm>
-          <a:prstGeom prst="rect">
-            <a:avLst/>
-          </a:prstGeom>
-          <a:noFill/>
-          <a:ln/>
-        </p:spPr>
-        <p:txBody>
-          <a:bodyPr wrap="square" lIns="0" tIns="0" rIns="0" bIns="0" rtlCol="0" anchor="ctr"/>
-          <a:lstStyle/>
-          <a:p>
-            <a:pPr marL="0" indent="0" algn="ctr">
-              <a:buNone/>
-            </a:pPr>
-            <a:r>
-              <a:rPr lang="en-US" sz="920" b="1">
-                <a:solidFill>
-                  <a:srgbClr val="A7B4B8"/>
-                </a:solidFill>
-                <a:latin typeface="Arial" pitchFamily="34" charset="0"/>
-                <a:ea typeface="Arial" pitchFamily="34" charset="-122"/>
-                <a:cs typeface="Arial" pitchFamily="34" charset="-120"/>
-              </a:rPr>
-              <a:t>TEST</a:t>
-            </a:r>
-            <a:endParaRPr lang="en-US" sz="920"/>
-          </a:p>
-        </p:txBody>
-      </p:sp>
-      <p:sp>
-        <p:nvSpPr>
-          <p:cNvPr id="8" name="Shape 6"/>
-          <p:cNvSpPr/>
-          <p:nvPr/>
-        </p:nvSpPr>
-        <p:spPr>
-          <a:xfrm>
-            <a:off x="9637776" y="585216"/>
-            <a:ext cx="914400" cy="310896"/>
-          </a:xfrm>
-          <a:prstGeom prst="roundRect">
-            <a:avLst>
-              <a:gd name="adj" fmla="val 23529"/>
-            </a:avLst>
-          </a:prstGeom>
-          <a:solidFill>
-            <a:srgbClr val="00D8D8">
-              <a:alpha val="82000"/>
-            </a:srgbClr>
-          </a:solidFill>
-          <a:ln w="12700">
-            <a:solidFill>
-              <a:srgbClr val="31434A"/>
-            </a:solidFill>
-            <a:prstDash val="solid"/>
-          </a:ln>
-        </p:spPr>
-        <p:txBody>
-          <a:bodyPr/>
-          <a:lstStyle/>
-          <a:p>
-            <a:endParaRPr/>
-          </a:p>
-        </p:txBody>
-      </p:sp>
-      <p:sp>
-        <p:nvSpPr>
-          <p:cNvPr id="9" name="Text 7"/>
-          <p:cNvSpPr/>
-          <p:nvPr/>
-        </p:nvSpPr>
-        <p:spPr>
-          <a:xfrm>
-            <a:off x="9637776" y="630936"/>
-            <a:ext cx="914400" cy="164592"/>
-          </a:xfrm>
-          <a:prstGeom prst="rect">
-            <a:avLst/>
-          </a:prstGeom>
-          <a:noFill/>
-          <a:ln/>
-        </p:spPr>
-        <p:txBody>
-          <a:bodyPr wrap="square" lIns="0" tIns="0" rIns="0" bIns="0" rtlCol="0" anchor="ctr"/>
-          <a:lstStyle/>
-          <a:p>
-            <a:pPr marL="0" indent="0" algn="ctr">
-              <a:buNone/>
-            </a:pPr>
-            <a:r>
-              <a:rPr lang="en-US" sz="920" b="1">
-                <a:solidFill>
-                  <a:srgbClr val="071013"/>
-                </a:solidFill>
-                <a:latin typeface="Arial" pitchFamily="34" charset="0"/>
-                <a:ea typeface="Arial" pitchFamily="34" charset="-122"/>
-                <a:cs typeface="Arial" pitchFamily="34" charset="-120"/>
-              </a:rPr>
-              <a:t>PREDICT</a:t>
-            </a:r>
-            <a:endParaRPr lang="en-US" sz="920"/>
-          </a:p>
-        </p:txBody>
-      </p:sp>
-      <p:sp>
-        <p:nvSpPr>
-          <p:cNvPr id="10" name="Shape 8"/>
-          <p:cNvSpPr/>
-          <p:nvPr/>
-        </p:nvSpPr>
-        <p:spPr>
-          <a:xfrm>
-            <a:off x="10625328" y="585216"/>
-            <a:ext cx="914400" cy="310896"/>
-          </a:xfrm>
-          <a:prstGeom prst="roundRect">
-            <a:avLst>
-              <a:gd name="adj" fmla="val 23529"/>
-            </a:avLst>
-          </a:prstGeom>
-          <a:solidFill>
-            <a:srgbClr val="152329"/>
-          </a:solidFill>
-          <a:ln w="12700">
-            <a:solidFill>
-              <a:srgbClr val="00D8D8"/>
-            </a:solidFill>
-            <a:prstDash val="solid"/>
-          </a:ln>
-        </p:spPr>
-        <p:txBody>
-          <a:bodyPr/>
-          <a:lstStyle/>
-          <a:p>
-            <a:endParaRPr/>
-          </a:p>
-        </p:txBody>
-      </p:sp>
-      <p:sp>
-        <p:nvSpPr>
-          <p:cNvPr id="11" name="Text 9"/>
-          <p:cNvSpPr/>
-          <p:nvPr/>
-        </p:nvSpPr>
-        <p:spPr>
-          <a:xfrm>
-            <a:off x="10625328" y="630936"/>
-            <a:ext cx="914400" cy="164592"/>
-          </a:xfrm>
-          <a:prstGeom prst="rect">
-            <a:avLst/>
-          </a:prstGeom>
-          <a:noFill/>
-          <a:ln/>
-        </p:spPr>
-        <p:txBody>
-          <a:bodyPr wrap="square" lIns="0" tIns="0" rIns="0" bIns="0" rtlCol="0" anchor="ctr"/>
-          <a:lstStyle/>
-          <a:p>
-            <a:pPr marL="0" indent="0" algn="ctr">
-              <a:buNone/>
-            </a:pPr>
-            <a:r>
-              <a:rPr lang="en-US" sz="920" b="1">
-                <a:solidFill>
-                  <a:srgbClr val="A7B4B8"/>
-                </a:solidFill>
-                <a:latin typeface="Arial" pitchFamily="34" charset="0"/>
-                <a:ea typeface="Arial" pitchFamily="34" charset="-122"/>
-                <a:cs typeface="Arial" pitchFamily="34" charset="-120"/>
-              </a:rPr>
-              <a:t>SHOW</a:t>
-            </a:r>
-            <a:endParaRPr lang="en-US" sz="920"/>
-          </a:p>
-        </p:txBody>
-      </p:sp>
-      <p:sp>
-        <p:nvSpPr>
-          <p:cNvPr id="12" name="Text 10"/>
-          <p:cNvSpPr/>
-          <p:nvPr/>
-        </p:nvSpPr>
-        <p:spPr>
-          <a:xfrm>
-            <a:off x="438912" y="658368"/>
-            <a:ext cx="2560320" cy="256032"/>
-          </a:xfrm>
-          <a:prstGeom prst="rect">
-            <a:avLst/>
-          </a:prstGeom>
-          <a:noFill/>
-          <a:ln/>
-        </p:spPr>
-        <p:txBody>
-          <a:bodyPr wrap="square" lIns="0" tIns="0" rIns="0" bIns="0" rtlCol="0" anchor="ctr"/>
-          <a:lstStyle/>
-          <a:p>
-            <a:pPr marL="0" indent="0">
-              <a:buNone/>
-            </a:pPr>
-            <a:r>
-              <a:rPr sz="1000" b="1">
-                <a:solidFill>
-                  <a:srgbClr val="FF7A00"/>
-                </a:solidFill>
-                <a:latin typeface="Arial"/>
-              </a:rPr>
-              <a:t>SECTION 3 — PREDICT (PART 2)</a:t>
-            </a:r>
-            <a:endParaRPr lang="en-US" sz="1100"/>
-          </a:p>
-        </p:txBody>
-      </p:sp>
-      <p:sp>
-        <p:nvSpPr>
-          <p:cNvPr id="13" name="Text 11"/>
-          <p:cNvSpPr/>
-          <p:nvPr/>
-        </p:nvSpPr>
-        <p:spPr>
-          <a:xfrm>
-            <a:off x="420624" y="941832"/>
-            <a:ext cx="10881360" cy="566928"/>
-          </a:xfrm>
-          <a:prstGeom prst="rect">
-            <a:avLst/>
-          </a:prstGeom>
-          <a:noFill/>
-          <a:ln/>
-        </p:spPr>
-        <p:txBody>
-          <a:bodyPr wrap="square" lIns="0" tIns="0" rIns="0" bIns="0" rtlCol="0" anchor="ctr"/>
-          <a:lstStyle/>
-          <a:p>
-            <a:pPr marL="0" indent="0">
-              <a:buNone/>
-            </a:pPr>
-            <a:r>
-              <a:rPr sz="2300" b="1">
-                <a:solidFill>
-                  <a:srgbClr val="F5F7F7"/>
-                </a:solidFill>
-                <a:latin typeface="Arial Black"/>
-              </a:rPr>
-              <a:t>PREDICT — Who is starting to transform, and why?</a:t>
-            </a:r>
-            <a:endParaRPr lang="en-US" sz="2900"/>
-          </a:p>
-        </p:txBody>
-      </p:sp>
-      <p:sp>
-        <p:nvSpPr>
-          <p:cNvPr id="14" name="Text 12"/>
-          <p:cNvSpPr/>
-          <p:nvPr/>
-        </p:nvSpPr>
-        <p:spPr>
-          <a:xfrm>
-            <a:off x="438912" y="1554480"/>
-            <a:ext cx="10698480" cy="384048"/>
-          </a:xfrm>
-          <a:prstGeom prst="rect">
-            <a:avLst/>
-          </a:prstGeom>
-          <a:noFill/>
-          <a:ln/>
-        </p:spPr>
-        <p:txBody>
-          <a:bodyPr wrap="square" lIns="0" tIns="0" rIns="0" bIns="0" rtlCol="0" anchor="ctr"/>
-          <a:lstStyle/>
-          <a:p>
-            <a:pPr marL="0" indent="0">
-              <a:buNone/>
-            </a:pPr>
-            <a:r>
-              <a:rPr sz="1100">
-                <a:solidFill>
-                  <a:srgbClr val="A7B4B8"/>
-                </a:solidFill>
-                <a:latin typeface="Aptos"/>
-              </a:rPr>
-              <a:t>Show us what your model found and justify the prediction. Use the space for clear visual evidence.</a:t>
-            </a:r>
-            <a:endParaRPr lang="en-US" sz="1450"/>
-          </a:p>
-        </p:txBody>
-      </p:sp>
-      <p:sp>
-        <p:nvSpPr>
-          <p:cNvPr id="15" name="Shape 13"/>
-          <p:cNvSpPr/>
-          <p:nvPr/>
-        </p:nvSpPr>
-        <p:spPr>
-          <a:xfrm>
-            <a:off x="457200" y="2084832"/>
-            <a:ext cx="3767328" cy="1572768"/>
-          </a:xfrm>
-          <a:prstGeom prst="roundRect">
-            <a:avLst/>
-          </a:prstGeom>
-          <a:solidFill>
-            <a:srgbClr val="111A1F"/>
-          </a:solidFill>
-          <a:ln w="15240">
-            <a:solidFill>
-              <a:srgbClr val="294047"/>
-            </a:solidFill>
-            <a:prstDash val="solid"/>
-          </a:ln>
-        </p:spPr>
-        <p:txBody>
-          <a:bodyPr/>
-          <a:lstStyle/>
-          <a:p>
-            <a:endParaRPr/>
-          </a:p>
-        </p:txBody>
-      </p:sp>
-      <p:sp>
-        <p:nvSpPr>
-          <p:cNvPr id="16" name="Shape 14"/>
-          <p:cNvSpPr/>
-          <p:nvPr/>
-        </p:nvSpPr>
-        <p:spPr>
-          <a:xfrm>
-            <a:off x="457200" y="2084832"/>
-            <a:ext cx="54864" cy="1572768"/>
-          </a:xfrm>
-          <a:prstGeom prst="rect">
-            <a:avLst/>
-          </a:prstGeom>
-          <a:solidFill>
-            <a:srgbClr val="FF7A00"/>
-          </a:solidFill>
-          <a:ln w="12700">
-            <a:solidFill>
-              <a:srgbClr val="FF7A00"/>
-            </a:solidFill>
-            <a:prstDash val="solid"/>
-          </a:ln>
-        </p:spPr>
-        <p:txBody>
-          <a:bodyPr/>
-          <a:lstStyle/>
-          <a:p>
-            <a:endParaRPr/>
-          </a:p>
-        </p:txBody>
-      </p:sp>
-      <p:sp>
-        <p:nvSpPr>
-          <p:cNvPr id="17" name="Text 15"/>
-          <p:cNvSpPr/>
-          <p:nvPr/>
-        </p:nvSpPr>
-        <p:spPr>
-          <a:xfrm>
-            <a:off x="640080" y="2212848"/>
-            <a:ext cx="3438144" cy="274320"/>
-          </a:xfrm>
-          <a:prstGeom prst="rect">
-            <a:avLst/>
-          </a:prstGeom>
-          <a:noFill/>
-          <a:ln/>
-        </p:spPr>
-        <p:txBody>
-          <a:bodyPr wrap="square" lIns="0" tIns="0" rIns="0" bIns="0" rtlCol="0" anchor="ctr"/>
-          <a:lstStyle/>
-          <a:p>
-            <a:pPr marL="0" indent="0">
-              <a:buNone/>
-            </a:pPr>
-            <a:r>
-              <a:rPr sz="1300" b="1">
-                <a:solidFill>
-                  <a:srgbClr val="F5F7F7"/>
-                </a:solidFill>
-                <a:latin typeface="Arial"/>
-              </a:rPr>
-              <a:t>1. Who did we identify?</a:t>
-            </a:r>
-            <a:endParaRPr lang="en-US" sz="1500"/>
-          </a:p>
-        </p:txBody>
-      </p:sp>
-      <p:sp>
-        <p:nvSpPr>
-          <p:cNvPr id="18" name="Text 16"/>
-          <p:cNvSpPr/>
-          <p:nvPr/>
-        </p:nvSpPr>
-        <p:spPr>
-          <a:xfrm>
-            <a:off x="640080" y="2542032"/>
-            <a:ext cx="3419856" cy="550469"/>
-          </a:xfrm>
-          <a:prstGeom prst="rect">
-            <a:avLst/>
-          </a:prstGeom>
-          <a:noFill/>
-          <a:ln/>
-        </p:spPr>
-        <p:txBody>
-          <a:bodyPr wrap="square" lIns="254" tIns="254" rIns="254" bIns="254" rtlCol="0" anchor="t"/>
-          <a:lstStyle/>
-          <a:p>
-            <a:pPr marL="0" indent="0">
-              <a:buNone/>
-            </a:pPr>
-            <a:r>
-              <a:rPr sz="1050">
-                <a:solidFill>
-                  <a:srgbClr val="A7B4B8"/>
-                </a:solidFill>
-                <a:latin typeface="Aptos"/>
-              </a:rPr>
-              <a:t>Summarise the students your model identified and what they may be turning into. Keep the full list in Excel.</a:t>
-            </a:r>
-            <a:endParaRPr lang="en-US" sz="1050"/>
-          </a:p>
-        </p:txBody>
-      </p:sp>
-      <p:sp>
-        <p:nvSpPr>
-          <p:cNvPr id="19" name="Text 17"/>
-          <p:cNvSpPr/>
-          <p:nvPr/>
-        </p:nvSpPr>
-        <p:spPr>
-          <a:xfrm>
-            <a:off x="640080" y="3218688"/>
-            <a:ext cx="3419856" cy="228600"/>
-          </a:xfrm>
-          <a:prstGeom prst="rect">
-            <a:avLst/>
-          </a:prstGeom>
-          <a:noFill/>
-          <a:ln/>
-        </p:spPr>
-        <p:txBody>
-          <a:bodyPr wrap="square" lIns="0" tIns="0" rIns="0" bIns="0" rtlCol="0" anchor="ctr"/>
-          <a:lstStyle/>
-          <a:p>
-            <a:pPr marL="0" indent="0">
-              <a:buNone/>
-            </a:pPr>
-            <a:r>
-              <a:rPr sz="900" b="1">
-                <a:solidFill>
-                  <a:srgbClr val="00D8D8"/>
-                </a:solidFill>
-                <a:latin typeface="Arial"/>
-              </a:rPr>
-              <a:t>ADD SHORT SUMMARY / TABLE</a:t>
-            </a:r>
-            <a:endParaRPr lang="en-US" sz="980"/>
-          </a:p>
-        </p:txBody>
-      </p:sp>
-      <p:sp>
-        <p:nvSpPr>
-          <p:cNvPr id="20" name="Shape 18"/>
-          <p:cNvSpPr/>
-          <p:nvPr/>
-        </p:nvSpPr>
-        <p:spPr>
-          <a:xfrm>
-            <a:off x="457200" y="3840480"/>
-            <a:ext cx="3767328" cy="1755648"/>
-          </a:xfrm>
-          <a:prstGeom prst="roundRect">
-            <a:avLst/>
-          </a:prstGeom>
-          <a:solidFill>
-            <a:srgbClr val="111A1F"/>
-          </a:solidFill>
-          <a:ln w="15240">
-            <a:solidFill>
-              <a:srgbClr val="294047"/>
-            </a:solidFill>
-            <a:prstDash val="solid"/>
-          </a:ln>
-        </p:spPr>
-        <p:txBody>
-          <a:bodyPr/>
-          <a:lstStyle/>
-          <a:p>
-            <a:endParaRPr/>
-          </a:p>
-        </p:txBody>
-      </p:sp>
-      <p:sp>
-        <p:nvSpPr>
-          <p:cNvPr id="21" name="Shape 19"/>
-          <p:cNvSpPr/>
-          <p:nvPr/>
-        </p:nvSpPr>
-        <p:spPr>
-          <a:xfrm>
-            <a:off x="457200" y="3840480"/>
-            <a:ext cx="54864" cy="1755648"/>
-          </a:xfrm>
-          <a:prstGeom prst="rect">
-            <a:avLst/>
-          </a:prstGeom>
-          <a:solidFill>
-            <a:srgbClr val="00D8D8"/>
-          </a:solidFill>
-          <a:ln w="12700">
-            <a:solidFill>
-              <a:srgbClr val="00D8D8"/>
-            </a:solidFill>
-            <a:prstDash val="solid"/>
-          </a:ln>
-        </p:spPr>
-        <p:txBody>
-          <a:bodyPr/>
-          <a:lstStyle/>
-          <a:p>
-            <a:endParaRPr/>
-          </a:p>
-        </p:txBody>
-      </p:sp>
-      <p:sp>
-        <p:nvSpPr>
-          <p:cNvPr id="22" name="Text 20"/>
-          <p:cNvSpPr/>
-          <p:nvPr/>
-        </p:nvSpPr>
-        <p:spPr>
-          <a:xfrm>
-            <a:off x="640080" y="3968496"/>
-            <a:ext cx="3438144" cy="274320"/>
-          </a:xfrm>
-          <a:prstGeom prst="rect">
-            <a:avLst/>
-          </a:prstGeom>
-          <a:noFill/>
-          <a:ln/>
-        </p:spPr>
-        <p:txBody>
-          <a:bodyPr wrap="square" lIns="0" tIns="0" rIns="0" bIns="0" rtlCol="0" anchor="ctr"/>
-          <a:lstStyle/>
-          <a:p>
-            <a:pPr marL="0" indent="0">
-              <a:buNone/>
-            </a:pPr>
-            <a:r>
-              <a:rPr sz="1300" b="1">
-                <a:solidFill>
-                  <a:srgbClr val="F5F7F7"/>
-                </a:solidFill>
-                <a:latin typeface="Arial"/>
-              </a:rPr>
-              <a:t>2. Why these students?</a:t>
-            </a:r>
-            <a:endParaRPr lang="en-US" sz="1500"/>
-          </a:p>
-        </p:txBody>
-      </p:sp>
-      <p:sp>
-        <p:nvSpPr>
-          <p:cNvPr id="23" name="Text 21"/>
-          <p:cNvSpPr/>
-          <p:nvPr/>
-        </p:nvSpPr>
-        <p:spPr>
-          <a:xfrm>
-            <a:off x="640080" y="4297680"/>
-            <a:ext cx="3419856" cy="566928"/>
-          </a:xfrm>
-          <a:prstGeom prst="rect">
-            <a:avLst/>
-          </a:prstGeom>
-          <a:noFill/>
-          <a:ln/>
-        </p:spPr>
-        <p:txBody>
-          <a:bodyPr wrap="square" lIns="254" tIns="254" rIns="254" bIns="254" rtlCol="0" anchor="t"/>
-          <a:lstStyle/>
-          <a:p>
-            <a:pPr marL="0" indent="0">
-              <a:buNone/>
-            </a:pPr>
-            <a:r>
-              <a:rPr sz="1050">
-                <a:solidFill>
-                  <a:srgbClr val="A7B4B8"/>
-                </a:solidFill>
-                <a:latin typeface="Aptos"/>
-              </a:rPr>
-              <a:t>Explain what your model is seeing and why those patterns support your prediction.</a:t>
-            </a:r>
-            <a:endParaRPr lang="en-US" sz="1050"/>
-          </a:p>
-        </p:txBody>
-      </p:sp>
-      <p:sp>
-        <p:nvSpPr>
-          <p:cNvPr id="24" name="Text 22"/>
-          <p:cNvSpPr/>
-          <p:nvPr/>
-        </p:nvSpPr>
-        <p:spPr>
-          <a:xfrm>
-            <a:off x="640080" y="5157216"/>
-            <a:ext cx="3419856" cy="228600"/>
-          </a:xfrm>
-          <a:prstGeom prst="rect">
-            <a:avLst/>
-          </a:prstGeom>
-          <a:noFill/>
-          <a:ln/>
-        </p:spPr>
-        <p:txBody>
-          <a:bodyPr wrap="square" lIns="0" tIns="0" rIns="0" bIns="0" rtlCol="0" anchor="ctr"/>
-          <a:lstStyle/>
-          <a:p>
-            <a:pPr marL="0" indent="0">
-              <a:buNone/>
-            </a:pPr>
-            <a:r>
-              <a:rPr sz="900" b="1">
-                <a:solidFill>
-                  <a:srgbClr val="00D8D8"/>
-                </a:solidFill>
-                <a:latin typeface="Arial"/>
-              </a:rPr>
-              <a:t>ADD 1–3 SHORT POINTS</a:t>
-            </a:r>
-            <a:endParaRPr lang="en-US" sz="980"/>
-          </a:p>
-        </p:txBody>
-      </p:sp>
-      <p:sp>
-        <p:nvSpPr>
-          <p:cNvPr id="25" name="Shape 23"/>
-          <p:cNvSpPr/>
-          <p:nvPr/>
-        </p:nvSpPr>
-        <p:spPr>
-          <a:xfrm>
-            <a:off x="4462272" y="2084832"/>
-            <a:ext cx="3858768" cy="1572768"/>
-          </a:xfrm>
-          <a:prstGeom prst="roundRect">
-            <a:avLst/>
-          </a:prstGeom>
-          <a:solidFill>
-            <a:srgbClr val="111A1F"/>
-          </a:solidFill>
-          <a:ln w="15240">
-            <a:solidFill>
-              <a:srgbClr val="294047"/>
-            </a:solidFill>
-            <a:prstDash val="solid"/>
-          </a:ln>
-        </p:spPr>
-        <p:txBody>
-          <a:bodyPr/>
-          <a:lstStyle/>
-          <a:p>
-            <a:endParaRPr/>
-          </a:p>
-        </p:txBody>
-      </p:sp>
-      <p:sp>
-        <p:nvSpPr>
-          <p:cNvPr id="26" name="Shape 24"/>
-          <p:cNvSpPr/>
-          <p:nvPr/>
-        </p:nvSpPr>
-        <p:spPr>
-          <a:xfrm>
-            <a:off x="4462272" y="2084832"/>
-            <a:ext cx="54864" cy="1572768"/>
-          </a:xfrm>
-          <a:prstGeom prst="rect">
-            <a:avLst/>
-          </a:prstGeom>
-          <a:solidFill>
-            <a:srgbClr val="00D8D8"/>
-          </a:solidFill>
-          <a:ln w="12700">
-            <a:solidFill>
-              <a:srgbClr val="00D8D8"/>
-            </a:solidFill>
-            <a:prstDash val="solid"/>
-          </a:ln>
-        </p:spPr>
-        <p:txBody>
-          <a:bodyPr/>
-          <a:lstStyle/>
-          <a:p>
-            <a:endParaRPr/>
-          </a:p>
-        </p:txBody>
-      </p:sp>
-      <p:sp>
-        <p:nvSpPr>
-          <p:cNvPr id="27" name="Text 25"/>
-          <p:cNvSpPr/>
-          <p:nvPr/>
-        </p:nvSpPr>
-        <p:spPr>
-          <a:xfrm>
-            <a:off x="4645152" y="2212848"/>
-            <a:ext cx="3529584" cy="274320"/>
-          </a:xfrm>
-          <a:prstGeom prst="rect">
-            <a:avLst/>
-          </a:prstGeom>
-          <a:noFill/>
-          <a:ln/>
-        </p:spPr>
-        <p:txBody>
-          <a:bodyPr wrap="square" lIns="0" tIns="0" rIns="0" bIns="0" rtlCol="0" anchor="ctr"/>
-          <a:lstStyle/>
-          <a:p>
-            <a:pPr marL="0" indent="0">
-              <a:buNone/>
-            </a:pPr>
-            <a:r>
-              <a:rPr sz="1300" b="1">
-                <a:solidFill>
-                  <a:srgbClr val="F5F7F7"/>
-                </a:solidFill>
-                <a:latin typeface="Arial"/>
-              </a:rPr>
-              <a:t>3. Evidence</a:t>
-            </a:r>
-            <a:endParaRPr lang="en-US" sz="1500"/>
-          </a:p>
-        </p:txBody>
-      </p:sp>
-      <p:sp>
-        <p:nvSpPr>
-          <p:cNvPr id="28" name="Text 26"/>
-          <p:cNvSpPr/>
-          <p:nvPr/>
-        </p:nvSpPr>
-        <p:spPr>
-          <a:xfrm>
-            <a:off x="4645152" y="2542032"/>
-            <a:ext cx="3511296" cy="550469"/>
-          </a:xfrm>
-          <a:prstGeom prst="rect">
-            <a:avLst/>
-          </a:prstGeom>
-          <a:noFill/>
-          <a:ln/>
-        </p:spPr>
-        <p:txBody>
-          <a:bodyPr wrap="square" lIns="254" tIns="254" rIns="254" bIns="254" rtlCol="0" anchor="t"/>
-          <a:lstStyle/>
-          <a:p>
-            <a:pPr marL="0" indent="0">
-              <a:buNone/>
-            </a:pPr>
-            <a:r>
-              <a:rPr sz="1050">
-                <a:solidFill>
-                  <a:srgbClr val="A7B4B8"/>
-                </a:solidFill>
-                <a:latin typeface="Aptos"/>
-              </a:rPr>
-              <a:t>Show a chart, trend, feature importance, model output or another piece of evidence. Screenshots can be large.</a:t>
-            </a:r>
-            <a:endParaRPr lang="en-US" sz="1050"/>
-          </a:p>
-        </p:txBody>
-      </p:sp>
-      <p:sp>
-        <p:nvSpPr>
-          <p:cNvPr id="29" name="Text 27"/>
-          <p:cNvSpPr/>
-          <p:nvPr/>
-        </p:nvSpPr>
-        <p:spPr>
-          <a:xfrm>
-            <a:off x="4645152" y="3218688"/>
-            <a:ext cx="3511296" cy="228600"/>
-          </a:xfrm>
-          <a:prstGeom prst="rect">
-            <a:avLst/>
-          </a:prstGeom>
-          <a:noFill/>
-          <a:ln/>
-        </p:spPr>
-        <p:txBody>
-          <a:bodyPr wrap="square" lIns="0" tIns="0" rIns="0" bIns="0" rtlCol="0" anchor="ctr"/>
-          <a:lstStyle/>
-          <a:p>
-            <a:pPr marL="0" indent="0">
-              <a:buNone/>
-            </a:pPr>
-            <a:r>
-              <a:rPr sz="900" b="1">
-                <a:solidFill>
-                  <a:srgbClr val="00D8D8"/>
-                </a:solidFill>
-                <a:latin typeface="Arial"/>
-              </a:rPr>
-              <a:t>ADD LARGE PREDICT VISUAL</a:t>
-            </a:r>
-            <a:endParaRPr lang="en-US" sz="980"/>
-          </a:p>
-        </p:txBody>
-      </p:sp>
-      <p:sp>
-        <p:nvSpPr>
-          <p:cNvPr id="30" name="Shape 28"/>
-          <p:cNvSpPr/>
-          <p:nvPr/>
-        </p:nvSpPr>
-        <p:spPr>
-          <a:xfrm>
-            <a:off x="4462272" y="3840480"/>
-            <a:ext cx="3858768" cy="1755648"/>
-          </a:xfrm>
-          <a:prstGeom prst="roundRect">
-            <a:avLst/>
-          </a:prstGeom>
-          <a:solidFill>
-            <a:srgbClr val="111A1F"/>
-          </a:solidFill>
-          <a:ln w="15240">
-            <a:solidFill>
-              <a:srgbClr val="294047"/>
-            </a:solidFill>
-            <a:prstDash val="solid"/>
-          </a:ln>
-        </p:spPr>
-        <p:txBody>
-          <a:bodyPr/>
-          <a:lstStyle/>
-          <a:p>
-            <a:endParaRPr/>
-          </a:p>
-        </p:txBody>
-      </p:sp>
-      <p:sp>
-        <p:nvSpPr>
-          <p:cNvPr id="31" name="Shape 29"/>
-          <p:cNvSpPr/>
-          <p:nvPr/>
-        </p:nvSpPr>
-        <p:spPr>
-          <a:xfrm>
-            <a:off x="4462272" y="3840480"/>
-            <a:ext cx="54864" cy="1755648"/>
-          </a:xfrm>
-          <a:prstGeom prst="rect">
-            <a:avLst/>
-          </a:prstGeom>
-          <a:solidFill>
-            <a:srgbClr val="00D8D8"/>
-          </a:solidFill>
-          <a:ln w="12700">
-            <a:solidFill>
-              <a:srgbClr val="00D8D8"/>
-            </a:solidFill>
-            <a:prstDash val="solid"/>
-          </a:ln>
-        </p:spPr>
-        <p:txBody>
-          <a:bodyPr/>
-          <a:lstStyle/>
-          <a:p>
-            <a:endParaRPr/>
-          </a:p>
-        </p:txBody>
-      </p:sp>
-      <p:sp>
-        <p:nvSpPr>
-          <p:cNvPr id="32" name="Text 30"/>
-          <p:cNvSpPr/>
-          <p:nvPr/>
-        </p:nvSpPr>
-        <p:spPr>
-          <a:xfrm>
-            <a:off x="4645152" y="3968496"/>
-            <a:ext cx="3529584" cy="274320"/>
-          </a:xfrm>
-          <a:prstGeom prst="rect">
-            <a:avLst/>
-          </a:prstGeom>
-          <a:noFill/>
-          <a:ln/>
-        </p:spPr>
-        <p:txBody>
-          <a:bodyPr wrap="square" lIns="0" tIns="0" rIns="0" bIns="0" rtlCol="0" anchor="ctr"/>
-          <a:lstStyle/>
-          <a:p>
-            <a:pPr marL="0" indent="0">
-              <a:buNone/>
-            </a:pPr>
-            <a:r>
-              <a:rPr lang="en-US" sz="1500" b="1">
-                <a:solidFill>
-                  <a:srgbClr val="F7F7F7"/>
-                </a:solidFill>
-                <a:latin typeface="Arial" pitchFamily="34" charset="0"/>
-                <a:ea typeface="Arial" pitchFamily="34" charset="-122"/>
-                <a:cs typeface="Arial" pitchFamily="34" charset="-120"/>
-              </a:rPr>
-              <a:t>4. Bonus / advanced work</a:t>
-            </a:r>
-            <a:endParaRPr lang="en-US" sz="1500"/>
-          </a:p>
-        </p:txBody>
-      </p:sp>
-      <p:sp>
-        <p:nvSpPr>
-          <p:cNvPr id="33" name="Text 31"/>
-          <p:cNvSpPr/>
-          <p:nvPr/>
-        </p:nvSpPr>
-        <p:spPr>
-          <a:xfrm>
-            <a:off x="4645152" y="4297680"/>
-            <a:ext cx="3511296" cy="566928"/>
-          </a:xfrm>
-          <a:prstGeom prst="rect">
-            <a:avLst/>
-          </a:prstGeom>
-          <a:noFill/>
-          <a:ln/>
-        </p:spPr>
-        <p:txBody>
-          <a:bodyPr wrap="square" lIns="254" tIns="254" rIns="254" bIns="254" rtlCol="0" anchor="t"/>
-          <a:lstStyle/>
-          <a:p>
-            <a:pPr marL="0" indent="0">
-              <a:buNone/>
-            </a:pPr>
-            <a:r>
-              <a:rPr lang="en-US" sz="1050">
-                <a:solidFill>
-                  <a:srgbClr val="93A8AE"/>
-                </a:solidFill>
-                <a:latin typeface="Aptos" pitchFamily="34" charset="0"/>
-                <a:ea typeface="Aptos" pitchFamily="34" charset="-122"/>
-                <a:cs typeface="Aptos" pitchFamily="34" charset="-120"/>
-              </a:rPr>
-              <a:t>Front end, explainability, extra visualisations, advanced modelling or anything else you explored.</a:t>
-            </a:r>
-            <a:endParaRPr lang="en-US" sz="1050"/>
-          </a:p>
-        </p:txBody>
-      </p:sp>
-      <p:sp>
-        <p:nvSpPr>
-          <p:cNvPr id="34" name="Text 32"/>
-          <p:cNvSpPr/>
-          <p:nvPr/>
-        </p:nvSpPr>
-        <p:spPr>
-          <a:xfrm>
-            <a:off x="4645152" y="5157216"/>
-            <a:ext cx="3511296" cy="228600"/>
-          </a:xfrm>
-          <a:prstGeom prst="rect">
-            <a:avLst/>
-          </a:prstGeom>
-          <a:noFill/>
-          <a:ln/>
-        </p:spPr>
-        <p:txBody>
-          <a:bodyPr wrap="square" lIns="0" tIns="0" rIns="0" bIns="0" rtlCol="0" anchor="ctr"/>
-          <a:lstStyle/>
-          <a:p>
-            <a:pPr marL="0" indent="0">
-              <a:buNone/>
-            </a:pPr>
-            <a:r>
-              <a:rPr lang="en-US" sz="980" b="1" kern="0" spc="70">
-                <a:solidFill>
-                  <a:srgbClr val="00D8D8"/>
-                </a:solidFill>
-                <a:latin typeface="Arial" pitchFamily="34" charset="0"/>
-                <a:ea typeface="Arial" pitchFamily="34" charset="-122"/>
-                <a:cs typeface="Arial" pitchFamily="34" charset="-120"/>
-              </a:rPr>
-              <a:t>OPTIONAL</a:t>
-            </a:r>
-            <a:endParaRPr lang="en-US" sz="980"/>
-          </a:p>
-        </p:txBody>
-      </p:sp>
-      <p:sp>
-        <p:nvSpPr>
-          <p:cNvPr id="35" name="Shape 33"/>
-          <p:cNvSpPr/>
-          <p:nvPr/>
-        </p:nvSpPr>
-        <p:spPr>
-          <a:xfrm>
-            <a:off x="8641080" y="2084832"/>
-            <a:ext cx="3063240" cy="3511296"/>
-          </a:xfrm>
-          <a:prstGeom prst="roundRect">
-            <a:avLst/>
-          </a:prstGeom>
-          <a:solidFill>
-            <a:srgbClr val="10191E"/>
-          </a:solidFill>
-          <a:ln w="19050">
-            <a:solidFill>
-              <a:srgbClr val="FF7A00"/>
-            </a:solidFill>
-            <a:prstDash val="solid"/>
-          </a:ln>
-        </p:spPr>
-        <p:txBody>
-          <a:bodyPr/>
-          <a:lstStyle/>
-          <a:p>
-            <a:endParaRPr/>
-          </a:p>
-        </p:txBody>
-      </p:sp>
-      <p:sp>
-        <p:nvSpPr>
-          <p:cNvPr id="36" name="Text 34"/>
-          <p:cNvSpPr/>
-          <p:nvPr/>
-        </p:nvSpPr>
-        <p:spPr>
-          <a:xfrm>
-            <a:off x="8869680" y="2304288"/>
-            <a:ext cx="2606040" cy="256032"/>
-          </a:xfrm>
-          <a:prstGeom prst="rect">
-            <a:avLst/>
-          </a:prstGeom>
-          <a:noFill/>
-          <a:ln/>
-        </p:spPr>
-        <p:txBody>
-          <a:bodyPr wrap="square" lIns="0" tIns="0" rIns="0" bIns="0" rtlCol="0" anchor="ctr"/>
-          <a:lstStyle/>
-          <a:p>
-            <a:pPr marL="0" indent="0">
-              <a:buNone/>
-            </a:pPr>
-            <a:r>
-              <a:rPr sz="1000" b="1">
-                <a:solidFill>
-                  <a:srgbClr val="FF7A00"/>
-                </a:solidFill>
-                <a:latin typeface="Arial"/>
-              </a:rPr>
-              <a:t>PREDICT RAFFLE CHECK</a:t>
-            </a:r>
-            <a:endParaRPr lang="en-US" sz="1400"/>
-          </a:p>
-        </p:txBody>
-      </p:sp>
-      <p:sp>
-        <p:nvSpPr>
-          <p:cNvPr id="38" name="Text 36"/>
-          <p:cNvSpPr/>
-          <p:nvPr/>
-        </p:nvSpPr>
-        <p:spPr>
-          <a:xfrm>
-            <a:off x="9217152" y="2606040"/>
-            <a:ext cx="2148840" cy="246888"/>
-          </a:xfrm>
-          <a:prstGeom prst="rect">
-            <a:avLst/>
-          </a:prstGeom>
-          <a:noFill/>
-          <a:ln/>
-        </p:spPr>
-        <p:txBody>
-          <a:bodyPr wrap="square" lIns="0" tIns="0" rIns="0" bIns="0" rtlCol="0" anchor="ctr"/>
-          <a:lstStyle/>
-          <a:p>
-            <a:pPr marL="0" indent="0">
-              <a:buNone/>
-            </a:pPr>
-            <a:r>
-              <a:rPr sz="1000">
-                <a:solidFill>
-                  <a:srgbClr val="F5F7F7"/>
-                </a:solidFill>
-                <a:latin typeface="Aptos"/>
-              </a:rPr>
-              <a:t>PREDICT slide(s) completed</a:t>
-            </a:r>
-            <a:endParaRPr lang="en-US" sz="1080"/>
-          </a:p>
-        </p:txBody>
-      </p:sp>
-      <p:sp>
-        <p:nvSpPr>
-          <p:cNvPr id="40" name="Text 38"/>
-          <p:cNvSpPr/>
-          <p:nvPr/>
-        </p:nvSpPr>
-        <p:spPr>
-          <a:xfrm>
-            <a:off x="9217152" y="3268980"/>
-            <a:ext cx="2148840" cy="246888"/>
-          </a:xfrm>
-          <a:prstGeom prst="rect">
-            <a:avLst/>
-          </a:prstGeom>
-          <a:noFill/>
-          <a:ln/>
-        </p:spPr>
-        <p:txBody>
-          <a:bodyPr wrap="square" lIns="0" tIns="0" rIns="0" bIns="0" rtlCol="0" anchor="ctr"/>
-          <a:lstStyle/>
-          <a:p>
-            <a:pPr marL="0" indent="0">
-              <a:buNone/>
-            </a:pPr>
-            <a:r>
-              <a:rPr sz="950">
-                <a:solidFill>
-                  <a:srgbClr val="F5F7F7"/>
-                </a:solidFill>
-                <a:latin typeface="Aptos"/>
-              </a:rPr>
-              <a:t>PREDICT Excel predictions submitted</a:t>
-            </a:r>
-            <a:endParaRPr lang="en-US" sz="1080"/>
-          </a:p>
-        </p:txBody>
-      </p:sp>
-      <p:sp>
-        <p:nvSpPr>
-          <p:cNvPr id="42" name="Text 40"/>
-          <p:cNvSpPr/>
-          <p:nvPr/>
-        </p:nvSpPr>
-        <p:spPr>
-          <a:xfrm>
-            <a:off x="9217152" y="3968496"/>
-            <a:ext cx="2148840" cy="246888"/>
-          </a:xfrm>
-          <a:prstGeom prst="rect">
-            <a:avLst/>
-          </a:prstGeom>
-          <a:noFill/>
-          <a:ln/>
-        </p:spPr>
-        <p:txBody>
-          <a:bodyPr wrap="square" lIns="0" tIns="0" rIns="0" bIns="0" rtlCol="0" anchor="ctr"/>
-          <a:lstStyle/>
-          <a:p>
-            <a:pPr marL="0" indent="0">
-              <a:buNone/>
-            </a:pPr>
-            <a:r>
-              <a:rPr sz="950">
-                <a:solidFill>
-                  <a:srgbClr val="F5F7F7"/>
-                </a:solidFill>
-                <a:latin typeface="Aptos"/>
-              </a:rPr>
-              <a:t>PREDICT working code submitted</a:t>
-            </a:r>
-            <a:endParaRPr lang="en-US" sz="1080"/>
-          </a:p>
-        </p:txBody>
-      </p:sp>
-      <p:sp>
-        <p:nvSpPr>
-          <p:cNvPr id="44" name="Text 42"/>
-          <p:cNvSpPr/>
-          <p:nvPr/>
-        </p:nvSpPr>
-        <p:spPr>
-          <a:xfrm>
-            <a:off x="9217152" y="4096512"/>
-            <a:ext cx="2148840" cy="246888"/>
-          </a:xfrm>
-          <a:prstGeom prst="rect">
-            <a:avLst/>
-          </a:prstGeom>
-          <a:noFill/>
-          <a:ln/>
-        </p:spPr>
-        <p:txBody>
-          <a:bodyPr wrap="square" lIns="0" tIns="0" rIns="0" bIns="0" rtlCol="0" anchor="ctr"/>
-          <a:lstStyle/>
-          <a:p>
-            <a:pPr marL="0" indent="0">
-              <a:buNone/>
-            </a:pPr>
-            <a:endParaRPr lang="en-US" sz="1080"/>
-          </a:p>
-        </p:txBody>
-      </p:sp>
-      <p:sp>
-        <p:nvSpPr>
-          <p:cNvPr id="46" name="Text 44"/>
-          <p:cNvSpPr/>
-          <p:nvPr/>
-        </p:nvSpPr>
-        <p:spPr>
-          <a:xfrm>
-            <a:off x="9217152" y="4535424"/>
-            <a:ext cx="2148840" cy="246888"/>
-          </a:xfrm>
-          <a:prstGeom prst="rect">
-            <a:avLst/>
-          </a:prstGeom>
-          <a:noFill/>
-          <a:ln/>
-        </p:spPr>
-        <p:txBody>
-          <a:bodyPr wrap="square" lIns="0" tIns="0" rIns="0" bIns="0" rtlCol="0" anchor="ctr"/>
-          <a:lstStyle/>
-          <a:p>
-            <a:pPr marL="0" indent="0">
-              <a:buNone/>
-            </a:pPr>
-            <a:endParaRPr lang="en-US" sz="1080"/>
-          </a:p>
-        </p:txBody>
-      </p:sp>
-      <p:sp>
-        <p:nvSpPr>
-          <p:cNvPr id="48" name="Text 46"/>
-          <p:cNvSpPr/>
-          <p:nvPr/>
-        </p:nvSpPr>
-        <p:spPr>
-          <a:xfrm>
-            <a:off x="9217152" y="4974336"/>
-            <a:ext cx="2148840" cy="246888"/>
-          </a:xfrm>
-          <a:prstGeom prst="rect">
-            <a:avLst/>
-          </a:prstGeom>
-          <a:noFill/>
-          <a:ln/>
-        </p:spPr>
-        <p:txBody>
-          <a:bodyPr wrap="square" lIns="0" tIns="0" rIns="0" bIns="0" rtlCol="0" anchor="ctr"/>
-          <a:lstStyle/>
-          <a:p>
-            <a:pPr marL="0" indent="0">
-              <a:buNone/>
-            </a:pPr>
-            <a:endParaRPr lang="en-US" sz="1080"/>
-          </a:p>
-        </p:txBody>
-      </p:sp>
-      <p:sp>
-        <p:nvSpPr>
-          <p:cNvPr id="49" name="Text 47"/>
-          <p:cNvSpPr/>
-          <p:nvPr/>
-        </p:nvSpPr>
-        <p:spPr>
-          <a:xfrm>
-            <a:off x="8887968" y="5468112"/>
-            <a:ext cx="2514600" cy="530352"/>
-          </a:xfrm>
-          <a:prstGeom prst="rect">
-            <a:avLst/>
-          </a:prstGeom>
-          <a:noFill/>
-          <a:ln/>
-        </p:spPr>
-        <p:txBody>
-          <a:bodyPr wrap="square" lIns="0" tIns="0" rIns="0" bIns="0" rtlCol="0" anchor="ctr"/>
-          <a:lstStyle/>
-          <a:p>
-            <a:pPr marL="0" indent="0">
-              <a:buNone/>
-            </a:pPr>
-            <a:r>
-              <a:rPr sz="900" b="1">
-                <a:solidFill>
-                  <a:srgbClr val="A7B4B8"/>
-                </a:solidFill>
-                <a:latin typeface="Aptos"/>
-              </a:rPr>
-              <a:t>All three completed = 3 raffle entries</a:t>
-            </a:r>
-            <a:endParaRPr lang="en-US" sz="1020"/>
-          </a:p>
-        </p:txBody>
-      </p:sp>
-      <p:sp>
-        <p:nvSpPr>
-          <p:cNvPr id="50" name="Slide Number Placeholder 0"/>
-          <p:cNvSpPr>
-            <a:spLocks noGrp="1"/>
-          </p:cNvSpPr>
-          <p:nvPr>
-            <p:ph type="sldNum" sz="quarter" idx="4294967295"/>
-          </p:nvPr>
-        </p:nvSpPr>
-        <p:spPr>
-          <a:xfrm>
-            <a:off x="11430000" y="6492240"/>
-            <a:ext cx="800000" cy="300000"/>
-          </a:xfrm>
-          <a:prstGeom prst="rect">
-            <a:avLst/>
-          </a:prstGeom>
-          <a:extLst>
-            <a:ext uri="{C572A759-6A51-4108-AA02-DFA0A04FC94B}">
-              <ma14:wrappingTextBoxFlag xmlns:ma14="http://schemas.microsoft.com/office/mac/drawingml/2011/main" xmlns="" val="0"/>
-            </a:ext>
-          </a:extLst>
-        </p:spPr>
-        <p:txBody>
-          <a:bodyPr/>
-          <a:lstStyle>
-            <a:lvl1pPr>
-              <a:defRPr sz="900">
-                <a:solidFill>
-                  <a:srgbClr val="83979D"/>
-                </a:solidFill>
-                <a:latin typeface="Aptos"/>
-                <a:ea typeface="Aptos"/>
-                <a:cs typeface="Aptos"/>
-              </a:defRPr>
-            </a:lvl1pPr>
-          </a:lstStyle>
-          <a:p>
-            <a:r>
-              <a:t>10</a:t>
-            </a:r>
-          </a:p>
-        </p:txBody>
-      </p:sp>
-      <p:sp>
-        <p:nvSpPr>
-          <p:cNvPr id="54" name="Shape 31">
-            <a:extLst>
-              <a:ext uri="{FF2B5EF4-FFF2-40B4-BE49-F238E27FC236}">
-                <a16:creationId xmlns:a16="http://schemas.microsoft.com/office/drawing/2014/main" id="{8F510D31-373D-B547-945C-310AB1A6477B}"/>
-              </a:ext>
-            </a:extLst>
-          </p:cNvPr>
-          <p:cNvSpPr/>
-          <p:nvPr/>
-        </p:nvSpPr>
-        <p:spPr>
-          <a:xfrm>
-            <a:off x="8842248" y="2606040"/>
-            <a:ext cx="228600" cy="228600"/>
-          </a:xfrm>
-          <a:prstGeom prst="ellipse">
-            <a:avLst/>
-          </a:prstGeom>
-          <a:solidFill>
-            <a:srgbClr val="00D8D8"/>
-          </a:solidFill>
-          <a:ln w="12700">
-            <a:solidFill>
-              <a:srgbClr val="00D8D8"/>
-            </a:solidFill>
-            <a:prstDash val="solid"/>
-          </a:ln>
-        </p:spPr>
-        <p:txBody>
-          <a:bodyPr/>
-          <a:lstStyle/>
-          <a:p>
-            <a:endParaRPr/>
-          </a:p>
-        </p:txBody>
-      </p:sp>
-      <p:sp>
-        <p:nvSpPr>
-          <p:cNvPr id="56" name="Text 32">
-            <a:extLst>
-              <a:ext uri="{FF2B5EF4-FFF2-40B4-BE49-F238E27FC236}">
-                <a16:creationId xmlns:a16="http://schemas.microsoft.com/office/drawing/2014/main" id="{5C73FFB8-DCC0-3BB1-0C3D-BDC4F88F82C3}"/>
-              </a:ext>
-            </a:extLst>
-          </p:cNvPr>
-          <p:cNvSpPr/>
-          <p:nvPr/>
-        </p:nvSpPr>
-        <p:spPr>
-          <a:xfrm>
-            <a:off x="8842248" y="2642616"/>
-            <a:ext cx="228600" cy="118872"/>
-          </a:xfrm>
-          <a:prstGeom prst="rect">
-            <a:avLst/>
-          </a:prstGeom>
-          <a:noFill/>
-          <a:ln/>
-        </p:spPr>
-        <p:txBody>
-          <a:bodyPr wrap="square" lIns="0" tIns="0" rIns="0" bIns="0" rtlCol="0" anchor="ctr"/>
-          <a:lstStyle/>
-          <a:p>
-            <a:pPr marL="0" indent="0" algn="ctr">
-              <a:buNone/>
-            </a:pPr>
-            <a:r>
-              <a:rPr lang="en-US" sz="850" b="1">
-                <a:solidFill>
-                  <a:srgbClr val="071013"/>
-                </a:solidFill>
-                <a:latin typeface="Arial" pitchFamily="34" charset="0"/>
-                <a:ea typeface="Arial" pitchFamily="34" charset="-122"/>
-                <a:cs typeface="Arial" pitchFamily="34" charset="-120"/>
-              </a:rPr>
-              <a:t>1</a:t>
-            </a:r>
-            <a:endParaRPr lang="en-US" sz="850"/>
-          </a:p>
-        </p:txBody>
-      </p:sp>
-      <p:sp>
-        <p:nvSpPr>
-          <p:cNvPr id="58" name="Shape 34">
-            <a:extLst>
-              <a:ext uri="{FF2B5EF4-FFF2-40B4-BE49-F238E27FC236}">
-                <a16:creationId xmlns:a16="http://schemas.microsoft.com/office/drawing/2014/main" id="{9C2DE458-ED70-4FCF-047E-69950B1D7BDD}"/>
-              </a:ext>
-            </a:extLst>
-          </p:cNvPr>
-          <p:cNvSpPr/>
-          <p:nvPr/>
-        </p:nvSpPr>
-        <p:spPr>
-          <a:xfrm>
-            <a:off x="8842248" y="3273552"/>
-            <a:ext cx="228600" cy="228600"/>
-          </a:xfrm>
-          <a:prstGeom prst="ellipse">
-            <a:avLst/>
-          </a:prstGeom>
-          <a:solidFill>
-            <a:srgbClr val="00D8D8"/>
-          </a:solidFill>
-          <a:ln w="12700">
-            <a:solidFill>
-              <a:srgbClr val="00D8D8"/>
-            </a:solidFill>
-            <a:prstDash val="solid"/>
-          </a:ln>
-        </p:spPr>
-        <p:txBody>
-          <a:bodyPr/>
-          <a:lstStyle/>
-          <a:p>
-            <a:endParaRPr/>
-          </a:p>
-        </p:txBody>
-      </p:sp>
-      <p:sp>
-        <p:nvSpPr>
-          <p:cNvPr id="60" name="Text 35">
-            <a:extLst>
-              <a:ext uri="{FF2B5EF4-FFF2-40B4-BE49-F238E27FC236}">
-                <a16:creationId xmlns:a16="http://schemas.microsoft.com/office/drawing/2014/main" id="{5BA16ABD-A4B4-C615-2B76-C011CF2FB9E9}"/>
-              </a:ext>
-            </a:extLst>
-          </p:cNvPr>
-          <p:cNvSpPr/>
-          <p:nvPr/>
-        </p:nvSpPr>
-        <p:spPr>
-          <a:xfrm>
-            <a:off x="8842248" y="3310128"/>
-            <a:ext cx="228600" cy="118872"/>
-          </a:xfrm>
-          <a:prstGeom prst="rect">
-            <a:avLst/>
-          </a:prstGeom>
-          <a:noFill/>
-          <a:ln/>
-        </p:spPr>
-        <p:txBody>
-          <a:bodyPr wrap="square" lIns="0" tIns="0" rIns="0" bIns="0" rtlCol="0" anchor="ctr"/>
-          <a:lstStyle/>
-          <a:p>
-            <a:pPr marL="0" indent="0" algn="ctr">
-              <a:buNone/>
-            </a:pPr>
-            <a:r>
-              <a:rPr lang="en-US" sz="850" b="1">
-                <a:solidFill>
-                  <a:srgbClr val="071013"/>
-                </a:solidFill>
-                <a:latin typeface="Arial" pitchFamily="34" charset="0"/>
-                <a:ea typeface="Arial" pitchFamily="34" charset="-122"/>
-                <a:cs typeface="Arial" pitchFamily="34" charset="-120"/>
-              </a:rPr>
-              <a:t>1</a:t>
-            </a:r>
-            <a:endParaRPr lang="en-US" sz="850"/>
-          </a:p>
-        </p:txBody>
-      </p:sp>
-      <p:sp>
-        <p:nvSpPr>
-          <p:cNvPr id="62" name="Shape 37">
-            <a:extLst>
-              <a:ext uri="{FF2B5EF4-FFF2-40B4-BE49-F238E27FC236}">
-                <a16:creationId xmlns:a16="http://schemas.microsoft.com/office/drawing/2014/main" id="{D993812E-4291-9A2D-F566-0546674FC5C1}"/>
-              </a:ext>
-            </a:extLst>
-          </p:cNvPr>
-          <p:cNvSpPr/>
-          <p:nvPr/>
-        </p:nvSpPr>
-        <p:spPr>
-          <a:xfrm>
-            <a:off x="8842248" y="3941064"/>
-            <a:ext cx="228600" cy="228600"/>
-          </a:xfrm>
-          <a:prstGeom prst="ellipse">
-            <a:avLst/>
-          </a:prstGeom>
-          <a:solidFill>
-            <a:srgbClr val="00D8D8"/>
-          </a:solidFill>
-          <a:ln w="12700">
-            <a:solidFill>
-              <a:srgbClr val="00D8D8"/>
-            </a:solidFill>
-            <a:prstDash val="solid"/>
-          </a:ln>
-        </p:spPr>
-        <p:txBody>
-          <a:bodyPr/>
-          <a:lstStyle/>
-          <a:p>
-            <a:endParaRPr/>
-          </a:p>
-        </p:txBody>
-      </p:sp>
-      <p:sp>
-        <p:nvSpPr>
-          <p:cNvPr id="64" name="Text 38">
-            <a:extLst>
-              <a:ext uri="{FF2B5EF4-FFF2-40B4-BE49-F238E27FC236}">
-                <a16:creationId xmlns:a16="http://schemas.microsoft.com/office/drawing/2014/main" id="{DA589CA6-41CE-B556-5AB1-000B4D353554}"/>
-              </a:ext>
-            </a:extLst>
-          </p:cNvPr>
-          <p:cNvSpPr/>
-          <p:nvPr/>
-        </p:nvSpPr>
-        <p:spPr>
-          <a:xfrm>
-            <a:off x="8842248" y="3977640"/>
-            <a:ext cx="228600" cy="118872"/>
-          </a:xfrm>
-          <a:prstGeom prst="rect">
-            <a:avLst/>
-          </a:prstGeom>
-          <a:noFill/>
-          <a:ln/>
-        </p:spPr>
-        <p:txBody>
-          <a:bodyPr wrap="square" lIns="0" tIns="0" rIns="0" bIns="0" rtlCol="0" anchor="ctr"/>
-          <a:lstStyle/>
-          <a:p>
-            <a:pPr marL="0" indent="0" algn="ctr">
-              <a:buNone/>
-            </a:pPr>
-            <a:r>
-              <a:rPr lang="en-US" sz="850" b="1">
-                <a:solidFill>
-                  <a:srgbClr val="071013"/>
-                </a:solidFill>
-                <a:latin typeface="Arial" pitchFamily="34" charset="0"/>
-                <a:ea typeface="Arial" pitchFamily="34" charset="-122"/>
-                <a:cs typeface="Arial" pitchFamily="34" charset="-120"/>
-              </a:rPr>
-              <a:t>1</a:t>
-            </a:r>
-            <a:endParaRPr lang="en-US" sz="850"/>
-          </a:p>
-        </p:txBody>
-      </p:sp>
-      <p:sp>
-        <p:nvSpPr>
-          <p:cNvPr id="43" name="Text 40">
-            <a:extLst>
-              <a:ext uri="{FF2B5EF4-FFF2-40B4-BE49-F238E27FC236}">
-                <a16:creationId xmlns:a16="http://schemas.microsoft.com/office/drawing/2014/main" id="{94371EAE-CE7F-17BF-0C09-00F5D2252ED9}"/>
-              </a:ext>
-            </a:extLst>
-          </p:cNvPr>
-          <p:cNvSpPr/>
-          <p:nvPr/>
-        </p:nvSpPr>
-        <p:spPr>
-          <a:xfrm>
-            <a:off x="8842248" y="4297680"/>
-            <a:ext cx="2651760" cy="512064"/>
-          </a:xfrm>
-          <a:prstGeom prst="rect">
-            <a:avLst/>
-          </a:prstGeom>
-          <a:noFill/>
-          <a:ln/>
-        </p:spPr>
-        <p:txBody>
-          <a:bodyPr wrap="square" lIns="0" tIns="0" rIns="0" bIns="0" rtlCol="0" anchor="ctr"/>
-          <a:lstStyle/>
-          <a:p>
-            <a:pPr marL="0" indent="0">
-              <a:buNone/>
-            </a:pPr>
-            <a:r>
-              <a:rPr lang="en-US" sz="990" i="1">
-                <a:solidFill>
-                  <a:srgbClr val="93A8AE"/>
-                </a:solidFill>
-                <a:latin typeface="Aptos" pitchFamily="34" charset="0"/>
-                <a:ea typeface="Aptos" pitchFamily="34" charset="-122"/>
-                <a:cs typeface="Aptos" pitchFamily="34" charset="-120"/>
-              </a:rPr>
-              <a:t>Use the PREDICT Excel template for the full PID + monster type list.</a:t>
-            </a:r>
-            <a:endParaRPr lang="en-US" sz="990"/>
-          </a:p>
-        </p:txBody>
-      </p:sp>
-    </p:spTree>
-  </p:cSld>
-  <p:clrMapOvr>
-    <a:masterClrMapping/>
-  </p:clrMapOvr>
-</p:sld>
-</file>
-
-<file path=ppt/slides/slide11.xml><?xml version="1.0" encoding="utf-8"?>
-<p:sld xmlns:a="http://schemas.openxmlformats.org/drawingml/2006/main" xmlns:r="http://schemas.openxmlformats.org/officeDocument/2006/relationships" xmlns:p="http://schemas.openxmlformats.org/presentationml/2006/main">
-  <p:cSld>
-    <p:spTree>
-      <p:nvGrpSpPr>
-        <p:cNvPr id="1" name=""/>
-        <p:cNvGrpSpPr/>
-        <p:nvPr/>
-      </p:nvGrpSpPr>
-      <p:grpSpPr>
-        <a:xfrm>
-          <a:off x="0" y="0"/>
-          <a:ext cx="0" cy="0"/>
-          <a:chOff x="0" y="0"/>
-          <a:chExt cx="0" cy="0"/>
-        </a:xfrm>
-      </p:grpSpPr>
-      <p:sp>
-        <p:nvSpPr>
-          <p:cNvPr id="2" name="Text 0"/>
-          <p:cNvSpPr/>
-          <p:nvPr/>
-        </p:nvSpPr>
-        <p:spPr>
-          <a:xfrm>
-            <a:off x="438912" y="658368"/>
-            <a:ext cx="2560320" cy="256032"/>
-          </a:xfrm>
-          <a:prstGeom prst="rect">
-            <a:avLst/>
-          </a:prstGeom>
-          <a:noFill/>
-          <a:ln/>
-        </p:spPr>
-        <p:txBody>
-          <a:bodyPr wrap="square" lIns="0" tIns="0" rIns="0" bIns="0" rtlCol="0" anchor="ctr"/>
-          <a:lstStyle/>
-          <a:p>
-            <a:r>
-              <a:rPr sz="1100" b="1">
-                <a:solidFill>
-                  <a:srgbClr val="FF7A00"/>
-                </a:solidFill>
-                <a:latin typeface="Arial"/>
-              </a:rPr>
-              <a:t>SECTION 3 — PREDICT (OPTIONAL EVIDENCE 1 OF 2)</a:t>
-            </a:r>
-          </a:p>
-        </p:txBody>
-      </p:sp>
-      <p:sp>
-        <p:nvSpPr>
-          <p:cNvPr id="3" name="Text 1"/>
-          <p:cNvSpPr/>
-          <p:nvPr/>
-        </p:nvSpPr>
-        <p:spPr>
-          <a:xfrm>
-            <a:off x="420624" y="941832"/>
-            <a:ext cx="10881360" cy="566928"/>
-          </a:xfrm>
-          <a:prstGeom prst="rect">
-            <a:avLst/>
-          </a:prstGeom>
-          <a:noFill/>
-          <a:ln/>
-        </p:spPr>
-        <p:txBody>
-          <a:bodyPr wrap="square" lIns="0" tIns="0" rIns="0" bIns="0" rtlCol="0" anchor="ctr"/>
-          <a:lstStyle/>
-          <a:p>
-            <a:r>
-              <a:rPr sz="2500" b="1">
-                <a:solidFill>
-                  <a:srgbClr val="F5F7F7"/>
-                </a:solidFill>
-                <a:latin typeface="Arial Black"/>
-              </a:rPr>
-              <a:t>PREDICT — Extra evidence</a:t>
-            </a:r>
-          </a:p>
-        </p:txBody>
-      </p:sp>
-      <p:sp>
-        <p:nvSpPr>
-          <p:cNvPr id="4" name="Text 2"/>
-          <p:cNvSpPr/>
-          <p:nvPr/>
-        </p:nvSpPr>
-        <p:spPr>
-          <a:xfrm>
-            <a:off x="438912" y="1554480"/>
-            <a:ext cx="10698480" cy="384048"/>
-          </a:xfrm>
-          <a:prstGeom prst="rect">
-            <a:avLst/>
-          </a:prstGeom>
-          <a:noFill/>
-          <a:ln/>
-        </p:spPr>
-        <p:txBody>
-          <a:bodyPr wrap="square" lIns="0" tIns="0" rIns="0" bIns="0" rtlCol="0" anchor="ctr"/>
-          <a:lstStyle/>
-          <a:p>
-            <a:r>
-              <a:rPr sz="1100">
-                <a:solidFill>
-                  <a:srgbClr val="A7B4B8"/>
-                </a:solidFill>
-                <a:latin typeface="Aptos"/>
-              </a:rPr>
-              <a:t>Use this optional slide if you need more room for transformation evidence, charts, model outputs, feature explanations or additional examples.</a:t>
-            </a:r>
-          </a:p>
-        </p:txBody>
-      </p:sp>
-      <p:sp>
-        <p:nvSpPr>
-          <p:cNvPr id="5" name="Shape 3"/>
-          <p:cNvSpPr/>
-          <p:nvPr/>
-        </p:nvSpPr>
-        <p:spPr>
-          <a:xfrm>
-            <a:off x="475488" y="2103120"/>
-            <a:ext cx="11201400" cy="3611880"/>
-          </a:xfrm>
-          <a:prstGeom prst="roundRect">
-            <a:avLst/>
-          </a:prstGeom>
-          <a:solidFill>
-            <a:srgbClr val="111A1F"/>
-          </a:solidFill>
-          <a:ln w="15240">
-            <a:solidFill>
-              <a:srgbClr val="294047"/>
-            </a:solidFill>
-            <a:prstDash val="solid"/>
-          </a:ln>
-        </p:spPr>
-        <p:txBody>
-          <a:bodyPr/>
-          <a:lstStyle/>
-          <a:p>
-            <a:endParaRPr/>
-          </a:p>
-        </p:txBody>
-      </p:sp>
-      <p:sp>
-        <p:nvSpPr>
-          <p:cNvPr id="6" name="Text 4"/>
-          <p:cNvSpPr/>
-          <p:nvPr/>
-        </p:nvSpPr>
-        <p:spPr>
-          <a:xfrm>
-            <a:off x="786384" y="2423160"/>
-            <a:ext cx="3657600" cy="621792"/>
-          </a:xfrm>
-          <a:prstGeom prst="rect">
-            <a:avLst/>
-          </a:prstGeom>
-          <a:noFill/>
-          <a:ln/>
-        </p:spPr>
-        <p:txBody>
-          <a:bodyPr wrap="square" lIns="0" tIns="0" rIns="0" bIns="0" rtlCol="0" anchor="ctr"/>
-          <a:lstStyle/>
-          <a:p>
-            <a:r>
-              <a:rPr sz="1200">
-                <a:solidFill>
-                  <a:srgbClr val="F5F7F7"/>
-                </a:solidFill>
-                <a:latin typeface="Aptos"/>
-              </a:rPr>
-              <a:t>Use this space for evidence that supports your prediction. Large screenshots and charts are encouraged when they make your reasoning easier to understand.</a:t>
-            </a:r>
-          </a:p>
-        </p:txBody>
-      </p:sp>
-      <p:sp>
-        <p:nvSpPr>
-          <p:cNvPr id="7" name="Text 5"/>
-          <p:cNvSpPr/>
-          <p:nvPr/>
-        </p:nvSpPr>
-        <p:spPr>
-          <a:xfrm>
-            <a:off x="786384" y="5074920"/>
-            <a:ext cx="3474720" cy="228600"/>
-          </a:xfrm>
-          <a:prstGeom prst="rect">
-            <a:avLst/>
-          </a:prstGeom>
-          <a:noFill/>
-          <a:ln/>
-        </p:spPr>
-        <p:txBody>
-          <a:bodyPr wrap="square" lIns="0" tIns="0" rIns="0" bIns="0" rtlCol="0" anchor="ctr"/>
-          <a:lstStyle/>
-          <a:p>
-            <a:r>
-              <a:rPr sz="900" b="1">
-                <a:solidFill>
-                  <a:srgbClr val="00D8D8"/>
-                </a:solidFill>
-                <a:latin typeface="Arial"/>
-              </a:rPr>
-              <a:t>ADD OPTIONAL PREDICT EVIDENCE HERE</a:t>
-            </a:r>
-          </a:p>
-        </p:txBody>
-      </p:sp>
-      <p:sp>
-        <p:nvSpPr>
-          <p:cNvPr id="8" name="Shape 6"/>
-          <p:cNvSpPr/>
-          <p:nvPr/>
-        </p:nvSpPr>
-        <p:spPr>
-          <a:xfrm rot="19800000">
-            <a:off x="9738360" y="4160520"/>
-            <a:ext cx="297180" cy="274320"/>
-          </a:xfrm>
-          <a:prstGeom prst="triangle">
-            <a:avLst/>
-          </a:prstGeom>
-          <a:solidFill>
-            <a:srgbClr val="FF7A00"/>
-          </a:solidFill>
-          <a:ln w="12700">
-            <a:solidFill>
-              <a:srgbClr val="FF7A00"/>
-            </a:solidFill>
-            <a:prstDash val="solid"/>
-          </a:ln>
-        </p:spPr>
-        <p:txBody>
-          <a:bodyPr/>
-          <a:lstStyle/>
-          <a:p>
-            <a:endParaRPr/>
-          </a:p>
-        </p:txBody>
-      </p:sp>
-      <p:sp>
-        <p:nvSpPr>
-          <p:cNvPr id="9" name="Shape 7"/>
-          <p:cNvSpPr/>
-          <p:nvPr/>
-        </p:nvSpPr>
-        <p:spPr>
-          <a:xfrm rot="1800000">
-            <a:off x="10469880" y="4160520"/>
-            <a:ext cx="297180" cy="274320"/>
-          </a:xfrm>
-          <a:prstGeom prst="triangle">
-            <a:avLst/>
-          </a:prstGeom>
-          <a:solidFill>
-            <a:srgbClr val="FF7A00"/>
-          </a:solidFill>
-          <a:ln w="12700">
-            <a:solidFill>
-              <a:srgbClr val="FF7A00"/>
-            </a:solidFill>
-            <a:prstDash val="solid"/>
-          </a:ln>
-        </p:spPr>
-        <p:txBody>
-          <a:bodyPr/>
-          <a:lstStyle/>
-          <a:p>
-            <a:endParaRPr/>
-          </a:p>
-        </p:txBody>
-      </p:sp>
-      <p:sp>
-        <p:nvSpPr>
-          <p:cNvPr id="10" name="Shape 8"/>
-          <p:cNvSpPr/>
-          <p:nvPr/>
-        </p:nvSpPr>
-        <p:spPr>
-          <a:xfrm>
-            <a:off x="9646920" y="4274820"/>
-            <a:ext cx="1200150" cy="1005840"/>
-          </a:xfrm>
-          <a:prstGeom prst="ellipse">
-            <a:avLst/>
-          </a:prstGeom>
-          <a:solidFill>
-            <a:srgbClr val="FF7A00"/>
-          </a:solidFill>
-          <a:ln w="12700">
-            <a:solidFill>
-              <a:srgbClr val="FF7A00"/>
-            </a:solidFill>
-            <a:prstDash val="solid"/>
-          </a:ln>
-        </p:spPr>
-        <p:txBody>
-          <a:bodyPr/>
-          <a:lstStyle/>
-          <a:p>
-            <a:endParaRPr/>
-          </a:p>
-        </p:txBody>
-      </p:sp>
-      <p:sp>
-        <p:nvSpPr>
-          <p:cNvPr id="11" name="Shape 9"/>
-          <p:cNvSpPr/>
-          <p:nvPr/>
-        </p:nvSpPr>
-        <p:spPr>
-          <a:xfrm>
-            <a:off x="9875520" y="4549140"/>
-            <a:ext cx="274320" cy="297180"/>
-          </a:xfrm>
-          <a:prstGeom prst="ellipse">
-            <a:avLst/>
-          </a:prstGeom>
-          <a:solidFill>
-            <a:srgbClr val="F7F7F7"/>
-          </a:solidFill>
-          <a:ln w="12700">
-            <a:solidFill>
-              <a:srgbClr val="F7F7F7"/>
-            </a:solidFill>
-            <a:prstDash val="solid"/>
-          </a:ln>
-        </p:spPr>
-        <p:txBody>
-          <a:bodyPr/>
-          <a:lstStyle/>
-          <a:p>
-            <a:endParaRPr/>
-          </a:p>
-        </p:txBody>
-      </p:sp>
-      <p:sp>
-        <p:nvSpPr>
-          <p:cNvPr id="12" name="Shape 10"/>
-          <p:cNvSpPr/>
-          <p:nvPr/>
-        </p:nvSpPr>
-        <p:spPr>
-          <a:xfrm>
-            <a:off x="10332720" y="4549140"/>
-            <a:ext cx="274320" cy="297180"/>
-          </a:xfrm>
-          <a:prstGeom prst="ellipse">
-            <a:avLst/>
-          </a:prstGeom>
-          <a:solidFill>
-            <a:srgbClr val="F7F7F7"/>
-          </a:solidFill>
-          <a:ln w="12700">
-            <a:solidFill>
-              <a:srgbClr val="F7F7F7"/>
-            </a:solidFill>
-            <a:prstDash val="solid"/>
-          </a:ln>
-        </p:spPr>
-        <p:txBody>
-          <a:bodyPr/>
-          <a:lstStyle/>
-          <a:p>
-            <a:endParaRPr/>
-          </a:p>
-        </p:txBody>
-      </p:sp>
-      <p:sp>
-        <p:nvSpPr>
-          <p:cNvPr id="13" name="Shape 11"/>
-          <p:cNvSpPr/>
-          <p:nvPr/>
-        </p:nvSpPr>
-        <p:spPr>
-          <a:xfrm>
-            <a:off x="9978390" y="4640580"/>
-            <a:ext cx="91440" cy="114300"/>
-          </a:xfrm>
-          <a:prstGeom prst="ellipse">
-            <a:avLst/>
-          </a:prstGeom>
-          <a:solidFill>
-            <a:srgbClr val="071013"/>
-          </a:solidFill>
-          <a:ln w="12700">
-            <a:solidFill>
-              <a:srgbClr val="071013"/>
-            </a:solidFill>
-            <a:prstDash val="solid"/>
-          </a:ln>
-        </p:spPr>
-        <p:txBody>
-          <a:bodyPr/>
-          <a:lstStyle/>
-          <a:p>
-            <a:endParaRPr/>
-          </a:p>
-        </p:txBody>
-      </p:sp>
-      <p:sp>
-        <p:nvSpPr>
-          <p:cNvPr id="14" name="Shape 12"/>
-          <p:cNvSpPr/>
-          <p:nvPr/>
-        </p:nvSpPr>
-        <p:spPr>
-          <a:xfrm>
-            <a:off x="10435590" y="4640580"/>
-            <a:ext cx="91440" cy="114300"/>
-          </a:xfrm>
-          <a:prstGeom prst="ellipse">
-            <a:avLst/>
-          </a:prstGeom>
-          <a:solidFill>
-            <a:srgbClr val="071013"/>
-          </a:solidFill>
-          <a:ln w="12700">
-            <a:solidFill>
-              <a:srgbClr val="071013"/>
-            </a:solidFill>
-            <a:prstDash val="solid"/>
-          </a:ln>
-        </p:spPr>
-        <p:txBody>
-          <a:bodyPr/>
-          <a:lstStyle/>
-          <a:p>
-            <a:endParaRPr/>
-          </a:p>
-        </p:txBody>
-      </p:sp>
-      <p:sp>
-        <p:nvSpPr>
-          <p:cNvPr id="15" name="Shape 13"/>
-          <p:cNvSpPr/>
-          <p:nvPr/>
-        </p:nvSpPr>
-        <p:spPr>
-          <a:xfrm>
-            <a:off x="10069830" y="4823460"/>
-            <a:ext cx="377190" cy="194310"/>
-          </a:xfrm>
-          <a:prstGeom prst="arc">
-            <a:avLst/>
-          </a:prstGeom>
-          <a:solidFill>
-            <a:srgbClr val="FF7A00">
-              <a:alpha val="0"/>
-            </a:srgbClr>
-          </a:solidFill>
-          <a:ln w="25400">
-            <a:solidFill>
-              <a:srgbClr val="071013"/>
-            </a:solidFill>
-            <a:prstDash val="solid"/>
-          </a:ln>
-        </p:spPr>
-        <p:txBody>
-          <a:bodyPr/>
-          <a:lstStyle/>
-          <a:p>
-            <a:endParaRPr/>
-          </a:p>
-        </p:txBody>
-      </p:sp>
-      <p:sp>
-        <p:nvSpPr>
-          <p:cNvPr id="16" name="Shape 14"/>
-          <p:cNvSpPr/>
-          <p:nvPr/>
-        </p:nvSpPr>
-        <p:spPr>
-          <a:xfrm>
-            <a:off x="7571232" y="2441448"/>
-            <a:ext cx="3246120" cy="438912"/>
-          </a:xfrm>
-          <a:prstGeom prst="roundRect">
-            <a:avLst/>
-          </a:prstGeom>
-          <a:solidFill>
-            <a:srgbClr val="0F1A1E"/>
-          </a:solidFill>
-          <a:ln w="15240">
-            <a:solidFill>
-              <a:srgbClr val="FF7A00"/>
-            </a:solidFill>
-            <a:prstDash val="solid"/>
-          </a:ln>
-        </p:spPr>
-        <p:txBody>
-          <a:bodyPr/>
-          <a:lstStyle/>
-          <a:p>
-            <a:endParaRPr/>
-          </a:p>
-        </p:txBody>
-      </p:sp>
-      <p:sp>
-        <p:nvSpPr>
-          <p:cNvPr id="17" name="Text 15"/>
-          <p:cNvSpPr/>
-          <p:nvPr/>
-        </p:nvSpPr>
-        <p:spPr>
-          <a:xfrm>
-            <a:off x="7708392" y="2542032"/>
-            <a:ext cx="2971800" cy="201168"/>
-          </a:xfrm>
-          <a:prstGeom prst="rect">
-            <a:avLst/>
-          </a:prstGeom>
-          <a:noFill/>
-          <a:ln/>
-        </p:spPr>
-        <p:txBody>
-          <a:bodyPr wrap="square" lIns="0" tIns="0" rIns="0" bIns="0" rtlCol="0" anchor="ctr"/>
-          <a:lstStyle/>
-          <a:p>
-            <a:r>
-              <a:rPr sz="950" b="1">
-                <a:solidFill>
-                  <a:srgbClr val="FF7A00"/>
-                </a:solidFill>
-                <a:latin typeface="Aptos"/>
-              </a:rPr>
-              <a:t>OPTIONAL EVIDENCE 1 OF 2 — DELETE IF NOT NEEDED</a:t>
-            </a:r>
-          </a:p>
-        </p:txBody>
-      </p:sp>
-      <p:sp>
-        <p:nvSpPr>
-          <p:cNvPr id="25" name="Slide Number Placeholder 0"/>
-          <p:cNvSpPr>
-            <a:spLocks noGrp="1"/>
-          </p:cNvSpPr>
-          <p:nvPr>
-            <p:ph type="sldNum" sz="quarter" idx="4294967295"/>
-          </p:nvPr>
-        </p:nvSpPr>
-        <p:spPr>
-          <a:xfrm>
-            <a:off x="11430000" y="6492240"/>
-            <a:ext cx="800000" cy="300000"/>
-          </a:xfrm>
-          <a:prstGeom prst="rect">
-            <a:avLst/>
-          </a:prstGeom>
-          <a:extLst>
-            <a:ext uri="{C572A759-6A51-4108-AA02-DFA0A04FC94B}">
-              <ma14:wrappingTextBoxFlag xmlns:ma14="http://schemas.microsoft.com/office/mac/drawingml/2011/main" xmlns="" val="0"/>
-            </a:ext>
-          </a:extLst>
-        </p:spPr>
-        <p:txBody>
-          <a:bodyPr/>
-          <a:lstStyle>
-            <a:lvl1pPr>
-              <a:defRPr sz="900">
-                <a:solidFill>
-                  <a:srgbClr val="83979D"/>
-                </a:solidFill>
-                <a:latin typeface="Aptos"/>
-                <a:ea typeface="Aptos"/>
-                <a:cs typeface="Aptos"/>
-              </a:defRPr>
-            </a:lvl1pPr>
-          </a:lstStyle>
-          <a:p>
-            <a:r>
-              <a:t>11</a:t>
-            </a:r>
-          </a:p>
-        </p:txBody>
-      </p:sp>
-    </p:spTree>
-  </p:cSld>
-  <p:clrMapOvr>
-    <a:masterClrMapping/>
-  </p:clrMapOvr>
-</p:sld>
-</file>
-
-<file path=ppt/slides/slide12.xml><?xml version="1.0" encoding="utf-8"?>
-<p:sld xmlns:a="http://schemas.openxmlformats.org/drawingml/2006/main" xmlns:r="http://schemas.openxmlformats.org/officeDocument/2006/relationships" xmlns:p="http://schemas.openxmlformats.org/presentationml/2006/main">
-  <p:cSld>
-    <p:spTree>
-      <p:nvGrpSpPr>
-        <p:cNvPr id="1" name=""/>
-        <p:cNvGrpSpPr/>
-        <p:nvPr/>
-      </p:nvGrpSpPr>
-      <p:grpSpPr>
-        <a:xfrm>
-          <a:off x="0" y="0"/>
-          <a:ext cx="0" cy="0"/>
-          <a:chOff x="0" y="0"/>
-          <a:chExt cx="0" cy="0"/>
-        </a:xfrm>
-      </p:grpSpPr>
-      <p:sp>
-        <p:nvSpPr>
-          <p:cNvPr id="2" name="Text 0"/>
-          <p:cNvSpPr/>
-          <p:nvPr/>
-        </p:nvSpPr>
-        <p:spPr>
-          <a:xfrm>
-            <a:off x="438912" y="658368"/>
-            <a:ext cx="2560320" cy="256032"/>
-          </a:xfrm>
-          <a:prstGeom prst="rect">
-            <a:avLst/>
-          </a:prstGeom>
-          <a:noFill/>
-          <a:ln/>
-        </p:spPr>
-        <p:txBody>
-          <a:bodyPr wrap="square" lIns="0" tIns="0" rIns="0" bIns="0" rtlCol="0" anchor="ctr"/>
-          <a:lstStyle/>
-          <a:p>
-            <a:r>
-              <a:rPr sz="1100" b="1">
-                <a:solidFill>
-                  <a:srgbClr val="FF7A00"/>
-                </a:solidFill>
-                <a:latin typeface="Arial"/>
-              </a:rPr>
-              <a:t>SECTION 3 — PREDICT (OPTIONAL EVIDENCE 2 OF 2)</a:t>
-            </a:r>
-          </a:p>
-        </p:txBody>
-      </p:sp>
-      <p:sp>
-        <p:nvSpPr>
-          <p:cNvPr id="3" name="Text 1"/>
-          <p:cNvSpPr/>
-          <p:nvPr/>
-        </p:nvSpPr>
-        <p:spPr>
-          <a:xfrm>
-            <a:off x="420624" y="941832"/>
-            <a:ext cx="10881360" cy="566928"/>
-          </a:xfrm>
-          <a:prstGeom prst="rect">
-            <a:avLst/>
-          </a:prstGeom>
-          <a:noFill/>
-          <a:ln/>
-        </p:spPr>
-        <p:txBody>
-          <a:bodyPr wrap="square" lIns="0" tIns="0" rIns="0" bIns="0" rtlCol="0" anchor="ctr"/>
-          <a:lstStyle/>
-          <a:p>
-            <a:r>
-              <a:rPr sz="2500" b="1">
-                <a:solidFill>
-                  <a:srgbClr val="F5F7F7"/>
-                </a:solidFill>
-                <a:latin typeface="Arial Black"/>
-              </a:rPr>
-              <a:t>PREDICT — Extra evidence</a:t>
-            </a:r>
-          </a:p>
-        </p:txBody>
-      </p:sp>
-      <p:sp>
-        <p:nvSpPr>
-          <p:cNvPr id="4" name="Text 2"/>
-          <p:cNvSpPr/>
-          <p:nvPr/>
-        </p:nvSpPr>
-        <p:spPr>
-          <a:xfrm>
-            <a:off x="438912" y="1554480"/>
-            <a:ext cx="10698480" cy="384048"/>
-          </a:xfrm>
-          <a:prstGeom prst="rect">
-            <a:avLst/>
-          </a:prstGeom>
-          <a:noFill/>
-          <a:ln/>
-        </p:spPr>
-        <p:txBody>
-          <a:bodyPr wrap="square" lIns="0" tIns="0" rIns="0" bIns="0" rtlCol="0" anchor="ctr"/>
-          <a:lstStyle/>
-          <a:p>
-            <a:r>
-              <a:rPr sz="1100">
-                <a:solidFill>
-                  <a:srgbClr val="A7B4B8"/>
-                </a:solidFill>
-                <a:latin typeface="Aptos"/>
-              </a:rPr>
-              <a:t>Use this optional slide if you need more room for transformation evidence, charts, model outputs, feature explanations or additional examples.</a:t>
-            </a:r>
-          </a:p>
-        </p:txBody>
-      </p:sp>
-      <p:sp>
-        <p:nvSpPr>
-          <p:cNvPr id="5" name="Shape 3"/>
-          <p:cNvSpPr/>
-          <p:nvPr/>
-        </p:nvSpPr>
-        <p:spPr>
-          <a:xfrm>
-            <a:off x="475488" y="2103120"/>
-            <a:ext cx="11201400" cy="3611880"/>
-          </a:xfrm>
-          <a:prstGeom prst="roundRect">
-            <a:avLst/>
-          </a:prstGeom>
-          <a:solidFill>
-            <a:srgbClr val="111A1F"/>
-          </a:solidFill>
-          <a:ln w="15240">
-            <a:solidFill>
-              <a:srgbClr val="294047"/>
-            </a:solidFill>
-            <a:prstDash val="solid"/>
-          </a:ln>
-        </p:spPr>
-        <p:txBody>
-          <a:bodyPr/>
-          <a:lstStyle/>
-          <a:p>
-            <a:endParaRPr/>
-          </a:p>
-        </p:txBody>
-      </p:sp>
-      <p:sp>
-        <p:nvSpPr>
-          <p:cNvPr id="6" name="Text 4"/>
-          <p:cNvSpPr/>
-          <p:nvPr/>
-        </p:nvSpPr>
-        <p:spPr>
-          <a:xfrm>
-            <a:off x="786384" y="2423160"/>
-            <a:ext cx="3657600" cy="621792"/>
-          </a:xfrm>
-          <a:prstGeom prst="rect">
-            <a:avLst/>
-          </a:prstGeom>
-          <a:noFill/>
-          <a:ln/>
-        </p:spPr>
-        <p:txBody>
-          <a:bodyPr wrap="square" lIns="0" tIns="0" rIns="0" bIns="0" rtlCol="0" anchor="ctr"/>
-          <a:lstStyle/>
-          <a:p>
-            <a:r>
-              <a:rPr sz="1200">
-                <a:solidFill>
-                  <a:srgbClr val="F5F7F7"/>
-                </a:solidFill>
-                <a:latin typeface="Aptos"/>
-              </a:rPr>
-              <a:t>Use this space for evidence that supports your prediction. Large screenshots and charts are encouraged when they make your reasoning easier to understand.</a:t>
-            </a:r>
-          </a:p>
-        </p:txBody>
-      </p:sp>
-      <p:sp>
-        <p:nvSpPr>
-          <p:cNvPr id="7" name="Text 5"/>
-          <p:cNvSpPr/>
-          <p:nvPr/>
-        </p:nvSpPr>
-        <p:spPr>
-          <a:xfrm>
-            <a:off x="786384" y="5074920"/>
-            <a:ext cx="3474720" cy="228600"/>
-          </a:xfrm>
-          <a:prstGeom prst="rect">
-            <a:avLst/>
-          </a:prstGeom>
-          <a:noFill/>
-          <a:ln/>
-        </p:spPr>
-        <p:txBody>
-          <a:bodyPr wrap="square" lIns="0" tIns="0" rIns="0" bIns="0" rtlCol="0" anchor="ctr"/>
-          <a:lstStyle/>
-          <a:p>
-            <a:r>
-              <a:rPr sz="900" b="1">
-                <a:solidFill>
-                  <a:srgbClr val="00D8D8"/>
-                </a:solidFill>
-                <a:latin typeface="Arial"/>
-              </a:rPr>
-              <a:t>ADD OPTIONAL PREDICT EVIDENCE HERE</a:t>
-            </a:r>
-          </a:p>
-        </p:txBody>
-      </p:sp>
-      <p:sp>
-        <p:nvSpPr>
-          <p:cNvPr id="8" name="Shape 6"/>
-          <p:cNvSpPr/>
-          <p:nvPr/>
-        </p:nvSpPr>
-        <p:spPr>
-          <a:xfrm rot="19800000">
-            <a:off x="9738360" y="4160520"/>
-            <a:ext cx="297180" cy="274320"/>
-          </a:xfrm>
-          <a:prstGeom prst="triangle">
-            <a:avLst/>
-          </a:prstGeom>
-          <a:solidFill>
-            <a:srgbClr val="FF7A00"/>
-          </a:solidFill>
-          <a:ln w="12700">
-            <a:solidFill>
-              <a:srgbClr val="FF7A00"/>
-            </a:solidFill>
-            <a:prstDash val="solid"/>
-          </a:ln>
-        </p:spPr>
-        <p:txBody>
-          <a:bodyPr/>
-          <a:lstStyle/>
-          <a:p>
-            <a:endParaRPr/>
-          </a:p>
-        </p:txBody>
-      </p:sp>
-      <p:sp>
-        <p:nvSpPr>
-          <p:cNvPr id="9" name="Shape 7"/>
-          <p:cNvSpPr/>
-          <p:nvPr/>
-        </p:nvSpPr>
-        <p:spPr>
-          <a:xfrm rot="1800000">
-            <a:off x="10469880" y="4160520"/>
-            <a:ext cx="297180" cy="274320"/>
-          </a:xfrm>
-          <a:prstGeom prst="triangle">
-            <a:avLst/>
-          </a:prstGeom>
-          <a:solidFill>
-            <a:srgbClr val="FF7A00"/>
-          </a:solidFill>
-          <a:ln w="12700">
-            <a:solidFill>
-              <a:srgbClr val="FF7A00"/>
-            </a:solidFill>
-            <a:prstDash val="solid"/>
-          </a:ln>
-        </p:spPr>
-        <p:txBody>
-          <a:bodyPr/>
-          <a:lstStyle/>
-          <a:p>
-            <a:endParaRPr/>
-          </a:p>
-        </p:txBody>
-      </p:sp>
-      <p:sp>
-        <p:nvSpPr>
-          <p:cNvPr id="10" name="Shape 8"/>
-          <p:cNvSpPr/>
-          <p:nvPr/>
-        </p:nvSpPr>
-        <p:spPr>
-          <a:xfrm>
-            <a:off x="9646920" y="4274820"/>
-            <a:ext cx="1200150" cy="1005840"/>
-          </a:xfrm>
-          <a:prstGeom prst="ellipse">
-            <a:avLst/>
-          </a:prstGeom>
-          <a:solidFill>
-            <a:srgbClr val="FF7A00"/>
-          </a:solidFill>
-          <a:ln w="12700">
-            <a:solidFill>
-              <a:srgbClr val="FF7A00"/>
-            </a:solidFill>
-            <a:prstDash val="solid"/>
-          </a:ln>
-        </p:spPr>
-        <p:txBody>
-          <a:bodyPr/>
-          <a:lstStyle/>
-          <a:p>
-            <a:endParaRPr/>
-          </a:p>
-        </p:txBody>
-      </p:sp>
-      <p:sp>
-        <p:nvSpPr>
-          <p:cNvPr id="11" name="Shape 9"/>
-          <p:cNvSpPr/>
-          <p:nvPr/>
-        </p:nvSpPr>
-        <p:spPr>
-          <a:xfrm>
-            <a:off x="9875520" y="4549140"/>
-            <a:ext cx="274320" cy="297180"/>
-          </a:xfrm>
-          <a:prstGeom prst="ellipse">
-            <a:avLst/>
-          </a:prstGeom>
-          <a:solidFill>
-            <a:srgbClr val="F7F7F7"/>
-          </a:solidFill>
-          <a:ln w="12700">
-            <a:solidFill>
-              <a:srgbClr val="F7F7F7"/>
-            </a:solidFill>
-            <a:prstDash val="solid"/>
-          </a:ln>
-        </p:spPr>
-        <p:txBody>
-          <a:bodyPr/>
-          <a:lstStyle/>
-          <a:p>
-            <a:endParaRPr/>
-          </a:p>
-        </p:txBody>
-      </p:sp>
-      <p:sp>
-        <p:nvSpPr>
-          <p:cNvPr id="12" name="Shape 10"/>
-          <p:cNvSpPr/>
-          <p:nvPr/>
-        </p:nvSpPr>
-        <p:spPr>
-          <a:xfrm>
-            <a:off x="10332720" y="4549140"/>
-            <a:ext cx="274320" cy="297180"/>
-          </a:xfrm>
-          <a:prstGeom prst="ellipse">
-            <a:avLst/>
-          </a:prstGeom>
-          <a:solidFill>
-            <a:srgbClr val="F7F7F7"/>
-          </a:solidFill>
-          <a:ln w="12700">
-            <a:solidFill>
-              <a:srgbClr val="F7F7F7"/>
-            </a:solidFill>
-            <a:prstDash val="solid"/>
-          </a:ln>
-        </p:spPr>
-        <p:txBody>
-          <a:bodyPr/>
-          <a:lstStyle/>
-          <a:p>
-            <a:endParaRPr/>
-          </a:p>
-        </p:txBody>
-      </p:sp>
-      <p:sp>
-        <p:nvSpPr>
-          <p:cNvPr id="13" name="Shape 11"/>
-          <p:cNvSpPr/>
-          <p:nvPr/>
-        </p:nvSpPr>
-        <p:spPr>
-          <a:xfrm>
-            <a:off x="9978390" y="4640580"/>
-            <a:ext cx="91440" cy="114300"/>
-          </a:xfrm>
-          <a:prstGeom prst="ellipse">
-            <a:avLst/>
-          </a:prstGeom>
-          <a:solidFill>
-            <a:srgbClr val="071013"/>
-          </a:solidFill>
-          <a:ln w="12700">
-            <a:solidFill>
-              <a:srgbClr val="071013"/>
-            </a:solidFill>
-            <a:prstDash val="solid"/>
-          </a:ln>
-        </p:spPr>
-        <p:txBody>
-          <a:bodyPr/>
-          <a:lstStyle/>
-          <a:p>
-            <a:endParaRPr/>
-          </a:p>
-        </p:txBody>
-      </p:sp>
-      <p:sp>
-        <p:nvSpPr>
-          <p:cNvPr id="14" name="Shape 12"/>
-          <p:cNvSpPr/>
-          <p:nvPr/>
-        </p:nvSpPr>
-        <p:spPr>
-          <a:xfrm>
-            <a:off x="10435590" y="4640580"/>
-            <a:ext cx="91440" cy="114300"/>
-          </a:xfrm>
-          <a:prstGeom prst="ellipse">
-            <a:avLst/>
-          </a:prstGeom>
-          <a:solidFill>
-            <a:srgbClr val="071013"/>
-          </a:solidFill>
-          <a:ln w="12700">
-            <a:solidFill>
-              <a:srgbClr val="071013"/>
-            </a:solidFill>
-            <a:prstDash val="solid"/>
-          </a:ln>
-        </p:spPr>
-        <p:txBody>
-          <a:bodyPr/>
-          <a:lstStyle/>
-          <a:p>
-            <a:endParaRPr/>
-          </a:p>
-        </p:txBody>
-      </p:sp>
-      <p:sp>
-        <p:nvSpPr>
-          <p:cNvPr id="15" name="Shape 13"/>
-          <p:cNvSpPr/>
-          <p:nvPr/>
-        </p:nvSpPr>
-        <p:spPr>
-          <a:xfrm>
-            <a:off x="10069830" y="4823460"/>
-            <a:ext cx="377190" cy="194310"/>
-          </a:xfrm>
-          <a:prstGeom prst="arc">
-            <a:avLst/>
-          </a:prstGeom>
-          <a:solidFill>
-            <a:srgbClr val="FF7A00">
-              <a:alpha val="0"/>
-            </a:srgbClr>
-          </a:solidFill>
-          <a:ln w="25400">
-            <a:solidFill>
-              <a:srgbClr val="071013"/>
-            </a:solidFill>
-            <a:prstDash val="solid"/>
-          </a:ln>
-        </p:spPr>
-        <p:txBody>
-          <a:bodyPr/>
-          <a:lstStyle/>
-          <a:p>
-            <a:endParaRPr/>
-          </a:p>
-        </p:txBody>
-      </p:sp>
-      <p:sp>
-        <p:nvSpPr>
-          <p:cNvPr id="16" name="Shape 14"/>
-          <p:cNvSpPr/>
-          <p:nvPr/>
-        </p:nvSpPr>
-        <p:spPr>
-          <a:xfrm>
-            <a:off x="7571232" y="2441448"/>
-            <a:ext cx="3246120" cy="438912"/>
-          </a:xfrm>
-          <a:prstGeom prst="roundRect">
-            <a:avLst/>
-          </a:prstGeom>
-          <a:solidFill>
-            <a:srgbClr val="0F1A1E"/>
-          </a:solidFill>
-          <a:ln w="15240">
-            <a:solidFill>
-              <a:srgbClr val="FF7A00"/>
-            </a:solidFill>
-            <a:prstDash val="solid"/>
-          </a:ln>
-        </p:spPr>
-        <p:txBody>
-          <a:bodyPr/>
-          <a:lstStyle/>
-          <a:p>
-            <a:endParaRPr/>
-          </a:p>
-        </p:txBody>
-      </p:sp>
-      <p:sp>
-        <p:nvSpPr>
-          <p:cNvPr id="17" name="Text 15"/>
-          <p:cNvSpPr/>
-          <p:nvPr/>
-        </p:nvSpPr>
-        <p:spPr>
-          <a:xfrm>
-            <a:off x="7708392" y="2542032"/>
-            <a:ext cx="2971800" cy="201168"/>
-          </a:xfrm>
-          <a:prstGeom prst="rect">
-            <a:avLst/>
-          </a:prstGeom>
-          <a:noFill/>
-          <a:ln/>
-        </p:spPr>
-        <p:txBody>
-          <a:bodyPr wrap="square" lIns="0" tIns="0" rIns="0" bIns="0" rtlCol="0" anchor="ctr"/>
-          <a:lstStyle/>
-          <a:p>
-            <a:r>
-              <a:rPr sz="950" b="1">
-                <a:solidFill>
-                  <a:srgbClr val="FF7A00"/>
-                </a:solidFill>
-                <a:latin typeface="Aptos"/>
-              </a:rPr>
-              <a:t>OPTIONAL EVIDENCE 2 OF 2 — DELETE IF NOT NEEDED</a:t>
-            </a:r>
-          </a:p>
-        </p:txBody>
-      </p:sp>
-      <p:sp>
-        <p:nvSpPr>
-          <p:cNvPr id="25" name="Slide Number Placeholder 0"/>
-          <p:cNvSpPr>
-            <a:spLocks noGrp="1"/>
-          </p:cNvSpPr>
-          <p:nvPr>
-            <p:ph type="sldNum" sz="quarter" idx="4294967295"/>
-          </p:nvPr>
-        </p:nvSpPr>
-        <p:spPr>
-          <a:xfrm>
-            <a:off x="11430000" y="6492240"/>
-            <a:ext cx="800000" cy="300000"/>
-          </a:xfrm>
-          <a:prstGeom prst="rect">
-            <a:avLst/>
-          </a:prstGeom>
-          <a:extLst>
-            <a:ext uri="{C572A759-6A51-4108-AA02-DFA0A04FC94B}">
-              <ma14:wrappingTextBoxFlag xmlns:ma14="http://schemas.microsoft.com/office/mac/drawingml/2011/main" xmlns="" val="0"/>
-            </a:ext>
-          </a:extLst>
-        </p:spPr>
-        <p:txBody>
-          <a:bodyPr/>
-          <a:lstStyle>
-            <a:lvl1pPr>
-              <a:defRPr sz="900">
-                <a:solidFill>
-                  <a:srgbClr val="83979D"/>
-                </a:solidFill>
-                <a:latin typeface="Aptos"/>
-                <a:ea typeface="Aptos"/>
-                <a:cs typeface="Aptos"/>
-              </a:defRPr>
-            </a:lvl1pPr>
-          </a:lstStyle>
-          <a:p>
-            <a:r>
-              <a:t>12</a:t>
-            </a:r>
-          </a:p>
-        </p:txBody>
-      </p:sp>
-    </p:spTree>
-  </p:cSld>
-  <p:clrMapOvr>
-    <a:masterClrMapping/>
-  </p:clrMapOvr>
-</p:sld>
-</file>
-
 <file path=ppt/slides/slide13.xml><?xml version="1.0" encoding="utf-8"?>
 <p:sld xmlns:a="http://schemas.openxmlformats.org/drawingml/2006/main" xmlns:r="http://schemas.openxmlformats.org/officeDocument/2006/relationships" xmlns:p="http://schemas.openxmlformats.org/presentationml/2006/main">
   <p:cSld name="Slide 8">
@@ -8619,7 +5325,7 @@
           </a:lstStyle>
           <a:p>
             <a:r>
-              <a:t>13</a:t>
+              <a:t>7</a:t>
             </a:r>
           </a:p>
         </p:txBody>
@@ -9028,7 +5734,7 @@
           </a:lstStyle>
           <a:p>
             <a:r>
-              <a:t>14</a:t>
+              <a:t>8</a:t>
             </a:r>
           </a:p>
         </p:txBody>
@@ -9057,632 +5763,6 @@
           </a:prstGeom>
         </p:spPr>
       </p:pic>
-    </p:spTree>
-  </p:cSld>
-  <p:clrMapOvr>
-    <a:masterClrMapping/>
-  </p:clrMapOvr>
-</p:sld>
-</file>
-
-<file path=ppt/slides/slide15.xml><?xml version="1.0" encoding="utf-8"?>
-<p:sld xmlns:a="http://schemas.openxmlformats.org/drawingml/2006/main" xmlns:r="http://schemas.openxmlformats.org/officeDocument/2006/relationships" xmlns:p="http://schemas.openxmlformats.org/presentationml/2006/main">
-  <p:cSld name="Slide 10">
-    <p:spTree>
-      <p:nvGrpSpPr>
-        <p:cNvPr id="1" name=""/>
-        <p:cNvGrpSpPr/>
-        <p:nvPr/>
-      </p:nvGrpSpPr>
-      <p:grpSpPr>
-        <a:xfrm>
-          <a:off x="0" y="0"/>
-          <a:ext cx="0" cy="0"/>
-          <a:chOff x="0" y="0"/>
-          <a:chExt cx="0" cy="0"/>
-        </a:xfrm>
-      </p:grpSpPr>
-      <p:sp>
-        <p:nvSpPr>
-          <p:cNvPr id="2" name="Text 0"/>
-          <p:cNvSpPr/>
-          <p:nvPr/>
-        </p:nvSpPr>
-        <p:spPr>
-          <a:xfrm>
-            <a:off x="438912" y="658368"/>
-            <a:ext cx="2560320" cy="256032"/>
-          </a:xfrm>
-          <a:prstGeom prst="rect">
-            <a:avLst/>
-          </a:prstGeom>
-          <a:noFill/>
-          <a:ln/>
-        </p:spPr>
-        <p:txBody>
-          <a:bodyPr wrap="square" lIns="0" tIns="0" rIns="0" bIns="0" rtlCol="0" anchor="ctr"/>
-          <a:lstStyle/>
-          <a:p>
-            <a:r>
-              <a:rPr sz="1100" b="1">
-                <a:solidFill>
-                  <a:srgbClr val="FF7A00"/>
-                </a:solidFill>
-                <a:latin typeface="Arial"/>
-              </a:rPr>
-              <a:t>SECTION 4 — SHOW</a:t>
-            </a:r>
-            <a:r>
-              <a:rPr lang="en-GB" sz="1100" b="1">
-                <a:solidFill>
-                  <a:srgbClr val="FF7A00"/>
-                </a:solidFill>
-                <a:latin typeface="Arial"/>
-              </a:rPr>
-              <a:t>CASE</a:t>
-            </a:r>
-            <a:r>
-              <a:rPr sz="1100" b="1">
-                <a:solidFill>
-                  <a:srgbClr val="FF7A00"/>
-                </a:solidFill>
-                <a:latin typeface="Arial"/>
-              </a:rPr>
-              <a:t> (OPTIONAL EVIDENCE 2 OF 2)</a:t>
-            </a:r>
-          </a:p>
-        </p:txBody>
-      </p:sp>
-      <p:sp>
-        <p:nvSpPr>
-          <p:cNvPr id="3" name="Text 1"/>
-          <p:cNvSpPr/>
-          <p:nvPr/>
-        </p:nvSpPr>
-        <p:spPr>
-          <a:xfrm>
-            <a:off x="420624" y="941832"/>
-            <a:ext cx="10881360" cy="566928"/>
-          </a:xfrm>
-          <a:prstGeom prst="rect">
-            <a:avLst/>
-          </a:prstGeom>
-          <a:noFill/>
-          <a:ln/>
-        </p:spPr>
-        <p:txBody>
-          <a:bodyPr wrap="square" lIns="0" tIns="0" rIns="0" bIns="0" rtlCol="0" anchor="ctr"/>
-          <a:lstStyle/>
-          <a:p>
-            <a:r>
-              <a:rPr sz="2500" b="1">
-                <a:solidFill>
-                  <a:srgbClr val="F5F7F7"/>
-                </a:solidFill>
-                <a:latin typeface="Arial Black"/>
-              </a:rPr>
-              <a:t>SHOW</a:t>
-            </a:r>
-            <a:r>
-              <a:rPr lang="en-GB" sz="2500" b="1">
-                <a:solidFill>
-                  <a:srgbClr val="F5F7F7"/>
-                </a:solidFill>
-                <a:latin typeface="Arial Black"/>
-              </a:rPr>
-              <a:t>CASE</a:t>
-            </a:r>
-            <a:r>
-              <a:rPr sz="2500" b="1">
-                <a:solidFill>
-                  <a:srgbClr val="F5F7F7"/>
-                </a:solidFill>
-                <a:latin typeface="Arial Black"/>
-              </a:rPr>
-              <a:t> — Extra evidence</a:t>
-            </a:r>
-          </a:p>
-        </p:txBody>
-      </p:sp>
-      <p:sp>
-        <p:nvSpPr>
-          <p:cNvPr id="4" name="Text 2"/>
-          <p:cNvSpPr/>
-          <p:nvPr/>
-        </p:nvSpPr>
-        <p:spPr>
-          <a:xfrm>
-            <a:off x="438912" y="1554480"/>
-            <a:ext cx="10698480" cy="384048"/>
-          </a:xfrm>
-          <a:prstGeom prst="rect">
-            <a:avLst/>
-          </a:prstGeom>
-          <a:noFill/>
-          <a:ln/>
-        </p:spPr>
-        <p:txBody>
-          <a:bodyPr wrap="square" lIns="0" tIns="0" rIns="0" bIns="0" rtlCol="0" anchor="ctr"/>
-          <a:lstStyle/>
-          <a:p>
-            <a:r>
-              <a:rPr sz="1100">
-                <a:solidFill>
-                  <a:srgbClr val="A7B4B8"/>
-                </a:solidFill>
-                <a:latin typeface="Aptos"/>
-              </a:rPr>
-              <a:t>Use this final optional slide only if you still need space for an important screenshot, chart, interface, monster example, model output or advanced work.</a:t>
-            </a:r>
-          </a:p>
-        </p:txBody>
-      </p:sp>
-      <p:sp>
-        <p:nvSpPr>
-          <p:cNvPr id="5" name="Shape 3"/>
-          <p:cNvSpPr/>
-          <p:nvPr/>
-        </p:nvSpPr>
-        <p:spPr>
-          <a:xfrm>
-            <a:off x="475488" y="2103120"/>
-            <a:ext cx="11201400" cy="3611880"/>
-          </a:xfrm>
-          <a:prstGeom prst="roundRect">
-            <a:avLst/>
-          </a:prstGeom>
-          <a:solidFill>
-            <a:srgbClr val="111A1F"/>
-          </a:solidFill>
-          <a:ln w="15240">
-            <a:solidFill>
-              <a:srgbClr val="294047"/>
-            </a:solidFill>
-            <a:prstDash val="solid"/>
-          </a:ln>
-        </p:spPr>
-        <p:txBody>
-          <a:bodyPr/>
-          <a:lstStyle/>
-          <a:p>
-            <a:endParaRPr/>
-          </a:p>
-        </p:txBody>
-      </p:sp>
-      <p:sp>
-        <p:nvSpPr>
-          <p:cNvPr id="6" name="Text 4"/>
-          <p:cNvSpPr/>
-          <p:nvPr/>
-        </p:nvSpPr>
-        <p:spPr>
-          <a:xfrm>
-            <a:off x="786384" y="2423160"/>
-            <a:ext cx="3657600" cy="621792"/>
-          </a:xfrm>
-          <a:prstGeom prst="rect">
-            <a:avLst/>
-          </a:prstGeom>
-          <a:noFill/>
-          <a:ln/>
-        </p:spPr>
-        <p:txBody>
-          <a:bodyPr wrap="square" lIns="0" tIns="0" rIns="0" bIns="0" rtlCol="0" anchor="ctr"/>
-          <a:lstStyle/>
-          <a:p>
-            <a:r>
-              <a:rPr sz="1200">
-                <a:solidFill>
-                  <a:srgbClr val="F5F7F7"/>
-                </a:solidFill>
-                <a:latin typeface="Aptos"/>
-              </a:rPr>
-              <a:t>This is your final flex slide. Use it only for evidence that genuinely helps us understand your solution — you do not need to fill all 15 slides.</a:t>
-            </a:r>
-          </a:p>
-        </p:txBody>
-      </p:sp>
-      <p:sp>
-        <p:nvSpPr>
-          <p:cNvPr id="7" name="Text 5"/>
-          <p:cNvSpPr/>
-          <p:nvPr/>
-        </p:nvSpPr>
-        <p:spPr>
-          <a:xfrm>
-            <a:off x="786384" y="5074920"/>
-            <a:ext cx="3474720" cy="228600"/>
-          </a:xfrm>
-          <a:prstGeom prst="rect">
-            <a:avLst/>
-          </a:prstGeom>
-          <a:noFill/>
-          <a:ln/>
-        </p:spPr>
-        <p:txBody>
-          <a:bodyPr wrap="square" lIns="0" tIns="0" rIns="0" bIns="0" rtlCol="0" anchor="ctr"/>
-          <a:lstStyle/>
-          <a:p>
-            <a:r>
-              <a:rPr sz="900" b="1">
-                <a:solidFill>
-                  <a:srgbClr val="00D8D8"/>
-                </a:solidFill>
-                <a:latin typeface="Arial"/>
-              </a:rPr>
-              <a:t>ADD OPTIONAL SHOW EVIDENCE HERE</a:t>
-            </a:r>
-          </a:p>
-        </p:txBody>
-      </p:sp>
-      <p:sp>
-        <p:nvSpPr>
-          <p:cNvPr id="8" name="Shape 6"/>
-          <p:cNvSpPr/>
-          <p:nvPr/>
-        </p:nvSpPr>
-        <p:spPr>
-          <a:xfrm rot="19800000">
-            <a:off x="9738360" y="4160520"/>
-            <a:ext cx="297180" cy="274320"/>
-          </a:xfrm>
-          <a:prstGeom prst="triangle">
-            <a:avLst/>
-          </a:prstGeom>
-          <a:solidFill>
-            <a:srgbClr val="FF7A00"/>
-          </a:solidFill>
-          <a:ln w="12700">
-            <a:solidFill>
-              <a:srgbClr val="FF7A00"/>
-            </a:solidFill>
-            <a:prstDash val="solid"/>
-          </a:ln>
-        </p:spPr>
-        <p:txBody>
-          <a:bodyPr/>
-          <a:lstStyle/>
-          <a:p>
-            <a:endParaRPr/>
-          </a:p>
-        </p:txBody>
-      </p:sp>
-      <p:sp>
-        <p:nvSpPr>
-          <p:cNvPr id="9" name="Shape 7"/>
-          <p:cNvSpPr/>
-          <p:nvPr/>
-        </p:nvSpPr>
-        <p:spPr>
-          <a:xfrm rot="1800000">
-            <a:off x="10469880" y="4160520"/>
-            <a:ext cx="297180" cy="274320"/>
-          </a:xfrm>
-          <a:prstGeom prst="triangle">
-            <a:avLst/>
-          </a:prstGeom>
-          <a:solidFill>
-            <a:srgbClr val="FF7A00"/>
-          </a:solidFill>
-          <a:ln w="12700">
-            <a:solidFill>
-              <a:srgbClr val="FF7A00"/>
-            </a:solidFill>
-            <a:prstDash val="solid"/>
-          </a:ln>
-        </p:spPr>
-        <p:txBody>
-          <a:bodyPr/>
-          <a:lstStyle/>
-          <a:p>
-            <a:endParaRPr/>
-          </a:p>
-        </p:txBody>
-      </p:sp>
-      <p:sp>
-        <p:nvSpPr>
-          <p:cNvPr id="10" name="Shape 8"/>
-          <p:cNvSpPr/>
-          <p:nvPr/>
-        </p:nvSpPr>
-        <p:spPr>
-          <a:xfrm>
-            <a:off x="9646920" y="4274820"/>
-            <a:ext cx="1200150" cy="1005840"/>
-          </a:xfrm>
-          <a:prstGeom prst="ellipse">
-            <a:avLst/>
-          </a:prstGeom>
-          <a:solidFill>
-            <a:srgbClr val="FF7A00"/>
-          </a:solidFill>
-          <a:ln w="12700">
-            <a:solidFill>
-              <a:srgbClr val="FF7A00"/>
-            </a:solidFill>
-            <a:prstDash val="solid"/>
-          </a:ln>
-        </p:spPr>
-        <p:txBody>
-          <a:bodyPr/>
-          <a:lstStyle/>
-          <a:p>
-            <a:endParaRPr/>
-          </a:p>
-        </p:txBody>
-      </p:sp>
-      <p:sp>
-        <p:nvSpPr>
-          <p:cNvPr id="11" name="Shape 9"/>
-          <p:cNvSpPr/>
-          <p:nvPr/>
-        </p:nvSpPr>
-        <p:spPr>
-          <a:xfrm>
-            <a:off x="9875520" y="4549140"/>
-            <a:ext cx="274320" cy="297180"/>
-          </a:xfrm>
-          <a:prstGeom prst="ellipse">
-            <a:avLst/>
-          </a:prstGeom>
-          <a:solidFill>
-            <a:srgbClr val="F7F7F7"/>
-          </a:solidFill>
-          <a:ln w="12700">
-            <a:solidFill>
-              <a:srgbClr val="F7F7F7"/>
-            </a:solidFill>
-            <a:prstDash val="solid"/>
-          </a:ln>
-        </p:spPr>
-        <p:txBody>
-          <a:bodyPr/>
-          <a:lstStyle/>
-          <a:p>
-            <a:endParaRPr/>
-          </a:p>
-        </p:txBody>
-      </p:sp>
-      <p:sp>
-        <p:nvSpPr>
-          <p:cNvPr id="12" name="Shape 10"/>
-          <p:cNvSpPr/>
-          <p:nvPr/>
-        </p:nvSpPr>
-        <p:spPr>
-          <a:xfrm>
-            <a:off x="10332720" y="4549140"/>
-            <a:ext cx="274320" cy="297180"/>
-          </a:xfrm>
-          <a:prstGeom prst="ellipse">
-            <a:avLst/>
-          </a:prstGeom>
-          <a:solidFill>
-            <a:srgbClr val="F7F7F7"/>
-          </a:solidFill>
-          <a:ln w="12700">
-            <a:solidFill>
-              <a:srgbClr val="F7F7F7"/>
-            </a:solidFill>
-            <a:prstDash val="solid"/>
-          </a:ln>
-        </p:spPr>
-        <p:txBody>
-          <a:bodyPr/>
-          <a:lstStyle/>
-          <a:p>
-            <a:endParaRPr/>
-          </a:p>
-        </p:txBody>
-      </p:sp>
-      <p:sp>
-        <p:nvSpPr>
-          <p:cNvPr id="13" name="Shape 11"/>
-          <p:cNvSpPr/>
-          <p:nvPr/>
-        </p:nvSpPr>
-        <p:spPr>
-          <a:xfrm>
-            <a:off x="9978390" y="4640580"/>
-            <a:ext cx="91440" cy="114300"/>
-          </a:xfrm>
-          <a:prstGeom prst="ellipse">
-            <a:avLst/>
-          </a:prstGeom>
-          <a:solidFill>
-            <a:srgbClr val="071013"/>
-          </a:solidFill>
-          <a:ln w="12700">
-            <a:solidFill>
-              <a:srgbClr val="071013"/>
-            </a:solidFill>
-            <a:prstDash val="solid"/>
-          </a:ln>
-        </p:spPr>
-        <p:txBody>
-          <a:bodyPr/>
-          <a:lstStyle/>
-          <a:p>
-            <a:endParaRPr/>
-          </a:p>
-        </p:txBody>
-      </p:sp>
-      <p:sp>
-        <p:nvSpPr>
-          <p:cNvPr id="14" name="Shape 12"/>
-          <p:cNvSpPr/>
-          <p:nvPr/>
-        </p:nvSpPr>
-        <p:spPr>
-          <a:xfrm>
-            <a:off x="10435590" y="4640580"/>
-            <a:ext cx="91440" cy="114300"/>
-          </a:xfrm>
-          <a:prstGeom prst="ellipse">
-            <a:avLst/>
-          </a:prstGeom>
-          <a:solidFill>
-            <a:srgbClr val="071013"/>
-          </a:solidFill>
-          <a:ln w="12700">
-            <a:solidFill>
-              <a:srgbClr val="071013"/>
-            </a:solidFill>
-            <a:prstDash val="solid"/>
-          </a:ln>
-        </p:spPr>
-        <p:txBody>
-          <a:bodyPr/>
-          <a:lstStyle/>
-          <a:p>
-            <a:endParaRPr/>
-          </a:p>
-        </p:txBody>
-      </p:sp>
-      <p:sp>
-        <p:nvSpPr>
-          <p:cNvPr id="15" name="Shape 13"/>
-          <p:cNvSpPr/>
-          <p:nvPr/>
-        </p:nvSpPr>
-        <p:spPr>
-          <a:xfrm>
-            <a:off x="10069830" y="4823460"/>
-            <a:ext cx="377190" cy="194310"/>
-          </a:xfrm>
-          <a:prstGeom prst="arc">
-            <a:avLst/>
-          </a:prstGeom>
-          <a:solidFill>
-            <a:srgbClr val="FF7A00">
-              <a:alpha val="0"/>
-            </a:srgbClr>
-          </a:solidFill>
-          <a:ln w="25400">
-            <a:solidFill>
-              <a:srgbClr val="071013"/>
-            </a:solidFill>
-            <a:prstDash val="solid"/>
-          </a:ln>
-        </p:spPr>
-        <p:txBody>
-          <a:bodyPr/>
-          <a:lstStyle/>
-          <a:p>
-            <a:endParaRPr/>
-          </a:p>
-        </p:txBody>
-      </p:sp>
-      <p:sp>
-        <p:nvSpPr>
-          <p:cNvPr id="16" name="Shape 14"/>
-          <p:cNvSpPr/>
-          <p:nvPr/>
-        </p:nvSpPr>
-        <p:spPr>
-          <a:xfrm>
-            <a:off x="7571232" y="2441448"/>
-            <a:ext cx="3246120" cy="438912"/>
-          </a:xfrm>
-          <a:prstGeom prst="roundRect">
-            <a:avLst/>
-          </a:prstGeom>
-          <a:solidFill>
-            <a:srgbClr val="0F1A1E"/>
-          </a:solidFill>
-          <a:ln w="15240">
-            <a:solidFill>
-              <a:srgbClr val="FF7A00"/>
-            </a:solidFill>
-            <a:prstDash val="solid"/>
-          </a:ln>
-        </p:spPr>
-        <p:txBody>
-          <a:bodyPr/>
-          <a:lstStyle/>
-          <a:p>
-            <a:endParaRPr/>
-          </a:p>
-        </p:txBody>
-      </p:sp>
-      <p:sp>
-        <p:nvSpPr>
-          <p:cNvPr id="17" name="Text 15"/>
-          <p:cNvSpPr/>
-          <p:nvPr/>
-        </p:nvSpPr>
-        <p:spPr>
-          <a:xfrm>
-            <a:off x="7708392" y="2542032"/>
-            <a:ext cx="2971800" cy="201168"/>
-          </a:xfrm>
-          <a:prstGeom prst="rect">
-            <a:avLst/>
-          </a:prstGeom>
-          <a:noFill/>
-          <a:ln/>
-        </p:spPr>
-        <p:txBody>
-          <a:bodyPr wrap="square" lIns="0" tIns="0" rIns="0" bIns="0" rtlCol="0" anchor="ctr"/>
-          <a:lstStyle/>
-          <a:p>
-            <a:r>
-              <a:rPr sz="950" b="1">
-                <a:solidFill>
-                  <a:srgbClr val="FF7A00"/>
-                </a:solidFill>
-                <a:latin typeface="Aptos"/>
-              </a:rPr>
-              <a:t>OPTIONAL EVIDENCE 2 OF 2 — DELETE IF NOT NEEDED</a:t>
-            </a:r>
-          </a:p>
-        </p:txBody>
-      </p:sp>
-      <p:sp>
-        <p:nvSpPr>
-          <p:cNvPr id="25" name="Slide Number Placeholder 0"/>
-          <p:cNvSpPr>
-            <a:spLocks noGrp="1"/>
-          </p:cNvSpPr>
-          <p:nvPr>
-            <p:ph type="sldNum" sz="quarter" idx="4294967295"/>
-          </p:nvPr>
-        </p:nvSpPr>
-        <p:spPr>
-          <a:xfrm>
-            <a:off x="11430000" y="6492240"/>
-            <a:ext cx="800000" cy="300000"/>
-          </a:xfrm>
-          <a:prstGeom prst="rect">
-            <a:avLst/>
-          </a:prstGeom>
-          <a:extLst>
-            <a:ext uri="{C572A759-6A51-4108-AA02-DFA0A04FC94B}">
-              <ma14:wrappingTextBoxFlag xmlns:ma14="http://schemas.microsoft.com/office/mac/drawingml/2011/main" xmlns="" val="0"/>
-            </a:ext>
-          </a:extLst>
-        </p:spPr>
-        <p:txBody>
-          <a:bodyPr/>
-          <a:lstStyle>
-            <a:lvl1pPr>
-              <a:defRPr sz="900">
-                <a:solidFill>
-                  <a:srgbClr val="83979D"/>
-                </a:solidFill>
-                <a:latin typeface="Aptos"/>
-                <a:ea typeface="Aptos"/>
-                <a:cs typeface="Aptos"/>
-              </a:defRPr>
-            </a:lvl1pPr>
-          </a:lstStyle>
-          <a:p>
-            <a:r>
-              <a:t>15</a:t>
-            </a:r>
-          </a:p>
-        </p:txBody>
-      </p:sp>
     </p:spTree>
   </p:cSld>
   <p:clrMapOvr>
@@ -17660,2921 +13740,6 @@
 </p:sld>
 </file>
 
-<file path=ppt/slides/slide7.xml><?xml version="1.0" encoding="utf-8"?>
-<p:sld xmlns:a="http://schemas.openxmlformats.org/drawingml/2006/main" xmlns:r="http://schemas.openxmlformats.org/officeDocument/2006/relationships" xmlns:p="http://schemas.openxmlformats.org/presentationml/2006/main">
-  <p:cSld>
-    <p:spTree>
-      <p:nvGrpSpPr>
-        <p:cNvPr id="1" name=""/>
-        <p:cNvGrpSpPr/>
-        <p:nvPr/>
-      </p:nvGrpSpPr>
-      <p:grpSpPr>
-        <a:xfrm>
-          <a:off x="0" y="0"/>
-          <a:ext cx="0" cy="0"/>
-          <a:chOff x="0" y="0"/>
-          <a:chExt cx="0" cy="0"/>
-        </a:xfrm>
-      </p:grpSpPr>
-      <p:sp>
-        <p:nvSpPr>
-          <p:cNvPr id="2" name="Text 0"/>
-          <p:cNvSpPr/>
-          <p:nvPr/>
-        </p:nvSpPr>
-        <p:spPr>
-          <a:xfrm>
-            <a:off x="438912" y="658368"/>
-            <a:ext cx="2560320" cy="256032"/>
-          </a:xfrm>
-          <a:prstGeom prst="rect">
-            <a:avLst/>
-          </a:prstGeom>
-          <a:noFill/>
-          <a:ln/>
-        </p:spPr>
-        <p:txBody>
-          <a:bodyPr wrap="square" lIns="0" tIns="0" rIns="0" bIns="0" rtlCol="0" anchor="ctr"/>
-          <a:lstStyle/>
-          <a:p>
-            <a:r>
-              <a:rPr sz="1100" b="1">
-                <a:solidFill>
-                  <a:srgbClr val="FF7A00"/>
-                </a:solidFill>
-                <a:latin typeface="Arial"/>
-              </a:rPr>
-              <a:t>SECTION 2 — BUILD &amp; TEST (OPTIONAL EVIDENCE 1 OF 2)</a:t>
-            </a:r>
-          </a:p>
-        </p:txBody>
-      </p:sp>
-      <p:sp>
-        <p:nvSpPr>
-          <p:cNvPr id="3" name="Text 1"/>
-          <p:cNvSpPr/>
-          <p:nvPr/>
-        </p:nvSpPr>
-        <p:spPr>
-          <a:xfrm>
-            <a:off x="420624" y="941832"/>
-            <a:ext cx="10881360" cy="566928"/>
-          </a:xfrm>
-          <a:prstGeom prst="rect">
-            <a:avLst/>
-          </a:prstGeom>
-          <a:noFill/>
-          <a:ln/>
-        </p:spPr>
-        <p:txBody>
-          <a:bodyPr wrap="square" lIns="0" tIns="0" rIns="0" bIns="0" rtlCol="0" anchor="ctr"/>
-          <a:lstStyle/>
-          <a:p>
-            <a:r>
-              <a:rPr sz="2500" b="1">
-                <a:solidFill>
-                  <a:srgbClr val="F5F7F7"/>
-                </a:solidFill>
-                <a:latin typeface="Arial Black"/>
-              </a:rPr>
-              <a:t>BUILD &amp; TEST — Extra evidence</a:t>
-            </a:r>
-          </a:p>
-        </p:txBody>
-      </p:sp>
-      <p:sp>
-        <p:nvSpPr>
-          <p:cNvPr id="4" name="Text 2"/>
-          <p:cNvSpPr/>
-          <p:nvPr/>
-        </p:nvSpPr>
-        <p:spPr>
-          <a:xfrm>
-            <a:off x="438912" y="1554480"/>
-            <a:ext cx="10698480" cy="384048"/>
-          </a:xfrm>
-          <a:prstGeom prst="rect">
-            <a:avLst/>
-          </a:prstGeom>
-          <a:noFill/>
-          <a:ln/>
-        </p:spPr>
-        <p:txBody>
-          <a:bodyPr wrap="square" lIns="0" tIns="0" rIns="0" bIns="0" rtlCol="0" anchor="ctr"/>
-          <a:lstStyle/>
-          <a:p>
-            <a:r>
-              <a:rPr sz="1100">
-                <a:solidFill>
-                  <a:srgbClr val="A7B4B8"/>
-                </a:solidFill>
-                <a:latin typeface="Aptos"/>
-              </a:rPr>
-              <a:t>Use this optional slide if you need more room for a large screenshot, model output, chart, code/output evidence or test result.</a:t>
-            </a:r>
-          </a:p>
-        </p:txBody>
-      </p:sp>
-      <p:sp>
-        <p:nvSpPr>
-          <p:cNvPr id="5" name="Shape 3"/>
-          <p:cNvSpPr/>
-          <p:nvPr/>
-        </p:nvSpPr>
-        <p:spPr>
-          <a:xfrm>
-            <a:off x="475488" y="2103120"/>
-            <a:ext cx="11201400" cy="3611880"/>
-          </a:xfrm>
-          <a:prstGeom prst="roundRect">
-            <a:avLst/>
-          </a:prstGeom>
-          <a:solidFill>
-            <a:srgbClr val="111A1F"/>
-          </a:solidFill>
-          <a:ln w="15240">
-            <a:solidFill>
-              <a:srgbClr val="294047"/>
-            </a:solidFill>
-            <a:prstDash val="solid"/>
-          </a:ln>
-        </p:spPr>
-        <p:txBody>
-          <a:bodyPr/>
-          <a:lstStyle/>
-          <a:p>
-            <a:endParaRPr/>
-          </a:p>
-        </p:txBody>
-      </p:sp>
-      <p:sp>
-        <p:nvSpPr>
-          <p:cNvPr id="6" name="Text 4"/>
-          <p:cNvSpPr/>
-          <p:nvPr/>
-        </p:nvSpPr>
-        <p:spPr>
-          <a:xfrm>
-            <a:off x="786384" y="2423160"/>
-            <a:ext cx="3657600" cy="621792"/>
-          </a:xfrm>
-          <a:prstGeom prst="rect">
-            <a:avLst/>
-          </a:prstGeom>
-          <a:noFill/>
-          <a:ln/>
-        </p:spPr>
-        <p:txBody>
-          <a:bodyPr wrap="square" lIns="0" tIns="0" rIns="0" bIns="0" rtlCol="0" anchor="ctr"/>
-          <a:lstStyle/>
-          <a:p>
-            <a:r>
-              <a:rPr sz="1200">
-                <a:solidFill>
-                  <a:srgbClr val="F5F7F7"/>
-                </a:solidFill>
-                <a:latin typeface="Aptos"/>
-              </a:rPr>
-              <a:t>Use the space for supporting BUILD or TEST evidence. Keep the required results on the core slides and use this only when the extra space makes your work clearer.</a:t>
-            </a:r>
-          </a:p>
-        </p:txBody>
-      </p:sp>
-      <p:sp>
-        <p:nvSpPr>
-          <p:cNvPr id="7" name="Text 5"/>
-          <p:cNvSpPr/>
-          <p:nvPr/>
-        </p:nvSpPr>
-        <p:spPr>
-          <a:xfrm>
-            <a:off x="786384" y="5074920"/>
-            <a:ext cx="3474720" cy="228600"/>
-          </a:xfrm>
-          <a:prstGeom prst="rect">
-            <a:avLst/>
-          </a:prstGeom>
-          <a:noFill/>
-          <a:ln/>
-        </p:spPr>
-        <p:txBody>
-          <a:bodyPr wrap="square" lIns="0" tIns="0" rIns="0" bIns="0" rtlCol="0" anchor="ctr"/>
-          <a:lstStyle/>
-          <a:p>
-            <a:r>
-              <a:rPr sz="900" b="1">
-                <a:solidFill>
-                  <a:srgbClr val="00D8D8"/>
-                </a:solidFill>
-                <a:latin typeface="Arial"/>
-              </a:rPr>
-              <a:t>ADD OPTIONAL BUILD / TEST EVIDENCE HERE</a:t>
-            </a:r>
-          </a:p>
-        </p:txBody>
-      </p:sp>
-      <p:sp>
-        <p:nvSpPr>
-          <p:cNvPr id="8" name="Shape 6"/>
-          <p:cNvSpPr/>
-          <p:nvPr/>
-        </p:nvSpPr>
-        <p:spPr>
-          <a:xfrm rot="19800000">
-            <a:off x="9738360" y="4160520"/>
-            <a:ext cx="297180" cy="274320"/>
-          </a:xfrm>
-          <a:prstGeom prst="triangle">
-            <a:avLst/>
-          </a:prstGeom>
-          <a:solidFill>
-            <a:srgbClr val="FF7A00"/>
-          </a:solidFill>
-          <a:ln w="12700">
-            <a:solidFill>
-              <a:srgbClr val="FF7A00"/>
-            </a:solidFill>
-            <a:prstDash val="solid"/>
-          </a:ln>
-        </p:spPr>
-        <p:txBody>
-          <a:bodyPr/>
-          <a:lstStyle/>
-          <a:p>
-            <a:endParaRPr/>
-          </a:p>
-        </p:txBody>
-      </p:sp>
-      <p:sp>
-        <p:nvSpPr>
-          <p:cNvPr id="9" name="Shape 7"/>
-          <p:cNvSpPr/>
-          <p:nvPr/>
-        </p:nvSpPr>
-        <p:spPr>
-          <a:xfrm rot="1800000">
-            <a:off x="10469880" y="4160520"/>
-            <a:ext cx="297180" cy="274320"/>
-          </a:xfrm>
-          <a:prstGeom prst="triangle">
-            <a:avLst/>
-          </a:prstGeom>
-          <a:solidFill>
-            <a:srgbClr val="FF7A00"/>
-          </a:solidFill>
-          <a:ln w="12700">
-            <a:solidFill>
-              <a:srgbClr val="FF7A00"/>
-            </a:solidFill>
-            <a:prstDash val="solid"/>
-          </a:ln>
-        </p:spPr>
-        <p:txBody>
-          <a:bodyPr/>
-          <a:lstStyle/>
-          <a:p>
-            <a:endParaRPr/>
-          </a:p>
-        </p:txBody>
-      </p:sp>
-      <p:sp>
-        <p:nvSpPr>
-          <p:cNvPr id="10" name="Shape 8"/>
-          <p:cNvSpPr/>
-          <p:nvPr/>
-        </p:nvSpPr>
-        <p:spPr>
-          <a:xfrm>
-            <a:off x="9646920" y="4274820"/>
-            <a:ext cx="1200150" cy="1005840"/>
-          </a:xfrm>
-          <a:prstGeom prst="ellipse">
-            <a:avLst/>
-          </a:prstGeom>
-          <a:solidFill>
-            <a:srgbClr val="FF7A00"/>
-          </a:solidFill>
-          <a:ln w="12700">
-            <a:solidFill>
-              <a:srgbClr val="FF7A00"/>
-            </a:solidFill>
-            <a:prstDash val="solid"/>
-          </a:ln>
-        </p:spPr>
-        <p:txBody>
-          <a:bodyPr/>
-          <a:lstStyle/>
-          <a:p>
-            <a:endParaRPr/>
-          </a:p>
-        </p:txBody>
-      </p:sp>
-      <p:sp>
-        <p:nvSpPr>
-          <p:cNvPr id="11" name="Shape 9"/>
-          <p:cNvSpPr/>
-          <p:nvPr/>
-        </p:nvSpPr>
-        <p:spPr>
-          <a:xfrm>
-            <a:off x="9875520" y="4549140"/>
-            <a:ext cx="274320" cy="297180"/>
-          </a:xfrm>
-          <a:prstGeom prst="ellipse">
-            <a:avLst/>
-          </a:prstGeom>
-          <a:solidFill>
-            <a:srgbClr val="F7F7F7"/>
-          </a:solidFill>
-          <a:ln w="12700">
-            <a:solidFill>
-              <a:srgbClr val="F7F7F7"/>
-            </a:solidFill>
-            <a:prstDash val="solid"/>
-          </a:ln>
-        </p:spPr>
-        <p:txBody>
-          <a:bodyPr/>
-          <a:lstStyle/>
-          <a:p>
-            <a:endParaRPr/>
-          </a:p>
-        </p:txBody>
-      </p:sp>
-      <p:sp>
-        <p:nvSpPr>
-          <p:cNvPr id="12" name="Shape 10"/>
-          <p:cNvSpPr/>
-          <p:nvPr/>
-        </p:nvSpPr>
-        <p:spPr>
-          <a:xfrm>
-            <a:off x="10332720" y="4549140"/>
-            <a:ext cx="274320" cy="297180"/>
-          </a:xfrm>
-          <a:prstGeom prst="ellipse">
-            <a:avLst/>
-          </a:prstGeom>
-          <a:solidFill>
-            <a:srgbClr val="F7F7F7"/>
-          </a:solidFill>
-          <a:ln w="12700">
-            <a:solidFill>
-              <a:srgbClr val="F7F7F7"/>
-            </a:solidFill>
-            <a:prstDash val="solid"/>
-          </a:ln>
-        </p:spPr>
-        <p:txBody>
-          <a:bodyPr/>
-          <a:lstStyle/>
-          <a:p>
-            <a:endParaRPr/>
-          </a:p>
-        </p:txBody>
-      </p:sp>
-      <p:sp>
-        <p:nvSpPr>
-          <p:cNvPr id="13" name="Shape 11"/>
-          <p:cNvSpPr/>
-          <p:nvPr/>
-        </p:nvSpPr>
-        <p:spPr>
-          <a:xfrm>
-            <a:off x="9978390" y="4640580"/>
-            <a:ext cx="91440" cy="114300"/>
-          </a:xfrm>
-          <a:prstGeom prst="ellipse">
-            <a:avLst/>
-          </a:prstGeom>
-          <a:solidFill>
-            <a:srgbClr val="071013"/>
-          </a:solidFill>
-          <a:ln w="12700">
-            <a:solidFill>
-              <a:srgbClr val="071013"/>
-            </a:solidFill>
-            <a:prstDash val="solid"/>
-          </a:ln>
-        </p:spPr>
-        <p:txBody>
-          <a:bodyPr/>
-          <a:lstStyle/>
-          <a:p>
-            <a:endParaRPr/>
-          </a:p>
-        </p:txBody>
-      </p:sp>
-      <p:sp>
-        <p:nvSpPr>
-          <p:cNvPr id="14" name="Shape 12"/>
-          <p:cNvSpPr/>
-          <p:nvPr/>
-        </p:nvSpPr>
-        <p:spPr>
-          <a:xfrm>
-            <a:off x="10435590" y="4640580"/>
-            <a:ext cx="91440" cy="114300"/>
-          </a:xfrm>
-          <a:prstGeom prst="ellipse">
-            <a:avLst/>
-          </a:prstGeom>
-          <a:solidFill>
-            <a:srgbClr val="071013"/>
-          </a:solidFill>
-          <a:ln w="12700">
-            <a:solidFill>
-              <a:srgbClr val="071013"/>
-            </a:solidFill>
-            <a:prstDash val="solid"/>
-          </a:ln>
-        </p:spPr>
-        <p:txBody>
-          <a:bodyPr/>
-          <a:lstStyle/>
-          <a:p>
-            <a:endParaRPr/>
-          </a:p>
-        </p:txBody>
-      </p:sp>
-      <p:sp>
-        <p:nvSpPr>
-          <p:cNvPr id="15" name="Shape 13"/>
-          <p:cNvSpPr/>
-          <p:nvPr/>
-        </p:nvSpPr>
-        <p:spPr>
-          <a:xfrm>
-            <a:off x="10069830" y="4823460"/>
-            <a:ext cx="377190" cy="194310"/>
-          </a:xfrm>
-          <a:prstGeom prst="arc">
-            <a:avLst/>
-          </a:prstGeom>
-          <a:solidFill>
-            <a:srgbClr val="FF7A00">
-              <a:alpha val="0"/>
-            </a:srgbClr>
-          </a:solidFill>
-          <a:ln w="25400">
-            <a:solidFill>
-              <a:srgbClr val="071013"/>
-            </a:solidFill>
-            <a:prstDash val="solid"/>
-          </a:ln>
-        </p:spPr>
-        <p:txBody>
-          <a:bodyPr/>
-          <a:lstStyle/>
-          <a:p>
-            <a:endParaRPr/>
-          </a:p>
-        </p:txBody>
-      </p:sp>
-      <p:sp>
-        <p:nvSpPr>
-          <p:cNvPr id="16" name="Shape 14"/>
-          <p:cNvSpPr/>
-          <p:nvPr/>
-        </p:nvSpPr>
-        <p:spPr>
-          <a:xfrm>
-            <a:off x="7571232" y="2441448"/>
-            <a:ext cx="3246120" cy="438912"/>
-          </a:xfrm>
-          <a:prstGeom prst="roundRect">
-            <a:avLst/>
-          </a:prstGeom>
-          <a:solidFill>
-            <a:srgbClr val="0F1A1E"/>
-          </a:solidFill>
-          <a:ln w="15240">
-            <a:solidFill>
-              <a:srgbClr val="FF7A00"/>
-            </a:solidFill>
-            <a:prstDash val="solid"/>
-          </a:ln>
-        </p:spPr>
-        <p:txBody>
-          <a:bodyPr/>
-          <a:lstStyle/>
-          <a:p>
-            <a:endParaRPr/>
-          </a:p>
-        </p:txBody>
-      </p:sp>
-      <p:sp>
-        <p:nvSpPr>
-          <p:cNvPr id="17" name="Text 15"/>
-          <p:cNvSpPr/>
-          <p:nvPr/>
-        </p:nvSpPr>
-        <p:spPr>
-          <a:xfrm>
-            <a:off x="7708392" y="2542032"/>
-            <a:ext cx="2971800" cy="201168"/>
-          </a:xfrm>
-          <a:prstGeom prst="rect">
-            <a:avLst/>
-          </a:prstGeom>
-          <a:noFill/>
-          <a:ln/>
-        </p:spPr>
-        <p:txBody>
-          <a:bodyPr wrap="square" lIns="0" tIns="0" rIns="0" bIns="0" rtlCol="0" anchor="ctr"/>
-          <a:lstStyle/>
-          <a:p>
-            <a:r>
-              <a:rPr sz="950" b="1">
-                <a:solidFill>
-                  <a:srgbClr val="FF7A00"/>
-                </a:solidFill>
-                <a:latin typeface="Aptos"/>
-              </a:rPr>
-              <a:t>OPTIONAL EVIDENCE 1 OF 2 — DELETE IF NOT NEEDED</a:t>
-            </a:r>
-          </a:p>
-        </p:txBody>
-      </p:sp>
-      <p:sp>
-        <p:nvSpPr>
-          <p:cNvPr id="25" name="Slide Number Placeholder 0"/>
-          <p:cNvSpPr>
-            <a:spLocks noGrp="1"/>
-          </p:cNvSpPr>
-          <p:nvPr>
-            <p:ph type="sldNum" sz="quarter" idx="4294967295"/>
-          </p:nvPr>
-        </p:nvSpPr>
-        <p:spPr>
-          <a:xfrm>
-            <a:off x="11430000" y="6492240"/>
-            <a:ext cx="800000" cy="300000"/>
-          </a:xfrm>
-          <a:prstGeom prst="rect">
-            <a:avLst/>
-          </a:prstGeom>
-          <a:extLst>
-            <a:ext uri="{C572A759-6A51-4108-AA02-DFA0A04FC94B}">
-              <ma14:wrappingTextBoxFlag xmlns:ma14="http://schemas.microsoft.com/office/mac/drawingml/2011/main" xmlns="" val="0"/>
-            </a:ext>
-          </a:extLst>
-        </p:spPr>
-        <p:txBody>
-          <a:bodyPr/>
-          <a:lstStyle>
-            <a:lvl1pPr>
-              <a:defRPr sz="900">
-                <a:solidFill>
-                  <a:srgbClr val="83979D"/>
-                </a:solidFill>
-                <a:latin typeface="Aptos"/>
-                <a:ea typeface="Aptos"/>
-                <a:cs typeface="Aptos"/>
-              </a:defRPr>
-            </a:lvl1pPr>
-          </a:lstStyle>
-          <a:p>
-            <a:r>
-              <a:t>7</a:t>
-            </a:r>
-          </a:p>
-        </p:txBody>
-      </p:sp>
-    </p:spTree>
-  </p:cSld>
-  <p:clrMapOvr>
-    <a:masterClrMapping/>
-  </p:clrMapOvr>
-</p:sld>
-</file>
-
-<file path=ppt/slides/slide8.xml><?xml version="1.0" encoding="utf-8"?>
-<p:sld xmlns:a="http://schemas.openxmlformats.org/drawingml/2006/main" xmlns:r="http://schemas.openxmlformats.org/officeDocument/2006/relationships" xmlns:p="http://schemas.openxmlformats.org/presentationml/2006/main">
-  <p:cSld>
-    <p:spTree>
-      <p:nvGrpSpPr>
-        <p:cNvPr id="1" name=""/>
-        <p:cNvGrpSpPr/>
-        <p:nvPr/>
-      </p:nvGrpSpPr>
-      <p:grpSpPr>
-        <a:xfrm>
-          <a:off x="0" y="0"/>
-          <a:ext cx="0" cy="0"/>
-          <a:chOff x="0" y="0"/>
-          <a:chExt cx="0" cy="0"/>
-        </a:xfrm>
-      </p:grpSpPr>
-      <p:sp>
-        <p:nvSpPr>
-          <p:cNvPr id="2" name="Text 0"/>
-          <p:cNvSpPr/>
-          <p:nvPr/>
-        </p:nvSpPr>
-        <p:spPr>
-          <a:xfrm>
-            <a:off x="438912" y="658368"/>
-            <a:ext cx="2560320" cy="256032"/>
-          </a:xfrm>
-          <a:prstGeom prst="rect">
-            <a:avLst/>
-          </a:prstGeom>
-          <a:noFill/>
-          <a:ln/>
-        </p:spPr>
-        <p:txBody>
-          <a:bodyPr wrap="square" lIns="0" tIns="0" rIns="0" bIns="0" rtlCol="0" anchor="ctr"/>
-          <a:lstStyle/>
-          <a:p>
-            <a:r>
-              <a:rPr sz="1100" b="1">
-                <a:solidFill>
-                  <a:srgbClr val="FF7A00"/>
-                </a:solidFill>
-                <a:latin typeface="Arial"/>
-              </a:rPr>
-              <a:t>SECTION 2 — BUILD &amp; TEST (OPTIONAL EVIDENCE 2 OF 2)</a:t>
-            </a:r>
-          </a:p>
-        </p:txBody>
-      </p:sp>
-      <p:sp>
-        <p:nvSpPr>
-          <p:cNvPr id="3" name="Text 1"/>
-          <p:cNvSpPr/>
-          <p:nvPr/>
-        </p:nvSpPr>
-        <p:spPr>
-          <a:xfrm>
-            <a:off x="420624" y="941832"/>
-            <a:ext cx="10881360" cy="566928"/>
-          </a:xfrm>
-          <a:prstGeom prst="rect">
-            <a:avLst/>
-          </a:prstGeom>
-          <a:noFill/>
-          <a:ln/>
-        </p:spPr>
-        <p:txBody>
-          <a:bodyPr wrap="square" lIns="0" tIns="0" rIns="0" bIns="0" rtlCol="0" anchor="ctr"/>
-          <a:lstStyle/>
-          <a:p>
-            <a:r>
-              <a:rPr sz="2500" b="1">
-                <a:solidFill>
-                  <a:srgbClr val="F5F7F7"/>
-                </a:solidFill>
-                <a:latin typeface="Arial Black"/>
-              </a:rPr>
-              <a:t>BUILD &amp; TEST — Extra evidence</a:t>
-            </a:r>
-          </a:p>
-        </p:txBody>
-      </p:sp>
-      <p:sp>
-        <p:nvSpPr>
-          <p:cNvPr id="4" name="Text 2"/>
-          <p:cNvSpPr/>
-          <p:nvPr/>
-        </p:nvSpPr>
-        <p:spPr>
-          <a:xfrm>
-            <a:off x="438912" y="1554480"/>
-            <a:ext cx="10698480" cy="384048"/>
-          </a:xfrm>
-          <a:prstGeom prst="rect">
-            <a:avLst/>
-          </a:prstGeom>
-          <a:noFill/>
-          <a:ln/>
-        </p:spPr>
-        <p:txBody>
-          <a:bodyPr wrap="square" lIns="0" tIns="0" rIns="0" bIns="0" rtlCol="0" anchor="ctr"/>
-          <a:lstStyle/>
-          <a:p>
-            <a:r>
-              <a:rPr sz="1100">
-                <a:solidFill>
-                  <a:srgbClr val="A7B4B8"/>
-                </a:solidFill>
-                <a:latin typeface="Aptos"/>
-              </a:rPr>
-              <a:t>Use this optional slide if you need more room for a large screenshot, model output, chart, code/output evidence or test result.</a:t>
-            </a:r>
-          </a:p>
-        </p:txBody>
-      </p:sp>
-      <p:sp>
-        <p:nvSpPr>
-          <p:cNvPr id="5" name="Shape 3"/>
-          <p:cNvSpPr/>
-          <p:nvPr/>
-        </p:nvSpPr>
-        <p:spPr>
-          <a:xfrm>
-            <a:off x="475488" y="2103120"/>
-            <a:ext cx="11201400" cy="3611880"/>
-          </a:xfrm>
-          <a:prstGeom prst="roundRect">
-            <a:avLst/>
-          </a:prstGeom>
-          <a:solidFill>
-            <a:srgbClr val="111A1F"/>
-          </a:solidFill>
-          <a:ln w="15240">
-            <a:solidFill>
-              <a:srgbClr val="294047"/>
-            </a:solidFill>
-            <a:prstDash val="solid"/>
-          </a:ln>
-        </p:spPr>
-        <p:txBody>
-          <a:bodyPr/>
-          <a:lstStyle/>
-          <a:p>
-            <a:endParaRPr/>
-          </a:p>
-        </p:txBody>
-      </p:sp>
-      <p:sp>
-        <p:nvSpPr>
-          <p:cNvPr id="6" name="Text 4"/>
-          <p:cNvSpPr/>
-          <p:nvPr/>
-        </p:nvSpPr>
-        <p:spPr>
-          <a:xfrm>
-            <a:off x="786384" y="2423160"/>
-            <a:ext cx="3657600" cy="621792"/>
-          </a:xfrm>
-          <a:prstGeom prst="rect">
-            <a:avLst/>
-          </a:prstGeom>
-          <a:noFill/>
-          <a:ln/>
-        </p:spPr>
-        <p:txBody>
-          <a:bodyPr wrap="square" lIns="0" tIns="0" rIns="0" bIns="0" rtlCol="0" anchor="ctr"/>
-          <a:lstStyle/>
-          <a:p>
-            <a:r>
-              <a:rPr sz="1200">
-                <a:solidFill>
-                  <a:srgbClr val="F5F7F7"/>
-                </a:solidFill>
-                <a:latin typeface="Aptos"/>
-              </a:rPr>
-              <a:t>Use the space for supporting BUILD or TEST evidence. Keep the required results on the core slides and use this only when the extra space makes your work clearer.</a:t>
-            </a:r>
-          </a:p>
-        </p:txBody>
-      </p:sp>
-      <p:sp>
-        <p:nvSpPr>
-          <p:cNvPr id="7" name="Text 5"/>
-          <p:cNvSpPr/>
-          <p:nvPr/>
-        </p:nvSpPr>
-        <p:spPr>
-          <a:xfrm>
-            <a:off x="786384" y="5074920"/>
-            <a:ext cx="3474720" cy="228600"/>
-          </a:xfrm>
-          <a:prstGeom prst="rect">
-            <a:avLst/>
-          </a:prstGeom>
-          <a:noFill/>
-          <a:ln/>
-        </p:spPr>
-        <p:txBody>
-          <a:bodyPr wrap="square" lIns="0" tIns="0" rIns="0" bIns="0" rtlCol="0" anchor="ctr"/>
-          <a:lstStyle/>
-          <a:p>
-            <a:r>
-              <a:rPr sz="900" b="1">
-                <a:solidFill>
-                  <a:srgbClr val="00D8D8"/>
-                </a:solidFill>
-                <a:latin typeface="Arial"/>
-              </a:rPr>
-              <a:t>ADD OPTIONAL BUILD / TEST EVIDENCE HERE</a:t>
-            </a:r>
-          </a:p>
-        </p:txBody>
-      </p:sp>
-      <p:sp>
-        <p:nvSpPr>
-          <p:cNvPr id="8" name="Shape 6"/>
-          <p:cNvSpPr/>
-          <p:nvPr/>
-        </p:nvSpPr>
-        <p:spPr>
-          <a:xfrm rot="19800000">
-            <a:off x="9738360" y="4160520"/>
-            <a:ext cx="297180" cy="274320"/>
-          </a:xfrm>
-          <a:prstGeom prst="triangle">
-            <a:avLst/>
-          </a:prstGeom>
-          <a:solidFill>
-            <a:srgbClr val="FF7A00"/>
-          </a:solidFill>
-          <a:ln w="12700">
-            <a:solidFill>
-              <a:srgbClr val="FF7A00"/>
-            </a:solidFill>
-            <a:prstDash val="solid"/>
-          </a:ln>
-        </p:spPr>
-        <p:txBody>
-          <a:bodyPr/>
-          <a:lstStyle/>
-          <a:p>
-            <a:endParaRPr/>
-          </a:p>
-        </p:txBody>
-      </p:sp>
-      <p:sp>
-        <p:nvSpPr>
-          <p:cNvPr id="9" name="Shape 7"/>
-          <p:cNvSpPr/>
-          <p:nvPr/>
-        </p:nvSpPr>
-        <p:spPr>
-          <a:xfrm rot="1800000">
-            <a:off x="10469880" y="4160520"/>
-            <a:ext cx="297180" cy="274320"/>
-          </a:xfrm>
-          <a:prstGeom prst="triangle">
-            <a:avLst/>
-          </a:prstGeom>
-          <a:solidFill>
-            <a:srgbClr val="FF7A00"/>
-          </a:solidFill>
-          <a:ln w="12700">
-            <a:solidFill>
-              <a:srgbClr val="FF7A00"/>
-            </a:solidFill>
-            <a:prstDash val="solid"/>
-          </a:ln>
-        </p:spPr>
-        <p:txBody>
-          <a:bodyPr/>
-          <a:lstStyle/>
-          <a:p>
-            <a:endParaRPr/>
-          </a:p>
-        </p:txBody>
-      </p:sp>
-      <p:sp>
-        <p:nvSpPr>
-          <p:cNvPr id="10" name="Shape 8"/>
-          <p:cNvSpPr/>
-          <p:nvPr/>
-        </p:nvSpPr>
-        <p:spPr>
-          <a:xfrm>
-            <a:off x="9646920" y="4274820"/>
-            <a:ext cx="1200150" cy="1005840"/>
-          </a:xfrm>
-          <a:prstGeom prst="ellipse">
-            <a:avLst/>
-          </a:prstGeom>
-          <a:solidFill>
-            <a:srgbClr val="FF7A00"/>
-          </a:solidFill>
-          <a:ln w="12700">
-            <a:solidFill>
-              <a:srgbClr val="FF7A00"/>
-            </a:solidFill>
-            <a:prstDash val="solid"/>
-          </a:ln>
-        </p:spPr>
-        <p:txBody>
-          <a:bodyPr/>
-          <a:lstStyle/>
-          <a:p>
-            <a:endParaRPr/>
-          </a:p>
-        </p:txBody>
-      </p:sp>
-      <p:sp>
-        <p:nvSpPr>
-          <p:cNvPr id="11" name="Shape 9"/>
-          <p:cNvSpPr/>
-          <p:nvPr/>
-        </p:nvSpPr>
-        <p:spPr>
-          <a:xfrm>
-            <a:off x="9875520" y="4549140"/>
-            <a:ext cx="274320" cy="297180"/>
-          </a:xfrm>
-          <a:prstGeom prst="ellipse">
-            <a:avLst/>
-          </a:prstGeom>
-          <a:solidFill>
-            <a:srgbClr val="F7F7F7"/>
-          </a:solidFill>
-          <a:ln w="12700">
-            <a:solidFill>
-              <a:srgbClr val="F7F7F7"/>
-            </a:solidFill>
-            <a:prstDash val="solid"/>
-          </a:ln>
-        </p:spPr>
-        <p:txBody>
-          <a:bodyPr/>
-          <a:lstStyle/>
-          <a:p>
-            <a:endParaRPr/>
-          </a:p>
-        </p:txBody>
-      </p:sp>
-      <p:sp>
-        <p:nvSpPr>
-          <p:cNvPr id="12" name="Shape 10"/>
-          <p:cNvSpPr/>
-          <p:nvPr/>
-        </p:nvSpPr>
-        <p:spPr>
-          <a:xfrm>
-            <a:off x="10332720" y="4549140"/>
-            <a:ext cx="274320" cy="297180"/>
-          </a:xfrm>
-          <a:prstGeom prst="ellipse">
-            <a:avLst/>
-          </a:prstGeom>
-          <a:solidFill>
-            <a:srgbClr val="F7F7F7"/>
-          </a:solidFill>
-          <a:ln w="12700">
-            <a:solidFill>
-              <a:srgbClr val="F7F7F7"/>
-            </a:solidFill>
-            <a:prstDash val="solid"/>
-          </a:ln>
-        </p:spPr>
-        <p:txBody>
-          <a:bodyPr/>
-          <a:lstStyle/>
-          <a:p>
-            <a:endParaRPr/>
-          </a:p>
-        </p:txBody>
-      </p:sp>
-      <p:sp>
-        <p:nvSpPr>
-          <p:cNvPr id="13" name="Shape 11"/>
-          <p:cNvSpPr/>
-          <p:nvPr/>
-        </p:nvSpPr>
-        <p:spPr>
-          <a:xfrm>
-            <a:off x="9978390" y="4640580"/>
-            <a:ext cx="91440" cy="114300"/>
-          </a:xfrm>
-          <a:prstGeom prst="ellipse">
-            <a:avLst/>
-          </a:prstGeom>
-          <a:solidFill>
-            <a:srgbClr val="071013"/>
-          </a:solidFill>
-          <a:ln w="12700">
-            <a:solidFill>
-              <a:srgbClr val="071013"/>
-            </a:solidFill>
-            <a:prstDash val="solid"/>
-          </a:ln>
-        </p:spPr>
-        <p:txBody>
-          <a:bodyPr/>
-          <a:lstStyle/>
-          <a:p>
-            <a:endParaRPr/>
-          </a:p>
-        </p:txBody>
-      </p:sp>
-      <p:sp>
-        <p:nvSpPr>
-          <p:cNvPr id="14" name="Shape 12"/>
-          <p:cNvSpPr/>
-          <p:nvPr/>
-        </p:nvSpPr>
-        <p:spPr>
-          <a:xfrm>
-            <a:off x="10435590" y="4640580"/>
-            <a:ext cx="91440" cy="114300"/>
-          </a:xfrm>
-          <a:prstGeom prst="ellipse">
-            <a:avLst/>
-          </a:prstGeom>
-          <a:solidFill>
-            <a:srgbClr val="071013"/>
-          </a:solidFill>
-          <a:ln w="12700">
-            <a:solidFill>
-              <a:srgbClr val="071013"/>
-            </a:solidFill>
-            <a:prstDash val="solid"/>
-          </a:ln>
-        </p:spPr>
-        <p:txBody>
-          <a:bodyPr/>
-          <a:lstStyle/>
-          <a:p>
-            <a:endParaRPr/>
-          </a:p>
-        </p:txBody>
-      </p:sp>
-      <p:sp>
-        <p:nvSpPr>
-          <p:cNvPr id="15" name="Shape 13"/>
-          <p:cNvSpPr/>
-          <p:nvPr/>
-        </p:nvSpPr>
-        <p:spPr>
-          <a:xfrm>
-            <a:off x="10069830" y="4823460"/>
-            <a:ext cx="377190" cy="194310"/>
-          </a:xfrm>
-          <a:prstGeom prst="arc">
-            <a:avLst/>
-          </a:prstGeom>
-          <a:solidFill>
-            <a:srgbClr val="FF7A00">
-              <a:alpha val="0"/>
-            </a:srgbClr>
-          </a:solidFill>
-          <a:ln w="25400">
-            <a:solidFill>
-              <a:srgbClr val="071013"/>
-            </a:solidFill>
-            <a:prstDash val="solid"/>
-          </a:ln>
-        </p:spPr>
-        <p:txBody>
-          <a:bodyPr/>
-          <a:lstStyle/>
-          <a:p>
-            <a:endParaRPr/>
-          </a:p>
-        </p:txBody>
-      </p:sp>
-      <p:sp>
-        <p:nvSpPr>
-          <p:cNvPr id="16" name="Shape 14"/>
-          <p:cNvSpPr/>
-          <p:nvPr/>
-        </p:nvSpPr>
-        <p:spPr>
-          <a:xfrm>
-            <a:off x="7571232" y="2441448"/>
-            <a:ext cx="3246120" cy="438912"/>
-          </a:xfrm>
-          <a:prstGeom prst="roundRect">
-            <a:avLst/>
-          </a:prstGeom>
-          <a:solidFill>
-            <a:srgbClr val="0F1A1E"/>
-          </a:solidFill>
-          <a:ln w="15240">
-            <a:solidFill>
-              <a:srgbClr val="FF7A00"/>
-            </a:solidFill>
-            <a:prstDash val="solid"/>
-          </a:ln>
-        </p:spPr>
-        <p:txBody>
-          <a:bodyPr/>
-          <a:lstStyle/>
-          <a:p>
-            <a:endParaRPr/>
-          </a:p>
-        </p:txBody>
-      </p:sp>
-      <p:sp>
-        <p:nvSpPr>
-          <p:cNvPr id="17" name="Text 15"/>
-          <p:cNvSpPr/>
-          <p:nvPr/>
-        </p:nvSpPr>
-        <p:spPr>
-          <a:xfrm>
-            <a:off x="7708392" y="2542032"/>
-            <a:ext cx="2971800" cy="201168"/>
-          </a:xfrm>
-          <a:prstGeom prst="rect">
-            <a:avLst/>
-          </a:prstGeom>
-          <a:noFill/>
-          <a:ln/>
-        </p:spPr>
-        <p:txBody>
-          <a:bodyPr wrap="square" lIns="0" tIns="0" rIns="0" bIns="0" rtlCol="0" anchor="ctr"/>
-          <a:lstStyle/>
-          <a:p>
-            <a:r>
-              <a:rPr sz="950" b="1">
-                <a:solidFill>
-                  <a:srgbClr val="FF7A00"/>
-                </a:solidFill>
-                <a:latin typeface="Aptos"/>
-              </a:rPr>
-              <a:t>OPTIONAL EVIDENCE 2 OF 2 — DELETE IF NOT NEEDED</a:t>
-            </a:r>
-          </a:p>
-        </p:txBody>
-      </p:sp>
-      <p:sp>
-        <p:nvSpPr>
-          <p:cNvPr id="25" name="Slide Number Placeholder 0"/>
-          <p:cNvSpPr>
-            <a:spLocks noGrp="1"/>
-          </p:cNvSpPr>
-          <p:nvPr>
-            <p:ph type="sldNum" sz="quarter" idx="4294967295"/>
-          </p:nvPr>
-        </p:nvSpPr>
-        <p:spPr>
-          <a:xfrm>
-            <a:off x="11430000" y="6492240"/>
-            <a:ext cx="800000" cy="300000"/>
-          </a:xfrm>
-          <a:prstGeom prst="rect">
-            <a:avLst/>
-          </a:prstGeom>
-          <a:extLst>
-            <a:ext uri="{C572A759-6A51-4108-AA02-DFA0A04FC94B}">
-              <ma14:wrappingTextBoxFlag xmlns:ma14="http://schemas.microsoft.com/office/mac/drawingml/2011/main" xmlns="" val="0"/>
-            </a:ext>
-          </a:extLst>
-        </p:spPr>
-        <p:txBody>
-          <a:bodyPr/>
-          <a:lstStyle>
-            <a:lvl1pPr>
-              <a:defRPr sz="900">
-                <a:solidFill>
-                  <a:srgbClr val="83979D"/>
-                </a:solidFill>
-                <a:latin typeface="Aptos"/>
-                <a:ea typeface="Aptos"/>
-                <a:cs typeface="Aptos"/>
-              </a:defRPr>
-            </a:lvl1pPr>
-          </a:lstStyle>
-          <a:p>
-            <a:r>
-              <a:t>8</a:t>
-            </a:r>
-          </a:p>
-        </p:txBody>
-      </p:sp>
-    </p:spTree>
-  </p:cSld>
-  <p:clrMapOvr>
-    <a:masterClrMapping/>
-  </p:clrMapOvr>
-</p:sld>
-</file>
-
-<file path=ppt/slides/slide9.xml><?xml version="1.0" encoding="utf-8"?>
-<p:sld xmlns:a="http://schemas.openxmlformats.org/drawingml/2006/main" xmlns:r="http://schemas.openxmlformats.org/officeDocument/2006/relationships" xmlns:p="http://schemas.openxmlformats.org/presentationml/2006/main">
-  <p:cSld name="Slide 6">
-    <p:spTree>
-      <p:nvGrpSpPr>
-        <p:cNvPr id="1" name=""/>
-        <p:cNvGrpSpPr/>
-        <p:nvPr/>
-      </p:nvGrpSpPr>
-      <p:grpSpPr>
-        <a:xfrm>
-          <a:off x="0" y="0"/>
-          <a:ext cx="0" cy="0"/>
-          <a:chOff x="0" y="0"/>
-          <a:chExt cx="0" cy="0"/>
-        </a:xfrm>
-      </p:grpSpPr>
-      <p:sp>
-        <p:nvSpPr>
-          <p:cNvPr id="36" name="Shape 34"/>
-          <p:cNvSpPr/>
-          <p:nvPr/>
-        </p:nvSpPr>
-        <p:spPr>
-          <a:xfrm>
-            <a:off x="8842248" y="3273552"/>
-            <a:ext cx="228600" cy="228600"/>
-          </a:xfrm>
-          <a:prstGeom prst="ellipse">
-            <a:avLst/>
-          </a:prstGeom>
-          <a:solidFill>
-            <a:srgbClr val="00D8D8"/>
-          </a:solidFill>
-          <a:ln w="12700">
-            <a:solidFill>
-              <a:srgbClr val="00D8D8"/>
-            </a:solidFill>
-            <a:prstDash val="solid"/>
-          </a:ln>
-        </p:spPr>
-        <p:txBody>
-          <a:bodyPr/>
-          <a:lstStyle/>
-          <a:p>
-            <a:endParaRPr/>
-          </a:p>
-        </p:txBody>
-      </p:sp>
-      <p:grpSp>
-        <p:nvGrpSpPr>
-          <p:cNvPr id="43" name="Group 42">
-            <a:extLst>
-              <a:ext uri="{FF2B5EF4-FFF2-40B4-BE49-F238E27FC236}">
-                <a16:creationId xmlns:a16="http://schemas.microsoft.com/office/drawing/2014/main" id="{9E0EDDA3-1BFC-1F61-528F-33CFCC10107B}"/>
-              </a:ext>
-            </a:extLst>
-          </p:cNvPr>
-          <p:cNvGrpSpPr/>
-          <p:nvPr/>
-        </p:nvGrpSpPr>
-        <p:grpSpPr>
-          <a:xfrm>
-            <a:off x="8828532" y="2596896"/>
-            <a:ext cx="228600" cy="228600"/>
-            <a:chOff x="8842248" y="3941064"/>
-            <a:chExt cx="228600" cy="228600"/>
-          </a:xfrm>
-        </p:grpSpPr>
-        <p:sp>
-          <p:nvSpPr>
-            <p:cNvPr id="44" name="Shape 37">
-              <a:extLst>
-                <a:ext uri="{FF2B5EF4-FFF2-40B4-BE49-F238E27FC236}">
-                  <a16:creationId xmlns:a16="http://schemas.microsoft.com/office/drawing/2014/main" id="{84D3E0A9-14F3-ADF7-22E8-23C3A2C6A92A}"/>
-                </a:ext>
-              </a:extLst>
-            </p:cNvPr>
-            <p:cNvSpPr/>
-            <p:nvPr/>
-          </p:nvSpPr>
-          <p:spPr>
-            <a:xfrm>
-              <a:off x="8842248" y="3941064"/>
-              <a:ext cx="228600" cy="228600"/>
-            </a:xfrm>
-            <a:prstGeom prst="ellipse">
-              <a:avLst/>
-            </a:prstGeom>
-            <a:solidFill>
-              <a:srgbClr val="FF7A00"/>
-            </a:solidFill>
-            <a:ln w="12700">
-              <a:solidFill>
-                <a:srgbClr val="FF7A00"/>
-              </a:solidFill>
-              <a:prstDash val="solid"/>
-            </a:ln>
-          </p:spPr>
-          <p:txBody>
-            <a:bodyPr/>
-            <a:lstStyle/>
-            <a:p>
-              <a:endParaRPr/>
-            </a:p>
-          </p:txBody>
-        </p:sp>
-        <p:sp>
-          <p:nvSpPr>
-            <p:cNvPr id="45" name="Text 38">
-              <a:extLst>
-                <a:ext uri="{FF2B5EF4-FFF2-40B4-BE49-F238E27FC236}">
-                  <a16:creationId xmlns:a16="http://schemas.microsoft.com/office/drawing/2014/main" id="{336C8871-1056-7FC0-B106-60689A10C023}"/>
-                </a:ext>
-              </a:extLst>
-            </p:cNvPr>
-            <p:cNvSpPr/>
-            <p:nvPr/>
-          </p:nvSpPr>
-          <p:spPr>
-            <a:xfrm>
-              <a:off x="8842248" y="3977640"/>
-              <a:ext cx="228600" cy="118872"/>
-            </a:xfrm>
-            <a:prstGeom prst="rect">
-              <a:avLst/>
-            </a:prstGeom>
-            <a:noFill/>
-            <a:ln/>
-          </p:spPr>
-          <p:txBody>
-            <a:bodyPr wrap="square" lIns="0" tIns="0" rIns="0" bIns="0" rtlCol="0" anchor="ctr"/>
-            <a:lstStyle/>
-            <a:p>
-              <a:pPr marL="0" indent="0" algn="ctr">
-                <a:buNone/>
-              </a:pPr>
-              <a:r>
-                <a:rPr lang="en-US" sz="850" b="1">
-                  <a:solidFill>
-                    <a:srgbClr val="071013"/>
-                  </a:solidFill>
-                  <a:latin typeface="Arial" pitchFamily="34" charset="0"/>
-                  <a:ea typeface="Arial" pitchFamily="34" charset="-122"/>
-                  <a:cs typeface="Arial" pitchFamily="34" charset="-120"/>
-                </a:rPr>
-                <a:t>+</a:t>
-              </a:r>
-              <a:endParaRPr lang="en-US" sz="850"/>
-            </a:p>
-          </p:txBody>
-        </p:sp>
-      </p:grpSp>
-      <p:sp>
-        <p:nvSpPr>
-          <p:cNvPr id="2" name="Shape 0"/>
-          <p:cNvSpPr/>
-          <p:nvPr/>
-        </p:nvSpPr>
-        <p:spPr>
-          <a:xfrm>
-            <a:off x="6675120" y="585216"/>
-            <a:ext cx="914400" cy="310896"/>
-          </a:xfrm>
-          <a:prstGeom prst="roundRect">
-            <a:avLst>
-              <a:gd name="adj" fmla="val 23529"/>
-            </a:avLst>
-          </a:prstGeom>
-          <a:solidFill>
-            <a:srgbClr val="152329">
-              <a:alpha val="82000"/>
-            </a:srgbClr>
-          </a:solidFill>
-          <a:ln w="12700">
-            <a:solidFill>
-              <a:srgbClr val="31434A"/>
-            </a:solidFill>
-            <a:prstDash val="solid"/>
-          </a:ln>
-        </p:spPr>
-        <p:txBody>
-          <a:bodyPr/>
-          <a:lstStyle/>
-          <a:p>
-            <a:endParaRPr/>
-          </a:p>
-        </p:txBody>
-      </p:sp>
-      <p:sp>
-        <p:nvSpPr>
-          <p:cNvPr id="3" name="Text 1"/>
-          <p:cNvSpPr/>
-          <p:nvPr/>
-        </p:nvSpPr>
-        <p:spPr>
-          <a:xfrm>
-            <a:off x="6675120" y="630936"/>
-            <a:ext cx="914400" cy="164592"/>
-          </a:xfrm>
-          <a:prstGeom prst="rect">
-            <a:avLst/>
-          </a:prstGeom>
-          <a:noFill/>
-          <a:ln/>
-        </p:spPr>
-        <p:txBody>
-          <a:bodyPr wrap="square" lIns="0" tIns="0" rIns="0" bIns="0" rtlCol="0" anchor="ctr"/>
-          <a:lstStyle/>
-          <a:p>
-            <a:pPr marL="0" indent="0" algn="ctr">
-              <a:buNone/>
-            </a:pPr>
-            <a:r>
-              <a:rPr lang="en-US" sz="920" b="1">
-                <a:solidFill>
-                  <a:srgbClr val="A7B4B8"/>
-                </a:solidFill>
-                <a:latin typeface="Arial" pitchFamily="34" charset="0"/>
-                <a:ea typeface="Arial" pitchFamily="34" charset="-122"/>
-                <a:cs typeface="Arial" pitchFamily="34" charset="-120"/>
-              </a:rPr>
-              <a:t>HUNT</a:t>
-            </a:r>
-            <a:endParaRPr lang="en-US" sz="920"/>
-          </a:p>
-        </p:txBody>
-      </p:sp>
-      <p:sp>
-        <p:nvSpPr>
-          <p:cNvPr id="4" name="Shape 2"/>
-          <p:cNvSpPr/>
-          <p:nvPr/>
-        </p:nvSpPr>
-        <p:spPr>
-          <a:xfrm>
-            <a:off x="7662672" y="585216"/>
-            <a:ext cx="914400" cy="310896"/>
-          </a:xfrm>
-          <a:prstGeom prst="roundRect">
-            <a:avLst>
-              <a:gd name="adj" fmla="val 23529"/>
-            </a:avLst>
-          </a:prstGeom>
-          <a:solidFill>
-            <a:srgbClr val="152329">
-              <a:alpha val="82000"/>
-            </a:srgbClr>
-          </a:solidFill>
-          <a:ln w="12700">
-            <a:solidFill>
-              <a:srgbClr val="31434A"/>
-            </a:solidFill>
-            <a:prstDash val="solid"/>
-          </a:ln>
-        </p:spPr>
-        <p:txBody>
-          <a:bodyPr/>
-          <a:lstStyle/>
-          <a:p>
-            <a:endParaRPr/>
-          </a:p>
-        </p:txBody>
-      </p:sp>
-      <p:sp>
-        <p:nvSpPr>
-          <p:cNvPr id="5" name="Text 3"/>
-          <p:cNvSpPr/>
-          <p:nvPr/>
-        </p:nvSpPr>
-        <p:spPr>
-          <a:xfrm>
-            <a:off x="7662672" y="630936"/>
-            <a:ext cx="914400" cy="164592"/>
-          </a:xfrm>
-          <a:prstGeom prst="rect">
-            <a:avLst/>
-          </a:prstGeom>
-          <a:noFill/>
-          <a:ln/>
-        </p:spPr>
-        <p:txBody>
-          <a:bodyPr wrap="square" lIns="0" tIns="0" rIns="0" bIns="0" rtlCol="0" anchor="ctr"/>
-          <a:lstStyle/>
-          <a:p>
-            <a:pPr marL="0" indent="0" algn="ctr">
-              <a:buNone/>
-            </a:pPr>
-            <a:r>
-              <a:rPr lang="en-US" sz="920" b="1">
-                <a:solidFill>
-                  <a:srgbClr val="A7B4B8"/>
-                </a:solidFill>
-                <a:latin typeface="Arial" pitchFamily="34" charset="0"/>
-                <a:ea typeface="Arial" pitchFamily="34" charset="-122"/>
-                <a:cs typeface="Arial" pitchFamily="34" charset="-120"/>
-              </a:rPr>
-              <a:t>BUILD</a:t>
-            </a:r>
-            <a:endParaRPr lang="en-US" sz="920"/>
-          </a:p>
-        </p:txBody>
-      </p:sp>
-      <p:sp>
-        <p:nvSpPr>
-          <p:cNvPr id="6" name="Shape 4"/>
-          <p:cNvSpPr/>
-          <p:nvPr/>
-        </p:nvSpPr>
-        <p:spPr>
-          <a:xfrm>
-            <a:off x="8650224" y="585216"/>
-            <a:ext cx="914400" cy="310896"/>
-          </a:xfrm>
-          <a:prstGeom prst="roundRect">
-            <a:avLst>
-              <a:gd name="adj" fmla="val 23529"/>
-            </a:avLst>
-          </a:prstGeom>
-          <a:solidFill>
-            <a:srgbClr val="152329">
-              <a:alpha val="82000"/>
-            </a:srgbClr>
-          </a:solidFill>
-          <a:ln w="12700">
-            <a:solidFill>
-              <a:srgbClr val="31434A"/>
-            </a:solidFill>
-            <a:prstDash val="solid"/>
-          </a:ln>
-        </p:spPr>
-        <p:txBody>
-          <a:bodyPr/>
-          <a:lstStyle/>
-          <a:p>
-            <a:endParaRPr/>
-          </a:p>
-        </p:txBody>
-      </p:sp>
-      <p:sp>
-        <p:nvSpPr>
-          <p:cNvPr id="7" name="Text 5"/>
-          <p:cNvSpPr/>
-          <p:nvPr/>
-        </p:nvSpPr>
-        <p:spPr>
-          <a:xfrm>
-            <a:off x="8650224" y="630936"/>
-            <a:ext cx="914400" cy="164592"/>
-          </a:xfrm>
-          <a:prstGeom prst="rect">
-            <a:avLst/>
-          </a:prstGeom>
-          <a:noFill/>
-          <a:ln/>
-        </p:spPr>
-        <p:txBody>
-          <a:bodyPr wrap="square" lIns="0" tIns="0" rIns="0" bIns="0" rtlCol="0" anchor="ctr"/>
-          <a:lstStyle/>
-          <a:p>
-            <a:pPr marL="0" indent="0" algn="ctr">
-              <a:buNone/>
-            </a:pPr>
-            <a:r>
-              <a:rPr lang="en-US" sz="920" b="1">
-                <a:solidFill>
-                  <a:srgbClr val="A7B4B8"/>
-                </a:solidFill>
-                <a:latin typeface="Arial" pitchFamily="34" charset="0"/>
-                <a:ea typeface="Arial" pitchFamily="34" charset="-122"/>
-                <a:cs typeface="Arial" pitchFamily="34" charset="-120"/>
-              </a:rPr>
-              <a:t>TEST</a:t>
-            </a:r>
-            <a:endParaRPr lang="en-US" sz="920"/>
-          </a:p>
-        </p:txBody>
-      </p:sp>
-      <p:sp>
-        <p:nvSpPr>
-          <p:cNvPr id="8" name="Shape 6"/>
-          <p:cNvSpPr/>
-          <p:nvPr/>
-        </p:nvSpPr>
-        <p:spPr>
-          <a:xfrm>
-            <a:off x="9637776" y="585216"/>
-            <a:ext cx="914400" cy="310896"/>
-          </a:xfrm>
-          <a:prstGeom prst="roundRect">
-            <a:avLst>
-              <a:gd name="adj" fmla="val 23529"/>
-            </a:avLst>
-          </a:prstGeom>
-          <a:solidFill>
-            <a:srgbClr val="00D8D8"/>
-          </a:solidFill>
-          <a:ln w="12700">
-            <a:solidFill>
-              <a:srgbClr val="00D8D8"/>
-            </a:solidFill>
-            <a:prstDash val="solid"/>
-          </a:ln>
-        </p:spPr>
-        <p:txBody>
-          <a:bodyPr/>
-          <a:lstStyle/>
-          <a:p>
-            <a:endParaRPr/>
-          </a:p>
-        </p:txBody>
-      </p:sp>
-      <p:sp>
-        <p:nvSpPr>
-          <p:cNvPr id="9" name="Text 7"/>
-          <p:cNvSpPr/>
-          <p:nvPr/>
-        </p:nvSpPr>
-        <p:spPr>
-          <a:xfrm>
-            <a:off x="9637776" y="630936"/>
-            <a:ext cx="914400" cy="164592"/>
-          </a:xfrm>
-          <a:prstGeom prst="rect">
-            <a:avLst/>
-          </a:prstGeom>
-          <a:noFill/>
-          <a:ln/>
-        </p:spPr>
-        <p:txBody>
-          <a:bodyPr wrap="square" lIns="0" tIns="0" rIns="0" bIns="0" rtlCol="0" anchor="ctr"/>
-          <a:lstStyle/>
-          <a:p>
-            <a:pPr marL="0" indent="0" algn="ctr">
-              <a:buNone/>
-            </a:pPr>
-            <a:r>
-              <a:rPr lang="en-US" sz="920" b="1">
-                <a:solidFill>
-                  <a:srgbClr val="071013"/>
-                </a:solidFill>
-                <a:latin typeface="Arial" pitchFamily="34" charset="0"/>
-                <a:ea typeface="Arial" pitchFamily="34" charset="-122"/>
-                <a:cs typeface="Arial" pitchFamily="34" charset="-120"/>
-              </a:rPr>
-              <a:t>PREDICT</a:t>
-            </a:r>
-            <a:endParaRPr lang="en-US" sz="920"/>
-          </a:p>
-        </p:txBody>
-      </p:sp>
-      <p:sp>
-        <p:nvSpPr>
-          <p:cNvPr id="10" name="Shape 8"/>
-          <p:cNvSpPr/>
-          <p:nvPr/>
-        </p:nvSpPr>
-        <p:spPr>
-          <a:xfrm>
-            <a:off x="10625328" y="585216"/>
-            <a:ext cx="914400" cy="310896"/>
-          </a:xfrm>
-          <a:prstGeom prst="roundRect">
-            <a:avLst>
-              <a:gd name="adj" fmla="val 23529"/>
-            </a:avLst>
-          </a:prstGeom>
-          <a:solidFill>
-            <a:srgbClr val="152329">
-              <a:alpha val="82000"/>
-            </a:srgbClr>
-          </a:solidFill>
-          <a:ln w="12700">
-            <a:solidFill>
-              <a:srgbClr val="31434A"/>
-            </a:solidFill>
-            <a:prstDash val="solid"/>
-          </a:ln>
-        </p:spPr>
-        <p:txBody>
-          <a:bodyPr/>
-          <a:lstStyle/>
-          <a:p>
-            <a:endParaRPr/>
-          </a:p>
-        </p:txBody>
-      </p:sp>
-      <p:sp>
-        <p:nvSpPr>
-          <p:cNvPr id="11" name="Text 9"/>
-          <p:cNvSpPr/>
-          <p:nvPr/>
-        </p:nvSpPr>
-        <p:spPr>
-          <a:xfrm>
-            <a:off x="10625328" y="630936"/>
-            <a:ext cx="914400" cy="164592"/>
-          </a:xfrm>
-          <a:prstGeom prst="rect">
-            <a:avLst/>
-          </a:prstGeom>
-          <a:noFill/>
-          <a:ln/>
-        </p:spPr>
-        <p:txBody>
-          <a:bodyPr wrap="square" lIns="0" tIns="0" rIns="0" bIns="0" rtlCol="0" anchor="ctr"/>
-          <a:lstStyle/>
-          <a:p>
-            <a:pPr marL="0" indent="0" algn="ctr">
-              <a:buNone/>
-            </a:pPr>
-            <a:r>
-              <a:rPr lang="en-US" sz="920" b="1">
-                <a:solidFill>
-                  <a:srgbClr val="A7B4B8"/>
-                </a:solidFill>
-                <a:latin typeface="Arial" pitchFamily="34" charset="0"/>
-                <a:ea typeface="Arial" pitchFamily="34" charset="-122"/>
-                <a:cs typeface="Arial" pitchFamily="34" charset="-120"/>
-              </a:rPr>
-              <a:t>SHOW</a:t>
-            </a:r>
-            <a:endParaRPr lang="en-US" sz="920"/>
-          </a:p>
-        </p:txBody>
-      </p:sp>
-      <p:sp>
-        <p:nvSpPr>
-          <p:cNvPr id="12" name="Text 10"/>
-          <p:cNvSpPr/>
-          <p:nvPr/>
-        </p:nvSpPr>
-        <p:spPr>
-          <a:xfrm>
-            <a:off x="438912" y="658368"/>
-            <a:ext cx="2560320" cy="256032"/>
-          </a:xfrm>
-          <a:prstGeom prst="rect">
-            <a:avLst/>
-          </a:prstGeom>
-          <a:noFill/>
-          <a:ln/>
-        </p:spPr>
-        <p:txBody>
-          <a:bodyPr wrap="square" lIns="0" tIns="0" rIns="0" bIns="0" rtlCol="0" anchor="ctr"/>
-          <a:lstStyle/>
-          <a:p>
-            <a:pPr marL="0" indent="0">
-              <a:buNone/>
-            </a:pPr>
-            <a:r>
-              <a:rPr sz="1000" b="1">
-                <a:solidFill>
-                  <a:srgbClr val="FF7A00"/>
-                </a:solidFill>
-                <a:latin typeface="Arial"/>
-              </a:rPr>
-              <a:t>SECTION 3 — PREDICT (PART 1)</a:t>
-            </a:r>
-            <a:endParaRPr lang="en-US" sz="1100"/>
-          </a:p>
-        </p:txBody>
-      </p:sp>
-      <p:sp>
-        <p:nvSpPr>
-          <p:cNvPr id="13" name="Text 11"/>
-          <p:cNvSpPr/>
-          <p:nvPr/>
-        </p:nvSpPr>
-        <p:spPr>
-          <a:xfrm>
-            <a:off x="420624" y="941832"/>
-            <a:ext cx="10881360" cy="566928"/>
-          </a:xfrm>
-          <a:prstGeom prst="rect">
-            <a:avLst/>
-          </a:prstGeom>
-          <a:noFill/>
-          <a:ln/>
-        </p:spPr>
-        <p:txBody>
-          <a:bodyPr wrap="square" lIns="0" tIns="0" rIns="0" bIns="0" rtlCol="0" anchor="ctr"/>
-          <a:lstStyle/>
-          <a:p>
-            <a:pPr marL="0" indent="0">
-              <a:buNone/>
-            </a:pPr>
-            <a:r>
-              <a:rPr sz="2400" b="1">
-                <a:solidFill>
-                  <a:srgbClr val="F5F7F7"/>
-                </a:solidFill>
-                <a:latin typeface="Arial Black"/>
-              </a:rPr>
-              <a:t>PREDICT — What does “starting to transform” mean?</a:t>
-            </a:r>
-            <a:endParaRPr lang="en-US" sz="2900"/>
-          </a:p>
-        </p:txBody>
-      </p:sp>
-      <p:sp>
-        <p:nvSpPr>
-          <p:cNvPr id="14" name="Text 12"/>
-          <p:cNvSpPr/>
-          <p:nvPr/>
-        </p:nvSpPr>
-        <p:spPr>
-          <a:xfrm>
-            <a:off x="438912" y="1554480"/>
-            <a:ext cx="10698480" cy="384048"/>
-          </a:xfrm>
-          <a:prstGeom prst="rect">
-            <a:avLst/>
-          </a:prstGeom>
-          <a:noFill/>
-          <a:ln/>
-        </p:spPr>
-        <p:txBody>
-          <a:bodyPr wrap="square" lIns="0" tIns="0" rIns="0" bIns="0" rtlCol="0" anchor="ctr"/>
-          <a:lstStyle/>
-          <a:p>
-            <a:pPr marL="0" indent="0">
-              <a:buNone/>
-            </a:pPr>
-            <a:r>
-              <a:rPr sz="1100">
-                <a:solidFill>
-                  <a:srgbClr val="A7B4B8"/>
-                </a:solidFill>
-                <a:latin typeface="Aptos"/>
-              </a:rPr>
-              <a:t>There is no single prescribed answer. Define the early-warning signs your team will look for before the full monster behaviour appears.</a:t>
-            </a:r>
-            <a:endParaRPr lang="en-US" sz="1450"/>
-          </a:p>
-        </p:txBody>
-      </p:sp>
-      <p:sp>
-        <p:nvSpPr>
-          <p:cNvPr id="15" name="Shape 13"/>
-          <p:cNvSpPr/>
-          <p:nvPr/>
-        </p:nvSpPr>
-        <p:spPr>
-          <a:xfrm>
-            <a:off x="457200" y="2084832"/>
-            <a:ext cx="3822192" cy="3529584"/>
-          </a:xfrm>
-          <a:prstGeom prst="roundRect">
-            <a:avLst/>
-          </a:prstGeom>
-          <a:solidFill>
-            <a:srgbClr val="111A1F"/>
-          </a:solidFill>
-          <a:ln w="15240">
-            <a:solidFill>
-              <a:srgbClr val="294047"/>
-            </a:solidFill>
-            <a:prstDash val="solid"/>
-          </a:ln>
-        </p:spPr>
-        <p:txBody>
-          <a:bodyPr/>
-          <a:lstStyle/>
-          <a:p>
-            <a:endParaRPr/>
-          </a:p>
-        </p:txBody>
-      </p:sp>
-      <p:sp>
-        <p:nvSpPr>
-          <p:cNvPr id="16" name="Shape 14"/>
-          <p:cNvSpPr/>
-          <p:nvPr/>
-        </p:nvSpPr>
-        <p:spPr>
-          <a:xfrm>
-            <a:off x="457200" y="2084832"/>
-            <a:ext cx="54864" cy="3529584"/>
-          </a:xfrm>
-          <a:prstGeom prst="rect">
-            <a:avLst/>
-          </a:prstGeom>
-          <a:solidFill>
-            <a:srgbClr val="FF7A00"/>
-          </a:solidFill>
-          <a:ln w="12700">
-            <a:solidFill>
-              <a:srgbClr val="FF7A00"/>
-            </a:solidFill>
-            <a:prstDash val="solid"/>
-          </a:ln>
-        </p:spPr>
-        <p:txBody>
-          <a:bodyPr/>
-          <a:lstStyle/>
-          <a:p>
-            <a:endParaRPr/>
-          </a:p>
-        </p:txBody>
-      </p:sp>
-      <p:sp>
-        <p:nvSpPr>
-          <p:cNvPr id="17" name="Text 15"/>
-          <p:cNvSpPr/>
-          <p:nvPr/>
-        </p:nvSpPr>
-        <p:spPr>
-          <a:xfrm>
-            <a:off x="640080" y="2212848"/>
-            <a:ext cx="3493008" cy="274320"/>
-          </a:xfrm>
-          <a:prstGeom prst="rect">
-            <a:avLst/>
-          </a:prstGeom>
-          <a:noFill/>
-          <a:ln/>
-        </p:spPr>
-        <p:txBody>
-          <a:bodyPr wrap="square" lIns="0" tIns="0" rIns="0" bIns="0" rtlCol="0" anchor="ctr"/>
-          <a:lstStyle/>
-          <a:p>
-            <a:pPr marL="0" indent="0">
-              <a:buNone/>
-            </a:pPr>
-            <a:r>
-              <a:rPr sz="1300" b="1">
-                <a:solidFill>
-                  <a:srgbClr val="F5F7F7"/>
-                </a:solidFill>
-                <a:latin typeface="Arial"/>
-              </a:rPr>
-              <a:t>1. Monster(s) we chose</a:t>
-            </a:r>
-            <a:endParaRPr lang="en-US" sz="1500"/>
-          </a:p>
-        </p:txBody>
-      </p:sp>
-      <p:sp>
-        <p:nvSpPr>
-          <p:cNvPr id="18" name="Text 16"/>
-          <p:cNvSpPr/>
-          <p:nvPr/>
-        </p:nvSpPr>
-        <p:spPr>
-          <a:xfrm>
-            <a:off x="640080" y="2542032"/>
-            <a:ext cx="3474720" cy="566928"/>
-          </a:xfrm>
-          <a:prstGeom prst="rect">
-            <a:avLst/>
-          </a:prstGeom>
-          <a:noFill/>
-          <a:ln/>
-        </p:spPr>
-        <p:txBody>
-          <a:bodyPr wrap="square" lIns="254" tIns="254" rIns="254" bIns="254" rtlCol="0" anchor="t"/>
-          <a:lstStyle/>
-          <a:p>
-            <a:pPr marL="0" indent="0">
-              <a:buNone/>
-            </a:pPr>
-            <a:r>
-              <a:rPr sz="1050">
-                <a:solidFill>
-                  <a:srgbClr val="A7B4B8"/>
-                </a:solidFill>
-                <a:latin typeface="Aptos"/>
-              </a:rPr>
-              <a:t>Which behavioural monster or monsters are you predicting?</a:t>
-            </a:r>
-            <a:endParaRPr lang="en-US" sz="1050"/>
-          </a:p>
-        </p:txBody>
-      </p:sp>
-      <p:sp>
-        <p:nvSpPr>
-          <p:cNvPr id="19" name="Text 17"/>
-          <p:cNvSpPr/>
-          <p:nvPr/>
-        </p:nvSpPr>
-        <p:spPr>
-          <a:xfrm>
-            <a:off x="640080" y="5175504"/>
-            <a:ext cx="3474720" cy="228600"/>
-          </a:xfrm>
-          <a:prstGeom prst="rect">
-            <a:avLst/>
-          </a:prstGeom>
-          <a:noFill/>
-          <a:ln/>
-        </p:spPr>
-        <p:txBody>
-          <a:bodyPr wrap="square" lIns="0" tIns="0" rIns="0" bIns="0" rtlCol="0" anchor="ctr"/>
-          <a:lstStyle/>
-          <a:p>
-            <a:pPr marL="0" indent="0">
-              <a:buNone/>
-            </a:pPr>
-            <a:r>
-              <a:rPr sz="900" b="1">
-                <a:solidFill>
-                  <a:srgbClr val="00D8D8"/>
-                </a:solidFill>
-                <a:latin typeface="Arial"/>
-              </a:rPr>
-              <a:t>NAME THE MONSTER(S)</a:t>
-            </a:r>
-            <a:endParaRPr lang="en-US" sz="980"/>
-          </a:p>
-        </p:txBody>
-      </p:sp>
-      <p:sp>
-        <p:nvSpPr>
-          <p:cNvPr id="20" name="Shape 18"/>
-          <p:cNvSpPr/>
-          <p:nvPr/>
-        </p:nvSpPr>
-        <p:spPr>
-          <a:xfrm>
-            <a:off x="4526280" y="2084832"/>
-            <a:ext cx="3794760" cy="1572768"/>
-          </a:xfrm>
-          <a:prstGeom prst="roundRect">
-            <a:avLst/>
-          </a:prstGeom>
-          <a:solidFill>
-            <a:srgbClr val="111A1F"/>
-          </a:solidFill>
-          <a:ln w="15240">
-            <a:solidFill>
-              <a:srgbClr val="294047"/>
-            </a:solidFill>
-            <a:prstDash val="solid"/>
-          </a:ln>
-        </p:spPr>
-        <p:txBody>
-          <a:bodyPr/>
-          <a:lstStyle/>
-          <a:p>
-            <a:endParaRPr/>
-          </a:p>
-        </p:txBody>
-      </p:sp>
-      <p:sp>
-        <p:nvSpPr>
-          <p:cNvPr id="21" name="Shape 19"/>
-          <p:cNvSpPr/>
-          <p:nvPr/>
-        </p:nvSpPr>
-        <p:spPr>
-          <a:xfrm>
-            <a:off x="4526280" y="2084832"/>
-            <a:ext cx="54864" cy="1572768"/>
-          </a:xfrm>
-          <a:prstGeom prst="rect">
-            <a:avLst/>
-          </a:prstGeom>
-          <a:solidFill>
-            <a:srgbClr val="00D8D8"/>
-          </a:solidFill>
-          <a:ln w="12700">
-            <a:solidFill>
-              <a:srgbClr val="00D8D8"/>
-            </a:solidFill>
-            <a:prstDash val="solid"/>
-          </a:ln>
-        </p:spPr>
-        <p:txBody>
-          <a:bodyPr/>
-          <a:lstStyle/>
-          <a:p>
-            <a:endParaRPr/>
-          </a:p>
-        </p:txBody>
-      </p:sp>
-      <p:sp>
-        <p:nvSpPr>
-          <p:cNvPr id="22" name="Text 20"/>
-          <p:cNvSpPr/>
-          <p:nvPr/>
-        </p:nvSpPr>
-        <p:spPr>
-          <a:xfrm>
-            <a:off x="4709160" y="2212848"/>
-            <a:ext cx="3465576" cy="274320"/>
-          </a:xfrm>
-          <a:prstGeom prst="rect">
-            <a:avLst/>
-          </a:prstGeom>
-          <a:noFill/>
-          <a:ln/>
-        </p:spPr>
-        <p:txBody>
-          <a:bodyPr wrap="square" lIns="0" tIns="0" rIns="0" bIns="0" rtlCol="0" anchor="ctr"/>
-          <a:lstStyle/>
-          <a:p>
-            <a:pPr marL="0" indent="0">
-              <a:buNone/>
-            </a:pPr>
-            <a:r>
-              <a:rPr sz="1300" b="1">
-                <a:solidFill>
-                  <a:srgbClr val="F5F7F7"/>
-                </a:solidFill>
-                <a:latin typeface="Arial"/>
-              </a:rPr>
-              <a:t>2. Our definition</a:t>
-            </a:r>
-            <a:endParaRPr lang="en-US" sz="1500"/>
-          </a:p>
-        </p:txBody>
-      </p:sp>
-      <p:sp>
-        <p:nvSpPr>
-          <p:cNvPr id="23" name="Text 21"/>
-          <p:cNvSpPr/>
-          <p:nvPr/>
-        </p:nvSpPr>
-        <p:spPr>
-          <a:xfrm>
-            <a:off x="4709160" y="2542032"/>
-            <a:ext cx="3447288" cy="550469"/>
-          </a:xfrm>
-          <a:prstGeom prst="rect">
-            <a:avLst/>
-          </a:prstGeom>
-          <a:noFill/>
-          <a:ln/>
-        </p:spPr>
-        <p:txBody>
-          <a:bodyPr wrap="square" lIns="254" tIns="254" rIns="254" bIns="254" rtlCol="0" anchor="t"/>
-          <a:lstStyle/>
-          <a:p>
-            <a:pPr marL="0" indent="0">
-              <a:buNone/>
-            </a:pPr>
-            <a:r>
-              <a:rPr sz="1050">
-                <a:solidFill>
-                  <a:srgbClr val="A7B4B8"/>
-                </a:solidFill>
-                <a:latin typeface="Aptos"/>
-              </a:rPr>
-              <a:t>What would “starting to turn into” this monster look like before the full monster behaviour appears?</a:t>
-            </a:r>
-            <a:endParaRPr lang="en-US" sz="1050"/>
-          </a:p>
-        </p:txBody>
-      </p:sp>
-      <p:sp>
-        <p:nvSpPr>
-          <p:cNvPr id="24" name="Text 22"/>
-          <p:cNvSpPr/>
-          <p:nvPr/>
-        </p:nvSpPr>
-        <p:spPr>
-          <a:xfrm>
-            <a:off x="4709160" y="3218688"/>
-            <a:ext cx="3447288" cy="228600"/>
-          </a:xfrm>
-          <a:prstGeom prst="rect">
-            <a:avLst/>
-          </a:prstGeom>
-          <a:noFill/>
-          <a:ln/>
-        </p:spPr>
-        <p:txBody>
-          <a:bodyPr wrap="square" lIns="0" tIns="0" rIns="0" bIns="0" rtlCol="0" anchor="ctr"/>
-          <a:lstStyle/>
-          <a:p>
-            <a:pPr marL="0" indent="0">
-              <a:buNone/>
-            </a:pPr>
-            <a:r>
-              <a:rPr sz="900" b="1">
-                <a:solidFill>
-                  <a:srgbClr val="00D8D8"/>
-                </a:solidFill>
-                <a:latin typeface="Arial"/>
-              </a:rPr>
-              <a:t>WRITE YOUR DEFINITION</a:t>
-            </a:r>
-            <a:endParaRPr lang="en-US" sz="980"/>
-          </a:p>
-        </p:txBody>
-      </p:sp>
-      <p:sp>
-        <p:nvSpPr>
-          <p:cNvPr id="25" name="Shape 23"/>
-          <p:cNvSpPr/>
-          <p:nvPr/>
-        </p:nvSpPr>
-        <p:spPr>
-          <a:xfrm>
-            <a:off x="4526280" y="3840480"/>
-            <a:ext cx="3794760" cy="1773936"/>
-          </a:xfrm>
-          <a:prstGeom prst="roundRect">
-            <a:avLst/>
-          </a:prstGeom>
-          <a:solidFill>
-            <a:srgbClr val="111A1F"/>
-          </a:solidFill>
-          <a:ln w="15240">
-            <a:solidFill>
-              <a:srgbClr val="294047"/>
-            </a:solidFill>
-            <a:prstDash val="solid"/>
-          </a:ln>
-        </p:spPr>
-        <p:txBody>
-          <a:bodyPr/>
-          <a:lstStyle/>
-          <a:p>
-            <a:endParaRPr/>
-          </a:p>
-        </p:txBody>
-      </p:sp>
-      <p:sp>
-        <p:nvSpPr>
-          <p:cNvPr id="26" name="Shape 24"/>
-          <p:cNvSpPr/>
-          <p:nvPr/>
-        </p:nvSpPr>
-        <p:spPr>
-          <a:xfrm>
-            <a:off x="4526280" y="3840480"/>
-            <a:ext cx="54864" cy="1773936"/>
-          </a:xfrm>
-          <a:prstGeom prst="rect">
-            <a:avLst/>
-          </a:prstGeom>
-          <a:solidFill>
-            <a:srgbClr val="00D8D8"/>
-          </a:solidFill>
-          <a:ln w="12700">
-            <a:solidFill>
-              <a:srgbClr val="00D8D8"/>
-            </a:solidFill>
-            <a:prstDash val="solid"/>
-          </a:ln>
-        </p:spPr>
-        <p:txBody>
-          <a:bodyPr/>
-          <a:lstStyle/>
-          <a:p>
-            <a:endParaRPr/>
-          </a:p>
-        </p:txBody>
-      </p:sp>
-      <p:sp>
-        <p:nvSpPr>
-          <p:cNvPr id="27" name="Text 25"/>
-          <p:cNvSpPr/>
-          <p:nvPr/>
-        </p:nvSpPr>
-        <p:spPr>
-          <a:xfrm>
-            <a:off x="4709160" y="3968496"/>
-            <a:ext cx="3465576" cy="274320"/>
-          </a:xfrm>
-          <a:prstGeom prst="rect">
-            <a:avLst/>
-          </a:prstGeom>
-          <a:noFill/>
-          <a:ln/>
-        </p:spPr>
-        <p:txBody>
-          <a:bodyPr wrap="square" lIns="0" tIns="0" rIns="0" bIns="0" rtlCol="0" anchor="ctr"/>
-          <a:lstStyle/>
-          <a:p>
-            <a:pPr marL="0" indent="0">
-              <a:buNone/>
-            </a:pPr>
-            <a:r>
-              <a:rPr sz="1300" b="1">
-                <a:solidFill>
-                  <a:srgbClr val="F5F7F7"/>
-                </a:solidFill>
-                <a:latin typeface="Arial"/>
-              </a:rPr>
-              <a:t>3. Early-warning signals</a:t>
-            </a:r>
-            <a:endParaRPr lang="en-US" sz="1500"/>
-          </a:p>
-        </p:txBody>
-      </p:sp>
-      <p:sp>
-        <p:nvSpPr>
-          <p:cNvPr id="28" name="Text 26"/>
-          <p:cNvSpPr/>
-          <p:nvPr/>
-        </p:nvSpPr>
-        <p:spPr>
-          <a:xfrm>
-            <a:off x="4709160" y="4297680"/>
-            <a:ext cx="3447288" cy="566928"/>
-          </a:xfrm>
-          <a:prstGeom prst="rect">
-            <a:avLst/>
-          </a:prstGeom>
-          <a:noFill/>
-          <a:ln/>
-        </p:spPr>
-        <p:txBody>
-          <a:bodyPr wrap="square" lIns="254" tIns="254" rIns="254" bIns="254" rtlCol="0" anchor="t"/>
-          <a:lstStyle/>
-          <a:p>
-            <a:pPr marL="0" indent="0">
-              <a:buNone/>
-            </a:pPr>
-            <a:r>
-              <a:rPr sz="1050">
-                <a:solidFill>
-                  <a:srgbClr val="A7B4B8"/>
-                </a:solidFill>
-                <a:latin typeface="Aptos"/>
-              </a:rPr>
-              <a:t>Which trends, features or changes will your model look for? Explain why you think they are meaningful.</a:t>
-            </a:r>
-            <a:endParaRPr lang="en-US" sz="1050"/>
-          </a:p>
-        </p:txBody>
-      </p:sp>
-      <p:sp>
-        <p:nvSpPr>
-          <p:cNvPr id="29" name="Text 27"/>
-          <p:cNvSpPr/>
-          <p:nvPr/>
-        </p:nvSpPr>
-        <p:spPr>
-          <a:xfrm>
-            <a:off x="4709160" y="5175504"/>
-            <a:ext cx="3447288" cy="228600"/>
-          </a:xfrm>
-          <a:prstGeom prst="rect">
-            <a:avLst/>
-          </a:prstGeom>
-          <a:noFill/>
-          <a:ln/>
-        </p:spPr>
-        <p:txBody>
-          <a:bodyPr wrap="square" lIns="0" tIns="0" rIns="0" bIns="0" rtlCol="0" anchor="ctr"/>
-          <a:lstStyle/>
-          <a:p>
-            <a:pPr marL="0" indent="0">
-              <a:buNone/>
-            </a:pPr>
-            <a:r>
-              <a:rPr sz="900" b="1">
-                <a:solidFill>
-                  <a:srgbClr val="00D8D8"/>
-                </a:solidFill>
-                <a:latin typeface="Arial"/>
-              </a:rPr>
-              <a:t>ADD FEATURES / LOGIC / EXAMPLES</a:t>
-            </a:r>
-            <a:endParaRPr lang="en-US" sz="980"/>
-          </a:p>
-        </p:txBody>
-      </p:sp>
-      <p:sp>
-        <p:nvSpPr>
-          <p:cNvPr id="30" name="Shape 28"/>
-          <p:cNvSpPr/>
-          <p:nvPr/>
-        </p:nvSpPr>
-        <p:spPr>
-          <a:xfrm>
-            <a:off x="8641080" y="2011680"/>
-            <a:ext cx="3063240" cy="3886200"/>
-          </a:xfrm>
-          <a:prstGeom prst="roundRect">
-            <a:avLst/>
-          </a:prstGeom>
-          <a:solidFill>
-            <a:srgbClr val="10191E"/>
-          </a:solidFill>
-          <a:ln w="19050">
-            <a:solidFill>
-              <a:srgbClr val="FF7A00"/>
-            </a:solidFill>
-            <a:prstDash val="solid"/>
-          </a:ln>
-        </p:spPr>
-        <p:txBody>
-          <a:bodyPr/>
-          <a:lstStyle/>
-          <a:p>
-            <a:endParaRPr/>
-          </a:p>
-        </p:txBody>
-      </p:sp>
-      <p:sp>
-        <p:nvSpPr>
-          <p:cNvPr id="31" name="Text 29"/>
-          <p:cNvSpPr/>
-          <p:nvPr/>
-        </p:nvSpPr>
-        <p:spPr>
-          <a:xfrm>
-            <a:off x="8805672" y="2157984"/>
-            <a:ext cx="320040" cy="274320"/>
-          </a:xfrm>
-          <a:prstGeom prst="rect">
-            <a:avLst/>
-          </a:prstGeom>
-          <a:noFill/>
-          <a:ln/>
-        </p:spPr>
-        <p:txBody>
-          <a:bodyPr wrap="square" lIns="0" tIns="0" rIns="0" bIns="0" rtlCol="0" anchor="ctr"/>
-          <a:lstStyle/>
-          <a:p>
-            <a:pPr marL="0" indent="0">
-              <a:buNone/>
-            </a:pPr>
-            <a:r>
-              <a:rPr lang="en-US" sz="1800">
-                <a:solidFill>
-                  <a:srgbClr val="000000"/>
-                </a:solidFill>
-              </a:rPr>
-              <a:t>🎟</a:t>
-            </a:r>
-            <a:endParaRPr lang="en-US" sz="1800"/>
-          </a:p>
-        </p:txBody>
-      </p:sp>
-      <p:sp>
-        <p:nvSpPr>
-          <p:cNvPr id="32" name="Text 30"/>
-          <p:cNvSpPr/>
-          <p:nvPr/>
-        </p:nvSpPr>
-        <p:spPr>
-          <a:xfrm>
-            <a:off x="9171432" y="2148840"/>
-            <a:ext cx="2350008" cy="256032"/>
-          </a:xfrm>
-          <a:prstGeom prst="rect">
-            <a:avLst/>
-          </a:prstGeom>
-          <a:noFill/>
-          <a:ln/>
-        </p:spPr>
-        <p:txBody>
-          <a:bodyPr wrap="square" lIns="0" tIns="0" rIns="0" bIns="0" rtlCol="0" anchor="ctr"/>
-          <a:lstStyle/>
-          <a:p>
-            <a:pPr marL="0" indent="0">
-              <a:buNone/>
-            </a:pPr>
-            <a:r>
-              <a:rPr sz="1000" b="1">
-                <a:solidFill>
-                  <a:srgbClr val="FF7A00"/>
-                </a:solidFill>
-                <a:latin typeface="Arial"/>
-              </a:rPr>
-              <a:t>PREDICT — PART 1</a:t>
-            </a:r>
-            <a:endParaRPr lang="en-US" sz="1330"/>
-          </a:p>
-        </p:txBody>
-      </p:sp>
-      <p:sp>
-        <p:nvSpPr>
-          <p:cNvPr id="34" name="Text 32"/>
-          <p:cNvSpPr/>
-          <p:nvPr/>
-        </p:nvSpPr>
-        <p:spPr>
-          <a:xfrm>
-            <a:off x="8842248" y="2642616"/>
-            <a:ext cx="228600" cy="118872"/>
-          </a:xfrm>
-          <a:prstGeom prst="rect">
-            <a:avLst/>
-          </a:prstGeom>
-          <a:noFill/>
-          <a:ln/>
-        </p:spPr>
-        <p:txBody>
-          <a:bodyPr wrap="square" lIns="0" tIns="0" rIns="0" bIns="0" rtlCol="0" anchor="ctr"/>
-          <a:lstStyle/>
-          <a:p>
-            <a:pPr marL="0" indent="0" algn="ctr">
-              <a:buNone/>
-            </a:pPr>
-            <a:r>
-              <a:rPr lang="en-US" sz="850" b="1">
-                <a:solidFill>
-                  <a:srgbClr val="071013"/>
-                </a:solidFill>
-                <a:latin typeface="Arial" pitchFamily="34" charset="0"/>
-                <a:ea typeface="Arial" pitchFamily="34" charset="-122"/>
-                <a:cs typeface="Arial" pitchFamily="34" charset="-120"/>
-              </a:rPr>
-              <a:t>1</a:t>
-            </a:r>
-            <a:endParaRPr lang="en-US" sz="850"/>
-          </a:p>
-        </p:txBody>
-      </p:sp>
-      <p:sp>
-        <p:nvSpPr>
-          <p:cNvPr id="35" name="Text 33"/>
-          <p:cNvSpPr/>
-          <p:nvPr/>
-        </p:nvSpPr>
-        <p:spPr>
-          <a:xfrm>
-            <a:off x="9171432" y="2578608"/>
-            <a:ext cx="2313432" cy="493776"/>
-          </a:xfrm>
-          <a:prstGeom prst="rect">
-            <a:avLst/>
-          </a:prstGeom>
-          <a:noFill/>
-          <a:ln/>
-        </p:spPr>
-        <p:txBody>
-          <a:bodyPr wrap="square" lIns="0" tIns="0" rIns="0" bIns="0" rtlCol="0" anchor="ctr"/>
-          <a:lstStyle/>
-          <a:p>
-            <a:pPr marL="0" indent="0">
-              <a:buNone/>
-            </a:pPr>
-            <a:r>
-              <a:rPr sz="950">
-                <a:solidFill>
-                  <a:srgbClr val="F5F7F7"/>
-                </a:solidFill>
-                <a:latin typeface="Aptos"/>
-              </a:rPr>
-              <a:t>Use the next slide for your predictions and evidence</a:t>
-            </a:r>
-            <a:endParaRPr lang="en-US" sz="1120"/>
-          </a:p>
-        </p:txBody>
-      </p:sp>
-      <p:sp>
-        <p:nvSpPr>
-          <p:cNvPr id="37" name="Text 35"/>
-          <p:cNvSpPr/>
-          <p:nvPr/>
-        </p:nvSpPr>
-        <p:spPr>
-          <a:xfrm>
-            <a:off x="8842248" y="3310128"/>
-            <a:ext cx="228600" cy="118872"/>
-          </a:xfrm>
-          <a:prstGeom prst="rect">
-            <a:avLst/>
-          </a:prstGeom>
-          <a:noFill/>
-          <a:ln/>
-        </p:spPr>
-        <p:txBody>
-          <a:bodyPr wrap="square" lIns="0" tIns="0" rIns="0" bIns="0" rtlCol="0" anchor="ctr"/>
-          <a:lstStyle/>
-          <a:p>
-            <a:pPr marL="0" indent="0" algn="ctr">
-              <a:buNone/>
-            </a:pPr>
-            <a:r>
-              <a:rPr lang="en-US" sz="850" b="1">
-                <a:solidFill>
-                  <a:srgbClr val="071013"/>
-                </a:solidFill>
-                <a:latin typeface="Arial" pitchFamily="34" charset="0"/>
-                <a:ea typeface="Arial" pitchFamily="34" charset="-122"/>
-                <a:cs typeface="Arial" pitchFamily="34" charset="-120"/>
-              </a:rPr>
-              <a:t>1</a:t>
-            </a:r>
-            <a:endParaRPr lang="en-US" sz="850"/>
-          </a:p>
-        </p:txBody>
-      </p:sp>
-      <p:sp>
-        <p:nvSpPr>
-          <p:cNvPr id="38" name="Text 36"/>
-          <p:cNvSpPr/>
-          <p:nvPr/>
-        </p:nvSpPr>
-        <p:spPr>
-          <a:xfrm>
-            <a:off x="9171432" y="3246120"/>
-            <a:ext cx="2313432" cy="493776"/>
-          </a:xfrm>
-          <a:prstGeom prst="rect">
-            <a:avLst/>
-          </a:prstGeom>
-          <a:noFill/>
-          <a:ln/>
-        </p:spPr>
-        <p:txBody>
-          <a:bodyPr wrap="square" lIns="0" tIns="0" rIns="0" bIns="0" rtlCol="0" anchor="ctr"/>
-          <a:lstStyle/>
-          <a:p>
-            <a:pPr marL="0" indent="0">
-              <a:buNone/>
-            </a:pPr>
-            <a:r>
-              <a:rPr sz="950">
-                <a:solidFill>
-                  <a:srgbClr val="F5F7F7"/>
-                </a:solidFill>
-                <a:latin typeface="Aptos"/>
-              </a:rPr>
-              <a:t>Large screenshots are welcome</a:t>
-            </a:r>
-            <a:endParaRPr lang="en-US" sz="1120"/>
-          </a:p>
-        </p:txBody>
-      </p:sp>
-      <p:sp>
-        <p:nvSpPr>
-          <p:cNvPr id="41" name="Text 39"/>
-          <p:cNvSpPr/>
-          <p:nvPr/>
-        </p:nvSpPr>
-        <p:spPr>
-          <a:xfrm>
-            <a:off x="8805672" y="3913632"/>
-            <a:ext cx="2679192" cy="493776"/>
-          </a:xfrm>
-          <a:prstGeom prst="rect">
-            <a:avLst/>
-          </a:prstGeom>
-          <a:noFill/>
-          <a:ln/>
-        </p:spPr>
-        <p:txBody>
-          <a:bodyPr wrap="square" lIns="0" tIns="0" rIns="0" bIns="0" rtlCol="0" anchor="ctr"/>
-          <a:lstStyle/>
-          <a:p>
-            <a:pPr marL="0" indent="0">
-              <a:buNone/>
-            </a:pPr>
-            <a:r>
-              <a:rPr sz="900">
-                <a:solidFill>
-                  <a:srgbClr val="A7B4B8"/>
-                </a:solidFill>
-                <a:latin typeface="Aptos"/>
-              </a:rPr>
-              <a:t>Your final PID + predicted monster</a:t>
-            </a:r>
-            <a:r>
-              <a:rPr lang="en-GB" sz="900">
-                <a:solidFill>
-                  <a:srgbClr val="A7B4B8"/>
-                </a:solidFill>
-                <a:latin typeface="Aptos"/>
-              </a:rPr>
-              <a:t> type</a:t>
-            </a:r>
-            <a:r>
-              <a:rPr sz="900">
-                <a:solidFill>
-                  <a:srgbClr val="A7B4B8"/>
-                </a:solidFill>
-                <a:latin typeface="Aptos"/>
-              </a:rPr>
-              <a:t> list goes in the PREDICT Excel submission</a:t>
-            </a:r>
-            <a:endParaRPr lang="en-US" sz="1120"/>
-          </a:p>
-        </p:txBody>
-      </p:sp>
-      <p:sp>
-        <p:nvSpPr>
-          <p:cNvPr id="42" name="Slide Number Placeholder 0"/>
-          <p:cNvSpPr>
-            <a:spLocks noGrp="1"/>
-          </p:cNvSpPr>
-          <p:nvPr>
-            <p:ph type="sldNum" sz="quarter" idx="4294967295"/>
-          </p:nvPr>
-        </p:nvSpPr>
-        <p:spPr>
-          <a:xfrm>
-            <a:off x="11430000" y="6492240"/>
-            <a:ext cx="800000" cy="300000"/>
-          </a:xfrm>
-          <a:prstGeom prst="rect">
-            <a:avLst/>
-          </a:prstGeom>
-          <a:extLst>
-            <a:ext uri="{C572A759-6A51-4108-AA02-DFA0A04FC94B}">
-              <ma14:wrappingTextBoxFlag xmlns:ma14="http://schemas.microsoft.com/office/mac/drawingml/2011/main" xmlns="" val="0"/>
-            </a:ext>
-          </a:extLst>
-        </p:spPr>
-        <p:txBody>
-          <a:bodyPr/>
-          <a:lstStyle>
-            <a:lvl1pPr>
-              <a:defRPr sz="900">
-                <a:solidFill>
-                  <a:srgbClr val="83979D"/>
-                </a:solidFill>
-                <a:latin typeface="Aptos"/>
-                <a:ea typeface="Aptos"/>
-                <a:cs typeface="Aptos"/>
-              </a:defRPr>
-            </a:lvl1pPr>
-          </a:lstStyle>
-          <a:p>
-            <a:r>
-              <a:t>9</a:t>
-            </a:r>
-          </a:p>
-        </p:txBody>
-      </p:sp>
-      <p:grpSp>
-        <p:nvGrpSpPr>
-          <p:cNvPr id="46" name="Group 45">
-            <a:extLst>
-              <a:ext uri="{FF2B5EF4-FFF2-40B4-BE49-F238E27FC236}">
-                <a16:creationId xmlns:a16="http://schemas.microsoft.com/office/drawing/2014/main" id="{92A7DEDB-F5C1-6E09-2581-9FB0429CE8A5}"/>
-              </a:ext>
-            </a:extLst>
-          </p:cNvPr>
-          <p:cNvGrpSpPr/>
-          <p:nvPr/>
-        </p:nvGrpSpPr>
-        <p:grpSpPr>
-          <a:xfrm>
-            <a:off x="8837676" y="3257146"/>
-            <a:ext cx="228600" cy="228600"/>
-            <a:chOff x="8842248" y="3941064"/>
-            <a:chExt cx="228600" cy="228600"/>
-          </a:xfrm>
-        </p:grpSpPr>
-        <p:sp>
-          <p:nvSpPr>
-            <p:cNvPr id="47" name="Shape 37">
-              <a:extLst>
-                <a:ext uri="{FF2B5EF4-FFF2-40B4-BE49-F238E27FC236}">
-                  <a16:creationId xmlns:a16="http://schemas.microsoft.com/office/drawing/2014/main" id="{E230F825-1EC4-96FD-FF8B-0756FF0A60C5}"/>
-                </a:ext>
-              </a:extLst>
-            </p:cNvPr>
-            <p:cNvSpPr/>
-            <p:nvPr/>
-          </p:nvSpPr>
-          <p:spPr>
-            <a:xfrm>
-              <a:off x="8842248" y="3941064"/>
-              <a:ext cx="228600" cy="228600"/>
-            </a:xfrm>
-            <a:prstGeom prst="ellipse">
-              <a:avLst/>
-            </a:prstGeom>
-            <a:solidFill>
-              <a:srgbClr val="FF7A00"/>
-            </a:solidFill>
-            <a:ln w="12700">
-              <a:solidFill>
-                <a:srgbClr val="FF7A00"/>
-              </a:solidFill>
-              <a:prstDash val="solid"/>
-            </a:ln>
-          </p:spPr>
-          <p:txBody>
-            <a:bodyPr/>
-            <a:lstStyle/>
-            <a:p>
-              <a:endParaRPr/>
-            </a:p>
-          </p:txBody>
-        </p:sp>
-        <p:sp>
-          <p:nvSpPr>
-            <p:cNvPr id="48" name="Text 38">
-              <a:extLst>
-                <a:ext uri="{FF2B5EF4-FFF2-40B4-BE49-F238E27FC236}">
-                  <a16:creationId xmlns:a16="http://schemas.microsoft.com/office/drawing/2014/main" id="{72C81B1A-D542-7B91-B308-90B7758CBC2D}"/>
-                </a:ext>
-              </a:extLst>
-            </p:cNvPr>
-            <p:cNvSpPr/>
-            <p:nvPr/>
-          </p:nvSpPr>
-          <p:spPr>
-            <a:xfrm>
-              <a:off x="8842248" y="3977640"/>
-              <a:ext cx="228600" cy="118872"/>
-            </a:xfrm>
-            <a:prstGeom prst="rect">
-              <a:avLst/>
-            </a:prstGeom>
-            <a:noFill/>
-            <a:ln/>
-          </p:spPr>
-          <p:txBody>
-            <a:bodyPr wrap="square" lIns="0" tIns="0" rIns="0" bIns="0" rtlCol="0" anchor="ctr"/>
-            <a:lstStyle/>
-            <a:p>
-              <a:pPr marL="0" indent="0" algn="ctr">
-                <a:buNone/>
-              </a:pPr>
-              <a:r>
-                <a:rPr lang="en-US" sz="850" b="1">
-                  <a:solidFill>
-                    <a:srgbClr val="071013"/>
-                  </a:solidFill>
-                  <a:latin typeface="Arial" pitchFamily="34" charset="0"/>
-                  <a:ea typeface="Arial" pitchFamily="34" charset="-122"/>
-                  <a:cs typeface="Arial" pitchFamily="34" charset="-120"/>
-                </a:rPr>
-                <a:t>+</a:t>
-              </a:r>
-              <a:endParaRPr lang="en-US" sz="850"/>
-            </a:p>
-          </p:txBody>
-        </p:sp>
-      </p:grpSp>
-      <p:grpSp>
-        <p:nvGrpSpPr>
-          <p:cNvPr id="49" name="Group 48">
-            <a:extLst>
-              <a:ext uri="{FF2B5EF4-FFF2-40B4-BE49-F238E27FC236}">
-                <a16:creationId xmlns:a16="http://schemas.microsoft.com/office/drawing/2014/main" id="{99A32631-E4C1-3B2D-1E9E-3CC55D7578FF}"/>
-              </a:ext>
-            </a:extLst>
-          </p:cNvPr>
-          <p:cNvGrpSpPr/>
-          <p:nvPr/>
-        </p:nvGrpSpPr>
-        <p:grpSpPr>
-          <a:xfrm>
-            <a:off x="8845386" y="2548486"/>
-            <a:ext cx="228600" cy="228600"/>
-            <a:chOff x="8842248" y="3941064"/>
-            <a:chExt cx="228600" cy="228600"/>
-          </a:xfrm>
-        </p:grpSpPr>
-        <p:sp>
-          <p:nvSpPr>
-            <p:cNvPr id="50" name="Shape 37">
-              <a:extLst>
-                <a:ext uri="{FF2B5EF4-FFF2-40B4-BE49-F238E27FC236}">
-                  <a16:creationId xmlns:a16="http://schemas.microsoft.com/office/drawing/2014/main" id="{25C54DDC-C24A-A573-8E74-2ED7FC842019}"/>
-                </a:ext>
-              </a:extLst>
-            </p:cNvPr>
-            <p:cNvSpPr/>
-            <p:nvPr/>
-          </p:nvSpPr>
-          <p:spPr>
-            <a:xfrm>
-              <a:off x="8842248" y="3941064"/>
-              <a:ext cx="228600" cy="228600"/>
-            </a:xfrm>
-            <a:prstGeom prst="ellipse">
-              <a:avLst/>
-            </a:prstGeom>
-            <a:solidFill>
-              <a:srgbClr val="FF7A00"/>
-            </a:solidFill>
-            <a:ln w="12700">
-              <a:solidFill>
-                <a:srgbClr val="FF7A00"/>
-              </a:solidFill>
-              <a:prstDash val="solid"/>
-            </a:ln>
-          </p:spPr>
-          <p:txBody>
-            <a:bodyPr/>
-            <a:lstStyle/>
-            <a:p>
-              <a:endParaRPr/>
-            </a:p>
-          </p:txBody>
-        </p:sp>
-        <p:sp>
-          <p:nvSpPr>
-            <p:cNvPr id="51" name="Text 38">
-              <a:extLst>
-                <a:ext uri="{FF2B5EF4-FFF2-40B4-BE49-F238E27FC236}">
-                  <a16:creationId xmlns:a16="http://schemas.microsoft.com/office/drawing/2014/main" id="{9F9034CA-5864-C047-BFFB-7AFC12B83FBA}"/>
-                </a:ext>
-              </a:extLst>
-            </p:cNvPr>
-            <p:cNvSpPr/>
-            <p:nvPr/>
-          </p:nvSpPr>
-          <p:spPr>
-            <a:xfrm>
-              <a:off x="8842248" y="3977640"/>
-              <a:ext cx="228600" cy="118872"/>
-            </a:xfrm>
-            <a:prstGeom prst="rect">
-              <a:avLst/>
-            </a:prstGeom>
-            <a:noFill/>
-            <a:ln/>
-          </p:spPr>
-          <p:txBody>
-            <a:bodyPr wrap="square" lIns="0" tIns="0" rIns="0" bIns="0" rtlCol="0" anchor="ctr"/>
-            <a:lstStyle/>
-            <a:p>
-              <a:pPr marL="0" indent="0" algn="ctr">
-                <a:buNone/>
-              </a:pPr>
-              <a:r>
-                <a:rPr lang="en-US" sz="850" b="1">
-                  <a:solidFill>
-                    <a:srgbClr val="071013"/>
-                  </a:solidFill>
-                  <a:latin typeface="Arial" pitchFamily="34" charset="0"/>
-                  <a:ea typeface="Arial" pitchFamily="34" charset="-122"/>
-                  <a:cs typeface="Arial" pitchFamily="34" charset="-120"/>
-                </a:rPr>
-                <a:t>+</a:t>
-              </a:r>
-              <a:endParaRPr lang="en-US" sz="850"/>
-            </a:p>
-          </p:txBody>
-        </p:sp>
-      </p:grpSp>
-    </p:spTree>
-  </p:cSld>
-  <p:clrMapOvr>
-    <a:masterClrMapping/>
-  </p:clrMapOvr>
-</p:sld>
-</file>
-
 <file path=ppt/theme/theme1.xml><?xml version="1.0" encoding="utf-8"?>
 <a:theme xmlns:a="http://schemas.openxmlformats.org/drawingml/2006/main" name="Office Theme">
   <a:themeElements>
